--- a/Presentazione.pptx
+++ b/Presentazione.pptx
@@ -15,12 +15,12 @@
     <p:sldId id="279" r:id="rId6"/>
     <p:sldId id="280" r:id="rId7"/>
     <p:sldId id="260" r:id="rId8"/>
-    <p:sldId id="262" r:id="rId9"/>
-    <p:sldId id="263" r:id="rId10"/>
-    <p:sldId id="264" r:id="rId11"/>
-    <p:sldId id="265" r:id="rId12"/>
-    <p:sldId id="266" r:id="rId13"/>
-    <p:sldId id="267" r:id="rId14"/>
+    <p:sldId id="265" r:id="rId9"/>
+    <p:sldId id="266" r:id="rId10"/>
+    <p:sldId id="267" r:id="rId11"/>
+    <p:sldId id="262" r:id="rId12"/>
+    <p:sldId id="263" r:id="rId13"/>
+    <p:sldId id="264" r:id="rId14"/>
     <p:sldId id="268" r:id="rId15"/>
     <p:sldId id="269" r:id="rId16"/>
     <p:sldId id="270" r:id="rId17"/>
@@ -3191,7 +3191,7 @@
 
 <file path=ppt/slides/slide10.xml><?xml version="1.0" encoding="utf-8"?>
 <p:sld xmlns:a="http://schemas.openxmlformats.org/drawingml/2006/main" xmlns:r="http://schemas.openxmlformats.org/officeDocument/2006/relationships" xmlns:p="http://schemas.openxmlformats.org/presentationml/2006/main">
-  <p:cSld name="Slide 9">
+  <p:cSld name="Slide 12">
     <p:bg>
       <p:bgPr>
         <a:solidFill>
@@ -3247,7 +3247,7 @@
                 <a:ea typeface="Cambria" pitchFamily="34" charset="-122"/>
                 <a:cs typeface="Cambria" pitchFamily="34" charset="-120"/>
               </a:rPr>
-              <a:t>TpV — Visual Comparison (Scale ×4)</a:t>
+              <a:t>U-Net — Visual Comparison (Scale ×4)</a:t>
             </a:r>
             <a:endParaRPr lang="en-US" sz="3000" dirty="0"/>
           </a:p>
@@ -3286,7 +3286,7 @@
                 <a:ea typeface="Calibri" pitchFamily="34" charset="-122"/>
                 <a:cs typeface="Calibri" pitchFamily="34" charset="-120"/>
               </a:rPr>
-              <a:t>Single test image (0.png) — Ground truth vs. corrupted observation vs. TpV reconstruction (λ = 9×10⁻²)</a:t>
+              <a:t>Single test image (0.png) — Ground truth vs. U-Net reconstruction</a:t>
             </a:r>
             <a:endParaRPr lang="en-US" sz="1250" dirty="0"/>
           </a:p>
@@ -3319,7 +3319,7 @@
             <a:r>
               <a:rPr lang="en-US" sz="1350" b="1" dirty="0">
                 <a:solidFill>
-                  <a:srgbClr val="13678A"/>
+                  <a:srgbClr val="0B2545"/>
                 </a:solidFill>
                 <a:latin typeface="Calibri" pitchFamily="34" charset="0"/>
                 <a:ea typeface="Calibri" pitchFamily="34" charset="-122"/>
@@ -3347,8 +3347,8 @@
         </p:blipFill>
         <p:spPr>
           <a:xfrm>
-            <a:off x="1175004" y="1828800"/>
-            <a:ext cx="1508760" cy="1508760"/>
+            <a:off x="3396996" y="1708034"/>
+            <a:ext cx="2286000" cy="2286000"/>
           </a:xfrm>
           <a:prstGeom prst="rect">
             <a:avLst/>
@@ -3363,8 +3363,8 @@
         </p:nvSpPr>
         <p:spPr>
           <a:xfrm>
-            <a:off x="1175004" y="1828800"/>
-            <a:ext cx="1508760" cy="1508760"/>
+            <a:off x="3396996" y="1708034"/>
+            <a:ext cx="2286000" cy="2286000"/>
           </a:xfrm>
           <a:prstGeom prst="rect">
             <a:avLst/>
@@ -3392,8 +3392,8 @@
         </p:nvSpPr>
         <p:spPr>
           <a:xfrm>
-            <a:off x="548640" y="3374136"/>
-            <a:ext cx="2761488" cy="320040"/>
+            <a:off x="2985516" y="4030610"/>
+            <a:ext cx="3108960" cy="274320"/>
           </a:xfrm>
           <a:prstGeom prst="rect">
             <a:avLst/>
@@ -3409,7 +3409,7 @@
               <a:buNone/>
             </a:pPr>
             <a:r>
-              <a:rPr lang="en-US" sz="950" dirty="0">
+              <a:rPr lang="en-US" sz="1050" dirty="0">
                 <a:solidFill>
                   <a:srgbClr val="5C7285"/>
                 </a:solidFill>
@@ -3419,13 +3419,13 @@
               </a:rPr>
               <a:t>512×512 reference</a:t>
             </a:r>
-            <a:endParaRPr lang="en-US" sz="950" dirty="0"/>
+            <a:endParaRPr lang="en-US" sz="1050" dirty="0"/>
           </a:p>
         </p:txBody>
       </p:sp>
       <p:pic>
         <p:nvPicPr>
-          <p:cNvPr id="8" name="Image 1" descr="/home/claude/work/img/Noisy_image_scale_4_noise_0_005.png"/>
+          <p:cNvPr id="8" name="Image 1" descr="/home/claude/work/img2/prediction_UNet_MSE_SSIM_FL_Residual_Attention_PixelShuffle_noise005_scale4.png"/>
           <p:cNvPicPr>
             <a:picLocks noChangeAspect="1"/>
           </p:cNvPicPr>
@@ -3439,8 +3439,8 @@
         </p:blipFill>
         <p:spPr>
           <a:xfrm>
-            <a:off x="3936492" y="1828800"/>
-            <a:ext cx="1508760" cy="1508760"/>
+            <a:off x="6505956" y="1708034"/>
+            <a:ext cx="2286000" cy="2286000"/>
           </a:xfrm>
           <a:prstGeom prst="rect">
             <a:avLst/>
@@ -3455,8 +3455,8 @@
         </p:nvSpPr>
         <p:spPr>
           <a:xfrm>
-            <a:off x="3936492" y="1828800"/>
-            <a:ext cx="1508760" cy="1508760"/>
+            <a:off x="6505956" y="1708034"/>
+            <a:ext cx="2286000" cy="2286000"/>
           </a:xfrm>
           <a:prstGeom prst="rect">
             <a:avLst/>
@@ -3484,8 +3484,8 @@
         </p:nvSpPr>
         <p:spPr>
           <a:xfrm>
-            <a:off x="3310128" y="3374136"/>
-            <a:ext cx="2761488" cy="320040"/>
+            <a:off x="6094476" y="4030610"/>
+            <a:ext cx="3108960" cy="274320"/>
           </a:xfrm>
           <a:prstGeom prst="rect">
             <a:avLst/>
@@ -3501,7 +3501,7 @@
               <a:buNone/>
             </a:pPr>
             <a:r>
-              <a:rPr lang="en-US" sz="950" dirty="0">
+              <a:rPr lang="en-US" sz="1050" dirty="0">
                 <a:solidFill>
                   <a:srgbClr val="5C7285"/>
                 </a:solidFill>
@@ -3509,15 +3509,146 @@
                 <a:ea typeface="Calibri" pitchFamily="34" charset="-122"/>
                 <a:cs typeface="Calibri" pitchFamily="34" charset="-120"/>
               </a:rPr>
-              <a:t>×4, σ=0.005</a:t>
-            </a:r>
-            <a:endParaRPr lang="en-US" sz="950" dirty="0"/>
+              <a:t>PSNR 34.25 dB | SSIM 0.9212</a:t>
+            </a:r>
+            <a:endParaRPr lang="en-US" sz="1050" dirty="0"/>
+          </a:p>
+        </p:txBody>
+      </p:sp>
+      <p:sp>
+        <p:nvSpPr>
+          <p:cNvPr id="11" name="Text 7"/>
+          <p:cNvSpPr/>
+          <p:nvPr/>
+        </p:nvSpPr>
+        <p:spPr>
+          <a:xfrm>
+            <a:off x="548640" y="3977640"/>
+            <a:ext cx="5486400" cy="274320"/>
+          </a:xfrm>
+          <a:prstGeom prst="rect">
+            <a:avLst/>
+          </a:prstGeom>
+          <a:noFill/>
+          <a:ln/>
+        </p:spPr>
+        <p:txBody>
+          <a:bodyPr wrap="square" rtlCol="0" anchor="ctr"/>
+          <a:lstStyle/>
+          <a:p>
+            <a:pPr marL="0" indent="0">
+              <a:buNone/>
+            </a:pPr>
+            <a:r>
+              <a:rPr lang="en-US" sz="1350" b="1" dirty="0">
+                <a:solidFill>
+                  <a:srgbClr val="0B2545"/>
+                </a:solidFill>
+                <a:latin typeface="Calibri" pitchFamily="34" charset="0"/>
+                <a:ea typeface="Calibri" pitchFamily="34" charset="-122"/>
+                <a:cs typeface="Calibri" pitchFamily="34" charset="-120"/>
+              </a:rPr>
+              <a:t>Noise level σ = 0.01</a:t>
+            </a:r>
+            <a:endParaRPr lang="en-US" sz="1350" dirty="0"/>
           </a:p>
         </p:txBody>
       </p:sp>
       <p:pic>
         <p:nvPicPr>
-          <p:cNvPr id="11" name="Image 2" descr="/home/claude/work/img/SR_image_scale_4_noise_0_005_lambda_9_000000e-02_p_0_1_PSNR_27_03_SSIM_0_7737.png"/>
+          <p:cNvPr id="12" name="Image 2" descr="/home/claude/work/img/0.png"/>
+          <p:cNvPicPr>
+            <a:picLocks noChangeAspect="1"/>
+          </p:cNvPicPr>
+          <p:nvPr/>
+        </p:nvPicPr>
+        <p:blipFill>
+          <a:blip r:embed="rId3"/>
+          <a:stretch>
+            <a:fillRect/>
+          </a:stretch>
+        </p:blipFill>
+        <p:spPr>
+          <a:xfrm>
+            <a:off x="3396996" y="4297680"/>
+            <a:ext cx="2286000" cy="2286000"/>
+          </a:xfrm>
+          <a:prstGeom prst="rect">
+            <a:avLst/>
+          </a:prstGeom>
+        </p:spPr>
+      </p:pic>
+      <p:sp>
+        <p:nvSpPr>
+          <p:cNvPr id="13" name="Shape 8"/>
+          <p:cNvSpPr/>
+          <p:nvPr/>
+        </p:nvSpPr>
+        <p:spPr>
+          <a:xfrm>
+            <a:off x="3396996" y="4297680"/>
+            <a:ext cx="2286000" cy="2286000"/>
+          </a:xfrm>
+          <a:prstGeom prst="rect">
+            <a:avLst/>
+          </a:prstGeom>
+          <a:ln w="9525">
+            <a:solidFill>
+              <a:srgbClr val="D8E2E5"/>
+            </a:solidFill>
+            <a:prstDash val="solid"/>
+          </a:ln>
+        </p:spPr>
+        <p:txBody>
+          <a:bodyPr/>
+          <a:lstStyle/>
+          <a:p>
+            <a:endParaRPr lang="it-IT"/>
+          </a:p>
+        </p:txBody>
+      </p:sp>
+      <p:sp>
+        <p:nvSpPr>
+          <p:cNvPr id="14" name="Text 9"/>
+          <p:cNvSpPr/>
+          <p:nvPr/>
+        </p:nvSpPr>
+        <p:spPr>
+          <a:xfrm>
+            <a:off x="2985516" y="6620256"/>
+            <a:ext cx="3108960" cy="274320"/>
+          </a:xfrm>
+          <a:prstGeom prst="rect">
+            <a:avLst/>
+          </a:prstGeom>
+          <a:noFill/>
+          <a:ln/>
+        </p:spPr>
+        <p:txBody>
+          <a:bodyPr wrap="square" rtlCol="0" anchor="ctr"/>
+          <a:lstStyle/>
+          <a:p>
+            <a:pPr marL="0" indent="0" algn="ctr">
+              <a:buNone/>
+            </a:pPr>
+            <a:r>
+              <a:rPr lang="en-US" sz="1050" dirty="0">
+                <a:solidFill>
+                  <a:srgbClr val="5C7285"/>
+                </a:solidFill>
+                <a:latin typeface="Calibri" pitchFamily="34" charset="0"/>
+                <a:ea typeface="Calibri" pitchFamily="34" charset="-122"/>
+                <a:cs typeface="Calibri" pitchFamily="34" charset="-120"/>
+              </a:rPr>
+              <a:t>512×512 reference</a:t>
+            </a:r>
+            <a:endParaRPr lang="en-US" sz="1050" dirty="0"/>
+          </a:p>
+        </p:txBody>
+      </p:sp>
+      <p:pic>
+        <p:nvPicPr>
+          <p:cNvPr id="15" name="Image 3" descr="/home/claude/work/img2/prediction_UNet_MSE_SSIM_FL_Residual_Attention_PixelShuffle_noise01_scale4.png"/>
           <p:cNvPicPr>
             <a:picLocks noChangeAspect="1"/>
           </p:cNvPicPr>
@@ -3531,8 +3662,8 @@
         </p:blipFill>
         <p:spPr>
           <a:xfrm>
-            <a:off x="6697980" y="1828800"/>
-            <a:ext cx="1508760" cy="1508760"/>
+            <a:off x="6505956" y="4297680"/>
+            <a:ext cx="2286000" cy="2286000"/>
           </a:xfrm>
           <a:prstGeom prst="rect">
             <a:avLst/>
@@ -3541,14 +3672,14 @@
       </p:pic>
       <p:sp>
         <p:nvSpPr>
-          <p:cNvPr id="12" name="Shape 7"/>
-          <p:cNvSpPr/>
-          <p:nvPr/>
-        </p:nvSpPr>
-        <p:spPr>
-          <a:xfrm>
-            <a:off x="6697980" y="1828800"/>
-            <a:ext cx="1508760" cy="1508760"/>
+          <p:cNvPr id="16" name="Shape 10"/>
+          <p:cNvSpPr/>
+          <p:nvPr/>
+        </p:nvSpPr>
+        <p:spPr>
+          <a:xfrm>
+            <a:off x="6505956" y="4297680"/>
+            <a:ext cx="2286000" cy="2286000"/>
           </a:xfrm>
           <a:prstGeom prst="rect">
             <a:avLst/>
@@ -3570,14 +3701,14 @@
       </p:sp>
       <p:sp>
         <p:nvSpPr>
-          <p:cNvPr id="13" name="Text 8"/>
-          <p:cNvSpPr/>
-          <p:nvPr/>
-        </p:nvSpPr>
-        <p:spPr>
-          <a:xfrm>
-            <a:off x="6071616" y="3374136"/>
-            <a:ext cx="2761488" cy="320040"/>
+          <p:cNvPr id="17" name="Text 11"/>
+          <p:cNvSpPr/>
+          <p:nvPr/>
+        </p:nvSpPr>
+        <p:spPr>
+          <a:xfrm>
+            <a:off x="6094476" y="6620256"/>
+            <a:ext cx="3108960" cy="274320"/>
           </a:xfrm>
           <a:prstGeom prst="rect">
             <a:avLst/>
@@ -3593,7 +3724,7 @@
               <a:buNone/>
             </a:pPr>
             <a:r>
-              <a:rPr lang="en-US" sz="950" dirty="0">
+              <a:rPr lang="en-US" sz="1050" dirty="0">
                 <a:solidFill>
                   <a:srgbClr val="5C7285"/>
                 </a:solidFill>
@@ -3601,75 +3732,22 @@
                 <a:ea typeface="Calibri" pitchFamily="34" charset="-122"/>
                 <a:cs typeface="Calibri" pitchFamily="34" charset="-120"/>
               </a:rPr>
-              <a:t>PSNR 27.03 dB | SSIM 0.7737</a:t>
-            </a:r>
-            <a:endParaRPr lang="en-US" sz="950" dirty="0"/>
-          </a:p>
-        </p:txBody>
-      </p:sp>
-      <p:pic>
-        <p:nvPicPr>
-          <p:cNvPr id="14" name="Image 3" descr="/home/claude/work/img/SR_image_scale_4_noise_0_005_lambda_9_000000e-02_p_0_4_PSNR_27_28_SSIM_0_7780.png"/>
-          <p:cNvPicPr>
-            <a:picLocks noChangeAspect="1"/>
-          </p:cNvPicPr>
-          <p:nvPr/>
-        </p:nvPicPr>
-        <p:blipFill>
-          <a:blip r:embed="rId6"/>
-          <a:stretch>
-            <a:fillRect/>
-          </a:stretch>
-        </p:blipFill>
-        <p:spPr>
-          <a:xfrm>
-            <a:off x="9459468" y="1828800"/>
-            <a:ext cx="1508760" cy="1508760"/>
-          </a:xfrm>
-          <a:prstGeom prst="rect">
-            <a:avLst/>
-          </a:prstGeom>
-        </p:spPr>
-      </p:pic>
-      <p:sp>
-        <p:nvSpPr>
-          <p:cNvPr id="15" name="Shape 9"/>
-          <p:cNvSpPr/>
-          <p:nvPr/>
-        </p:nvSpPr>
-        <p:spPr>
-          <a:xfrm>
-            <a:off x="9459468" y="1828800"/>
-            <a:ext cx="1508760" cy="1508760"/>
-          </a:xfrm>
-          <a:prstGeom prst="rect">
-            <a:avLst/>
-          </a:prstGeom>
-          <a:ln w="9525">
-            <a:solidFill>
-              <a:srgbClr val="D8E2E5"/>
-            </a:solidFill>
-            <a:prstDash val="solid"/>
-          </a:ln>
-        </p:spPr>
-        <p:txBody>
-          <a:bodyPr/>
-          <a:lstStyle/>
-          <a:p>
-            <a:endParaRPr lang="it-IT"/>
-          </a:p>
-        </p:txBody>
-      </p:sp>
-      <p:sp>
-        <p:nvSpPr>
-          <p:cNvPr id="16" name="Text 10"/>
-          <p:cNvSpPr/>
-          <p:nvPr/>
-        </p:nvSpPr>
-        <p:spPr>
-          <a:xfrm>
-            <a:off x="8833104" y="3374136"/>
-            <a:ext cx="2761488" cy="320040"/>
+              <a:t>PSNR 34.00 dB | SSIM 0.9154</a:t>
+            </a:r>
+            <a:endParaRPr lang="en-US" sz="1050" dirty="0"/>
+          </a:p>
+        </p:txBody>
+      </p:sp>
+      <p:sp>
+        <p:nvSpPr>
+          <p:cNvPr id="18" name="Text 12"/>
+          <p:cNvSpPr/>
+          <p:nvPr/>
+        </p:nvSpPr>
+        <p:spPr>
+          <a:xfrm>
+            <a:off x="457200" y="6446520"/>
+            <a:ext cx="7315200" cy="274320"/>
           </a:xfrm>
           <a:prstGeom prst="rect">
             <a:avLst/>
@@ -3681,11 +3759,11 @@
           <a:bodyPr wrap="square" rtlCol="0" anchor="ctr"/>
           <a:lstStyle/>
           <a:p>
-            <a:pPr marL="0" indent="0" algn="ctr">
+            <a:pPr marL="0" indent="0">
               <a:buNone/>
             </a:pPr>
             <a:r>
-              <a:rPr lang="en-US" sz="950" dirty="0">
+              <a:rPr lang="en-US" sz="900" dirty="0">
                 <a:solidFill>
                   <a:srgbClr val="5C7285"/>
                 </a:solidFill>
@@ -3693,22 +3771,22 @@
                 <a:ea typeface="Calibri" pitchFamily="34" charset="-122"/>
                 <a:cs typeface="Calibri" pitchFamily="34" charset="-120"/>
               </a:rPr>
-              <a:t>PSNR 27.28 dB | SSIM 0.7780</a:t>
-            </a:r>
-            <a:endParaRPr lang="en-US" sz="950" dirty="0"/>
-          </a:p>
-        </p:txBody>
-      </p:sp>
-      <p:sp>
-        <p:nvSpPr>
-          <p:cNvPr id="17" name="Text 11"/>
-          <p:cNvSpPr/>
-          <p:nvPr/>
-        </p:nvSpPr>
-        <p:spPr>
-          <a:xfrm>
-            <a:off x="548640" y="3977640"/>
-            <a:ext cx="5486400" cy="274320"/>
+              <a:t>Group H  |  Computational Imaging 2025-26</a:t>
+            </a:r>
+            <a:endParaRPr lang="en-US" sz="900" dirty="0"/>
+          </a:p>
+        </p:txBody>
+      </p:sp>
+      <p:sp>
+        <p:nvSpPr>
+          <p:cNvPr id="19" name="Text 13"/>
+          <p:cNvSpPr/>
+          <p:nvPr/>
+        </p:nvSpPr>
+        <p:spPr>
+          <a:xfrm>
+            <a:off x="11274552" y="6446520"/>
+            <a:ext cx="457200" cy="274320"/>
           </a:xfrm>
           <a:prstGeom prst="rect">
             <a:avLst/>
@@ -3720,426 +3798,19 @@
           <a:bodyPr wrap="square" rtlCol="0" anchor="ctr"/>
           <a:lstStyle/>
           <a:p>
-            <a:pPr marL="0" indent="0">
+            <a:pPr marL="0" indent="0" algn="r">
               <a:buNone/>
             </a:pPr>
             <a:r>
-              <a:rPr lang="en-US" sz="1350" b="1" dirty="0">
-                <a:solidFill>
-                  <a:srgbClr val="13678A"/>
+              <a:rPr lang="en-US" sz="900" dirty="0">
+                <a:solidFill>
+                  <a:srgbClr val="5C7285"/>
                 </a:solidFill>
                 <a:latin typeface="Calibri" pitchFamily="34" charset="0"/>
                 <a:ea typeface="Calibri" pitchFamily="34" charset="-122"/>
                 <a:cs typeface="Calibri" pitchFamily="34" charset="-120"/>
               </a:rPr>
-              <a:t>Noise level σ = 0.01</a:t>
-            </a:r>
-            <a:endParaRPr lang="en-US" sz="1350" dirty="0"/>
-          </a:p>
-        </p:txBody>
-      </p:sp>
-      <p:pic>
-        <p:nvPicPr>
-          <p:cNvPr id="18" name="Image 4" descr="/home/claude/work/img/0.png"/>
-          <p:cNvPicPr>
-            <a:picLocks noChangeAspect="1"/>
-          </p:cNvPicPr>
-          <p:nvPr/>
-        </p:nvPicPr>
-        <p:blipFill>
-          <a:blip r:embed="rId3"/>
-          <a:stretch>
-            <a:fillRect/>
-          </a:stretch>
-        </p:blipFill>
-        <p:spPr>
-          <a:xfrm>
-            <a:off x="1175004" y="4297680"/>
-            <a:ext cx="1508760" cy="1508760"/>
-          </a:xfrm>
-          <a:prstGeom prst="rect">
-            <a:avLst/>
-          </a:prstGeom>
-        </p:spPr>
-      </p:pic>
-      <p:sp>
-        <p:nvSpPr>
-          <p:cNvPr id="19" name="Shape 12"/>
-          <p:cNvSpPr/>
-          <p:nvPr/>
-        </p:nvSpPr>
-        <p:spPr>
-          <a:xfrm>
-            <a:off x="1175004" y="4297680"/>
-            <a:ext cx="1508760" cy="1508760"/>
-          </a:xfrm>
-          <a:prstGeom prst="rect">
-            <a:avLst/>
-          </a:prstGeom>
-          <a:ln w="9525">
-            <a:solidFill>
-              <a:srgbClr val="D8E2E5"/>
-            </a:solidFill>
-            <a:prstDash val="solid"/>
-          </a:ln>
-        </p:spPr>
-        <p:txBody>
-          <a:bodyPr/>
-          <a:lstStyle/>
-          <a:p>
-            <a:endParaRPr lang="it-IT"/>
-          </a:p>
-        </p:txBody>
-      </p:sp>
-      <p:sp>
-        <p:nvSpPr>
-          <p:cNvPr id="20" name="Text 13"/>
-          <p:cNvSpPr/>
-          <p:nvPr/>
-        </p:nvSpPr>
-        <p:spPr>
-          <a:xfrm>
-            <a:off x="548640" y="5843016"/>
-            <a:ext cx="2761488" cy="320040"/>
-          </a:xfrm>
-          <a:prstGeom prst="rect">
-            <a:avLst/>
-          </a:prstGeom>
-          <a:noFill/>
-          <a:ln/>
-        </p:spPr>
-        <p:txBody>
-          <a:bodyPr wrap="square" rtlCol="0" anchor="ctr"/>
-          <a:lstStyle/>
-          <a:p>
-            <a:pPr marL="0" indent="0" algn="ctr">
-              <a:buNone/>
-            </a:pPr>
-            <a:r>
-              <a:rPr lang="en-US" sz="950" dirty="0">
-                <a:solidFill>
-                  <a:srgbClr val="5C7285"/>
-                </a:solidFill>
-                <a:latin typeface="Calibri" pitchFamily="34" charset="0"/>
-                <a:ea typeface="Calibri" pitchFamily="34" charset="-122"/>
-                <a:cs typeface="Calibri" pitchFamily="34" charset="-120"/>
-              </a:rPr>
-              <a:t>512×512 reference</a:t>
-            </a:r>
-            <a:endParaRPr lang="en-US" sz="950" dirty="0"/>
-          </a:p>
-        </p:txBody>
-      </p:sp>
-      <p:pic>
-        <p:nvPicPr>
-          <p:cNvPr id="21" name="Image 5" descr="/home/claude/work/img/Noisy_image_scale_4_noise_0_01.png"/>
-          <p:cNvPicPr>
-            <a:picLocks noChangeAspect="1"/>
-          </p:cNvPicPr>
-          <p:nvPr/>
-        </p:nvPicPr>
-        <p:blipFill>
-          <a:blip r:embed="rId7"/>
-          <a:stretch>
-            <a:fillRect/>
-          </a:stretch>
-        </p:blipFill>
-        <p:spPr>
-          <a:xfrm>
-            <a:off x="3936492" y="4297680"/>
-            <a:ext cx="1508760" cy="1508760"/>
-          </a:xfrm>
-          <a:prstGeom prst="rect">
-            <a:avLst/>
-          </a:prstGeom>
-        </p:spPr>
-      </p:pic>
-      <p:sp>
-        <p:nvSpPr>
-          <p:cNvPr id="22" name="Shape 14"/>
-          <p:cNvSpPr/>
-          <p:nvPr/>
-        </p:nvSpPr>
-        <p:spPr>
-          <a:xfrm>
-            <a:off x="3936492" y="4297680"/>
-            <a:ext cx="1508760" cy="1508760"/>
-          </a:xfrm>
-          <a:prstGeom prst="rect">
-            <a:avLst/>
-          </a:prstGeom>
-          <a:ln w="9525">
-            <a:solidFill>
-              <a:srgbClr val="D8E2E5"/>
-            </a:solidFill>
-            <a:prstDash val="solid"/>
-          </a:ln>
-        </p:spPr>
-        <p:txBody>
-          <a:bodyPr/>
-          <a:lstStyle/>
-          <a:p>
-            <a:endParaRPr lang="it-IT"/>
-          </a:p>
-        </p:txBody>
-      </p:sp>
-      <p:sp>
-        <p:nvSpPr>
-          <p:cNvPr id="23" name="Text 15"/>
-          <p:cNvSpPr/>
-          <p:nvPr/>
-        </p:nvSpPr>
-        <p:spPr>
-          <a:xfrm>
-            <a:off x="3310128" y="5843016"/>
-            <a:ext cx="2761488" cy="320040"/>
-          </a:xfrm>
-          <a:prstGeom prst="rect">
-            <a:avLst/>
-          </a:prstGeom>
-          <a:noFill/>
-          <a:ln/>
-        </p:spPr>
-        <p:txBody>
-          <a:bodyPr wrap="square" rtlCol="0" anchor="ctr"/>
-          <a:lstStyle/>
-          <a:p>
-            <a:pPr marL="0" indent="0" algn="ctr">
-              <a:buNone/>
-            </a:pPr>
-            <a:r>
-              <a:rPr lang="en-US" sz="950" dirty="0">
-                <a:solidFill>
-                  <a:srgbClr val="5C7285"/>
-                </a:solidFill>
-                <a:latin typeface="Calibri" pitchFamily="34" charset="0"/>
-                <a:ea typeface="Calibri" pitchFamily="34" charset="-122"/>
-                <a:cs typeface="Calibri" pitchFamily="34" charset="-120"/>
-              </a:rPr>
-              <a:t>×4, σ=0.01</a:t>
-            </a:r>
-            <a:endParaRPr lang="en-US" sz="950" dirty="0"/>
-          </a:p>
-        </p:txBody>
-      </p:sp>
-      <p:pic>
-        <p:nvPicPr>
-          <p:cNvPr id="24" name="Image 6" descr="/home/claude/work/img/SR_image_scale_4_noise_0_01_lambda_9_000000e-02_p_0_1_PSNR_27_06_SSIM_0_7709.png"/>
-          <p:cNvPicPr>
-            <a:picLocks noChangeAspect="1"/>
-          </p:cNvPicPr>
-          <p:nvPr/>
-        </p:nvPicPr>
-        <p:blipFill>
-          <a:blip r:embed="rId8"/>
-          <a:stretch>
-            <a:fillRect/>
-          </a:stretch>
-        </p:blipFill>
-        <p:spPr>
-          <a:xfrm>
-            <a:off x="6697980" y="4297680"/>
-            <a:ext cx="1508760" cy="1508760"/>
-          </a:xfrm>
-          <a:prstGeom prst="rect">
-            <a:avLst/>
-          </a:prstGeom>
-        </p:spPr>
-      </p:pic>
-      <p:sp>
-        <p:nvSpPr>
-          <p:cNvPr id="25" name="Shape 16"/>
-          <p:cNvSpPr/>
-          <p:nvPr/>
-        </p:nvSpPr>
-        <p:spPr>
-          <a:xfrm>
-            <a:off x="6697980" y="4297680"/>
-            <a:ext cx="1508760" cy="1508760"/>
-          </a:xfrm>
-          <a:prstGeom prst="rect">
-            <a:avLst/>
-          </a:prstGeom>
-          <a:ln w="9525">
-            <a:solidFill>
-              <a:srgbClr val="D8E2E5"/>
-            </a:solidFill>
-            <a:prstDash val="solid"/>
-          </a:ln>
-        </p:spPr>
-        <p:txBody>
-          <a:bodyPr/>
-          <a:lstStyle/>
-          <a:p>
-            <a:endParaRPr lang="it-IT"/>
-          </a:p>
-        </p:txBody>
-      </p:sp>
-      <p:sp>
-        <p:nvSpPr>
-          <p:cNvPr id="26" name="Text 17"/>
-          <p:cNvSpPr/>
-          <p:nvPr/>
-        </p:nvSpPr>
-        <p:spPr>
-          <a:xfrm>
-            <a:off x="6071616" y="5843016"/>
-            <a:ext cx="2761488" cy="320040"/>
-          </a:xfrm>
-          <a:prstGeom prst="rect">
-            <a:avLst/>
-          </a:prstGeom>
-          <a:noFill/>
-          <a:ln/>
-        </p:spPr>
-        <p:txBody>
-          <a:bodyPr wrap="square" rtlCol="0" anchor="ctr"/>
-          <a:lstStyle/>
-          <a:p>
-            <a:pPr marL="0" indent="0" algn="ctr">
-              <a:buNone/>
-            </a:pPr>
-            <a:r>
-              <a:rPr lang="en-US" sz="950" dirty="0">
-                <a:solidFill>
-                  <a:srgbClr val="5C7285"/>
-                </a:solidFill>
-                <a:latin typeface="Calibri" pitchFamily="34" charset="0"/>
-                <a:ea typeface="Calibri" pitchFamily="34" charset="-122"/>
-                <a:cs typeface="Calibri" pitchFamily="34" charset="-120"/>
-              </a:rPr>
-              <a:t>PSNR 27.06 dB | SSIM 0.7709</a:t>
-            </a:r>
-            <a:endParaRPr lang="en-US" sz="950" dirty="0"/>
-          </a:p>
-        </p:txBody>
-      </p:sp>
-      <p:pic>
-        <p:nvPicPr>
-          <p:cNvPr id="27" name="Image 7" descr="/home/claude/work/img/SR_image_scale_4_noise_0_01_lambda_9_000000e-02_p_0_4_PSNR_27_24_SSIM_0_7737.png"/>
-          <p:cNvPicPr>
-            <a:picLocks noChangeAspect="1"/>
-          </p:cNvPicPr>
-          <p:nvPr/>
-        </p:nvPicPr>
-        <p:blipFill>
-          <a:blip r:embed="rId9"/>
-          <a:stretch>
-            <a:fillRect/>
-          </a:stretch>
-        </p:blipFill>
-        <p:spPr>
-          <a:xfrm>
-            <a:off x="9459468" y="4297680"/>
-            <a:ext cx="1508760" cy="1508760"/>
-          </a:xfrm>
-          <a:prstGeom prst="rect">
-            <a:avLst/>
-          </a:prstGeom>
-        </p:spPr>
-      </p:pic>
-      <p:sp>
-        <p:nvSpPr>
-          <p:cNvPr id="28" name="Shape 18"/>
-          <p:cNvSpPr/>
-          <p:nvPr/>
-        </p:nvSpPr>
-        <p:spPr>
-          <a:xfrm>
-            <a:off x="9459468" y="4297680"/>
-            <a:ext cx="1508760" cy="1508760"/>
-          </a:xfrm>
-          <a:prstGeom prst="rect">
-            <a:avLst/>
-          </a:prstGeom>
-          <a:ln w="9525">
-            <a:solidFill>
-              <a:srgbClr val="D8E2E5"/>
-            </a:solidFill>
-            <a:prstDash val="solid"/>
-          </a:ln>
-        </p:spPr>
-        <p:txBody>
-          <a:bodyPr/>
-          <a:lstStyle/>
-          <a:p>
-            <a:endParaRPr lang="it-IT"/>
-          </a:p>
-        </p:txBody>
-      </p:sp>
-      <p:sp>
-        <p:nvSpPr>
-          <p:cNvPr id="29" name="Text 19"/>
-          <p:cNvSpPr/>
-          <p:nvPr/>
-        </p:nvSpPr>
-        <p:spPr>
-          <a:xfrm>
-            <a:off x="8833104" y="5843016"/>
-            <a:ext cx="2761488" cy="320040"/>
-          </a:xfrm>
-          <a:prstGeom prst="rect">
-            <a:avLst/>
-          </a:prstGeom>
-          <a:noFill/>
-          <a:ln/>
-        </p:spPr>
-        <p:txBody>
-          <a:bodyPr wrap="square" rtlCol="0" anchor="ctr"/>
-          <a:lstStyle/>
-          <a:p>
-            <a:pPr marL="0" indent="0" algn="ctr">
-              <a:buNone/>
-            </a:pPr>
-            <a:r>
-              <a:rPr lang="en-US" sz="950" dirty="0">
-                <a:solidFill>
-                  <a:srgbClr val="5C7285"/>
-                </a:solidFill>
-                <a:latin typeface="Calibri" pitchFamily="34" charset="0"/>
-                <a:ea typeface="Calibri" pitchFamily="34" charset="-122"/>
-                <a:cs typeface="Calibri" pitchFamily="34" charset="-120"/>
-              </a:rPr>
-              <a:t>PSNR 27.24 dB | SSIM 0.7737</a:t>
-            </a:r>
-            <a:endParaRPr lang="en-US" sz="950" dirty="0"/>
-          </a:p>
-        </p:txBody>
-      </p:sp>
-      <p:sp>
-        <p:nvSpPr>
-          <p:cNvPr id="30" name="Text 20"/>
-          <p:cNvSpPr/>
-          <p:nvPr/>
-        </p:nvSpPr>
-        <p:spPr>
-          <a:xfrm>
-            <a:off x="457200" y="6446520"/>
-            <a:ext cx="7315200" cy="274320"/>
-          </a:xfrm>
-          <a:prstGeom prst="rect">
-            <a:avLst/>
-          </a:prstGeom>
-          <a:noFill/>
-          <a:ln/>
-        </p:spPr>
-        <p:txBody>
-          <a:bodyPr wrap="square" rtlCol="0" anchor="ctr"/>
-          <a:lstStyle/>
-          <a:p>
-            <a:pPr marL="0" indent="0">
-              <a:buNone/>
-            </a:pPr>
-            <a:r>
-              <a:rPr lang="en-US" sz="900" dirty="0">
-                <a:solidFill>
-                  <a:srgbClr val="5C7285"/>
-                </a:solidFill>
-                <a:latin typeface="Calibri" pitchFamily="34" charset="0"/>
-                <a:ea typeface="Calibri" pitchFamily="34" charset="-122"/>
-                <a:cs typeface="Calibri" pitchFamily="34" charset="-120"/>
-              </a:rPr>
-              <a:t>Group H  |  Computational Imaging 2025-26</a:t>
+              <a:t>12</a:t>
             </a:r>
             <a:endParaRPr lang="en-US" sz="900" dirty="0"/>
           </a:p>
@@ -4147,49 +3818,10 @@
       </p:sp>
       <p:sp>
         <p:nvSpPr>
-          <p:cNvPr id="31" name="Text 21"/>
-          <p:cNvSpPr/>
-          <p:nvPr/>
-        </p:nvSpPr>
-        <p:spPr>
-          <a:xfrm>
-            <a:off x="11274552" y="6446520"/>
-            <a:ext cx="457200" cy="274320"/>
-          </a:xfrm>
-          <a:prstGeom prst="rect">
-            <a:avLst/>
-          </a:prstGeom>
-          <a:noFill/>
-          <a:ln/>
-        </p:spPr>
-        <p:txBody>
-          <a:bodyPr wrap="square" rtlCol="0" anchor="ctr"/>
-          <a:lstStyle/>
-          <a:p>
-            <a:pPr marL="0" indent="0" algn="r">
-              <a:buNone/>
-            </a:pPr>
-            <a:r>
-              <a:rPr lang="en-US" sz="900" dirty="0">
-                <a:solidFill>
-                  <a:srgbClr val="5C7285"/>
-                </a:solidFill>
-                <a:latin typeface="Calibri" pitchFamily="34" charset="0"/>
-                <a:ea typeface="Calibri" pitchFamily="34" charset="-122"/>
-                <a:cs typeface="Calibri" pitchFamily="34" charset="-120"/>
-              </a:rPr>
-              <a:t>9</a:t>
-            </a:r>
-            <a:endParaRPr lang="en-US" sz="900" dirty="0"/>
-          </a:p>
-        </p:txBody>
-      </p:sp>
-      <p:sp>
-        <p:nvSpPr>
-          <p:cNvPr id="33" name="object 9">
+          <p:cNvPr id="21" name="object 9">
             <a:extLst>
               <a:ext uri="{FF2B5EF4-FFF2-40B4-BE49-F238E27FC236}">
-                <a16:creationId xmlns:a16="http://schemas.microsoft.com/office/drawing/2014/main" id="{DBD61B10-B1E2-4AFB-B373-3FEF49A33E17}"/>
+                <a16:creationId xmlns:a16="http://schemas.microsoft.com/office/drawing/2014/main" id="{964A8F11-0F4C-8ABC-FA4A-7D38A973C5C0}"/>
               </a:ext>
             </a:extLst>
           </p:cNvPr>
@@ -4205,7 +3837,7 @@
             <a:avLst/>
           </a:prstGeom>
           <a:blipFill>
-            <a:blip r:embed="rId10" cstate="print"/>
+            <a:blip r:embed="rId6" cstate="print"/>
             <a:stretch>
               <a:fillRect/>
             </a:stretch>
@@ -4231,7 +3863,7 @@
 
 <file path=ppt/slides/slide11.xml><?xml version="1.0" encoding="utf-8"?>
 <p:sld xmlns:a="http://schemas.openxmlformats.org/drawingml/2006/main" xmlns:r="http://schemas.openxmlformats.org/officeDocument/2006/relationships" xmlns:p="http://schemas.openxmlformats.org/presentationml/2006/main">
-  <p:cSld name="Slide 10">
+  <p:cSld name="Slide 7">
     <p:bg>
       <p:bgPr>
         <a:solidFill>
@@ -4287,7 +3919,7 @@
                 <a:ea typeface="Cambria" pitchFamily="34" charset="-122"/>
                 <a:cs typeface="Cambria" pitchFamily="34" charset="-120"/>
               </a:rPr>
-              <a:t>End-to-End (U-Net) — Quantitative Results</a:t>
+              <a:t>TpV — Quantitative Results</a:t>
             </a:r>
             <a:endParaRPr lang="en-US" sz="3000" dirty="0"/>
           </a:p>
@@ -4326,7 +3958,7 @@
                 <a:ea typeface="Calibri" pitchFamily="34" charset="-122"/>
                 <a:cs typeface="Calibri" pitchFamily="34" charset="-120"/>
               </a:rPr>
-              <a:t>Average PSNR / SSIM on the first batch of test set, and on the single reference image 0.png (Attention U-Net, 8 epochs)</a:t>
+              <a:t>Average PSNR / SSIM on the first batch of test set (Chambolle-Pock, 150 iterations, best λ = 9×10⁻²)</a:t>
             </a:r>
             <a:endParaRPr lang="en-US" sz="1300" dirty="0"/>
           </a:p>
@@ -4334,7 +3966,7 @@
       </p:sp>
       <p:graphicFrame>
         <p:nvGraphicFramePr>
-          <p:cNvPr id="11" name="Table 0"/>
+          <p:cNvPr id="8" name="Table 0"/>
           <p:cNvGraphicFramePr>
             <a:graphicFrameLocks noGrp="1"/>
           </p:cNvGraphicFramePr>
@@ -4394,7 +4026,7 @@
                         <a:buNone/>
                       </a:pPr>
                       <a:r>
-                        <a:rPr lang="en-US" sz="1350" b="1" dirty="0">
+                        <a:rPr lang="en-US" sz="1400" b="1" dirty="0">
                           <a:solidFill>
                             <a:srgbClr val="FFFFFF"/>
                           </a:solidFill>
@@ -4404,7 +4036,7 @@
                         </a:rPr>
                         <a:t>Scale</a:t>
                       </a:r>
-                      <a:endParaRPr lang="en-US" sz="1350" dirty="0">
+                      <a:endParaRPr lang="en-US" sz="1400" dirty="0">
                         <a:latin typeface="Calibri" charset="0"/>
                         <a:ea typeface="Calibri" charset="0"/>
                         <a:cs typeface="Calibri" charset="0"/>
@@ -4449,7 +4081,7 @@
                       <a:tailEnd type="none" w="med" len="med"/>
                     </a:lnB>
                     <a:solidFill>
-                      <a:srgbClr val="0B2545"/>
+                      <a:srgbClr val="13678A"/>
                     </a:solidFill>
                   </a:tcPr>
                 </a:tc>
@@ -4462,7 +4094,7 @@
                         <a:buNone/>
                       </a:pPr>
                       <a:r>
-                        <a:rPr lang="en-US" sz="1350" b="1" dirty="0">
+                        <a:rPr lang="en-US" sz="1400" b="1" dirty="0">
                           <a:solidFill>
                             <a:srgbClr val="FFFFFF"/>
                           </a:solidFill>
@@ -4472,7 +4104,7 @@
                         </a:rPr>
                         <a:t>Noise σ</a:t>
                       </a:r>
-                      <a:endParaRPr lang="en-US" sz="1350" dirty="0">
+                      <a:endParaRPr lang="en-US" sz="1400" dirty="0">
                         <a:latin typeface="Calibri" charset="0"/>
                         <a:ea typeface="Calibri" charset="0"/>
                         <a:cs typeface="Calibri" charset="0"/>
@@ -4517,7 +4149,7 @@
                       <a:tailEnd type="none" w="med" len="med"/>
                     </a:lnB>
                     <a:solidFill>
-                      <a:srgbClr val="0B2545"/>
+                      <a:srgbClr val="13678A"/>
                     </a:solidFill>
                   </a:tcPr>
                 </a:tc>
@@ -4530,7 +4162,7 @@
                         <a:buNone/>
                       </a:pPr>
                       <a:r>
-                        <a:rPr lang="en-US" sz="1350" b="1" dirty="0">
+                        <a:rPr lang="en-US" sz="1400" b="1" dirty="0">
                           <a:solidFill>
                             <a:srgbClr val="FFFFFF"/>
                           </a:solidFill>
@@ -4538,9 +4170,9 @@
                           <a:ea typeface="Calibri" pitchFamily="34" charset="-122"/>
                           <a:cs typeface="Calibri" pitchFamily="34" charset="-120"/>
                         </a:rPr>
-                        <a:t>Test set (PSNR / SSIM)</a:t>
+                        <a:t>p = 0.1  (PSNR / SSIM)</a:t>
                       </a:r>
-                      <a:endParaRPr lang="en-US" sz="1350" dirty="0">
+                      <a:endParaRPr lang="en-US" sz="1400" dirty="0">
                         <a:latin typeface="Calibri" charset="0"/>
                         <a:ea typeface="Calibri" charset="0"/>
                         <a:cs typeface="Calibri" charset="0"/>
@@ -4585,7 +4217,7 @@
                       <a:tailEnd type="none" w="med" len="med"/>
                     </a:lnB>
                     <a:solidFill>
-                      <a:srgbClr val="0B2545"/>
+                      <a:srgbClr val="13678A"/>
                     </a:solidFill>
                   </a:tcPr>
                 </a:tc>
@@ -4598,7 +4230,7 @@
                         <a:buNone/>
                       </a:pPr>
                       <a:r>
-                        <a:rPr lang="en-US" sz="1350" b="1" dirty="0">
+                        <a:rPr lang="en-US" sz="1400" b="1" dirty="0">
                           <a:solidFill>
                             <a:srgbClr val="FFFFFF"/>
                           </a:solidFill>
@@ -4606,9 +4238,9 @@
                           <a:ea typeface="Calibri" pitchFamily="34" charset="-122"/>
                           <a:cs typeface="Calibri" pitchFamily="34" charset="-120"/>
                         </a:rPr>
-                        <a:t>0.png (PSNR / SSIM)</a:t>
+                        <a:t>p = 0.4  (PSNR / SSIM)</a:t>
                       </a:r>
-                      <a:endParaRPr lang="en-US" sz="1350" dirty="0">
+                      <a:endParaRPr lang="en-US" sz="1400" dirty="0">
                         <a:latin typeface="Calibri" charset="0"/>
                         <a:ea typeface="Calibri" charset="0"/>
                         <a:cs typeface="Calibri" charset="0"/>
@@ -4653,7 +4285,7 @@
                       <a:tailEnd type="none" w="med" len="med"/>
                     </a:lnB>
                     <a:solidFill>
-                      <a:srgbClr val="0B2545"/>
+                      <a:srgbClr val="13678A"/>
                     </a:solidFill>
                   </a:tcPr>
                 </a:tc>
@@ -4673,7 +4305,7 @@
                         <a:buNone/>
                       </a:pPr>
                       <a:r>
-                        <a:rPr lang="en-US" sz="1350" dirty="0">
+                        <a:rPr lang="en-US" sz="1400" dirty="0">
                           <a:solidFill>
                             <a:srgbClr val="1B2A3A"/>
                           </a:solidFill>
@@ -4683,7 +4315,7 @@
                         </a:rPr>
                         <a:t>×2</a:t>
                       </a:r>
-                      <a:endParaRPr lang="en-US" sz="1350" dirty="0">
+                      <a:endParaRPr lang="en-US" sz="1400" dirty="0">
                         <a:latin typeface="Calibri" charset="0"/>
                         <a:ea typeface="Calibri" charset="0"/>
                         <a:cs typeface="Calibri" charset="0"/>
@@ -4738,7 +4370,7 @@
                         <a:buNone/>
                       </a:pPr>
                       <a:r>
-                        <a:rPr lang="en-US" sz="1350" dirty="0">
+                        <a:rPr lang="en-US" sz="1400" dirty="0">
                           <a:solidFill>
                             <a:srgbClr val="1B2A3A"/>
                           </a:solidFill>
@@ -4748,7 +4380,7 @@
                         </a:rPr>
                         <a:t>0.005</a:t>
                       </a:r>
-                      <a:endParaRPr lang="en-US" sz="1350" dirty="0">
+                      <a:endParaRPr lang="en-US" sz="1400" dirty="0">
                         <a:latin typeface="Calibri" charset="0"/>
                         <a:ea typeface="Calibri" charset="0"/>
                         <a:cs typeface="Calibri" charset="0"/>
@@ -4803,7 +4435,7 @@
                         <a:buNone/>
                       </a:pPr>
                       <a:r>
-                        <a:rPr lang="en-US" sz="1350" dirty="0">
+                        <a:rPr lang="en-US" sz="1400" dirty="0">
                           <a:solidFill>
                             <a:srgbClr val="1B2A3A"/>
                           </a:solidFill>
@@ -4811,9 +4443,9 @@
                           <a:ea typeface="Calibri" pitchFamily="34" charset="-122"/>
                           <a:cs typeface="Calibri" pitchFamily="34" charset="-120"/>
                         </a:rPr>
-                        <a:t>33.19 dB / 0.9460</a:t>
+                        <a:t>31.06 dB / 0.8956</a:t>
                       </a:r>
-                      <a:endParaRPr lang="en-US" sz="1350" dirty="0">
+                      <a:endParaRPr lang="en-US" sz="1400" dirty="0">
                         <a:latin typeface="Calibri" charset="0"/>
                         <a:ea typeface="Calibri" charset="0"/>
                         <a:cs typeface="Calibri" charset="0"/>
@@ -4868,7 +4500,7 @@
                         <a:buNone/>
                       </a:pPr>
                       <a:r>
-                        <a:rPr lang="en-US" sz="1350" dirty="0">
+                        <a:rPr lang="en-US" sz="1400" dirty="0">
                           <a:solidFill>
                             <a:srgbClr val="1B2A3A"/>
                           </a:solidFill>
@@ -4876,9 +4508,9 @@
                           <a:ea typeface="Calibri" pitchFamily="34" charset="-122"/>
                           <a:cs typeface="Calibri" pitchFamily="34" charset="-120"/>
                         </a:rPr>
-                        <a:t>33.57 dB / 0.9487</a:t>
+                        <a:t>31.32 dB / 0.8932</a:t>
                       </a:r>
-                      <a:endParaRPr lang="en-US" sz="1350" dirty="0">
+                      <a:endParaRPr lang="en-US" sz="1400" dirty="0">
                         <a:latin typeface="Calibri" charset="0"/>
                         <a:ea typeface="Calibri" charset="0"/>
                         <a:cs typeface="Calibri" charset="0"/>
@@ -4940,7 +4572,7 @@
                         <a:buNone/>
                       </a:pPr>
                       <a:r>
-                        <a:rPr lang="en-US" sz="1350" dirty="0">
+                        <a:rPr lang="en-US" sz="1400" dirty="0">
                           <a:solidFill>
                             <a:srgbClr val="1B2A3A"/>
                           </a:solidFill>
@@ -4950,7 +4582,7 @@
                         </a:rPr>
                         <a:t>×2</a:t>
                       </a:r>
-                      <a:endParaRPr lang="en-US" sz="1350" dirty="0">
+                      <a:endParaRPr lang="en-US" sz="1400" dirty="0">
                         <a:latin typeface="Calibri" charset="0"/>
                         <a:ea typeface="Calibri" charset="0"/>
                         <a:cs typeface="Calibri" charset="0"/>
@@ -5005,7 +4637,7 @@
                         <a:buNone/>
                       </a:pPr>
                       <a:r>
-                        <a:rPr lang="en-US" sz="1350" dirty="0">
+                        <a:rPr lang="en-US" sz="1400" dirty="0">
                           <a:solidFill>
                             <a:srgbClr val="1B2A3A"/>
                           </a:solidFill>
@@ -5015,7 +4647,7 @@
                         </a:rPr>
                         <a:t>0.01</a:t>
                       </a:r>
-                      <a:endParaRPr lang="en-US" sz="1350" dirty="0">
+                      <a:endParaRPr lang="en-US" sz="1400" dirty="0">
                         <a:latin typeface="Calibri" charset="0"/>
                         <a:ea typeface="Calibri" charset="0"/>
                         <a:cs typeface="Calibri" charset="0"/>
@@ -5070,7 +4702,7 @@
                         <a:buNone/>
                       </a:pPr>
                       <a:r>
-                        <a:rPr lang="en-US" sz="1350" dirty="0">
+                        <a:rPr lang="en-US" sz="1400" dirty="0">
                           <a:solidFill>
                             <a:srgbClr val="1B2A3A"/>
                           </a:solidFill>
@@ -5078,9 +4710,9 @@
                           <a:ea typeface="Calibri" pitchFamily="34" charset="-122"/>
                           <a:cs typeface="Calibri" pitchFamily="34" charset="-120"/>
                         </a:rPr>
-                        <a:t>39.78 dB / 0.9723</a:t>
+                        <a:t>30.88 dB / 0.8870</a:t>
                       </a:r>
-                      <a:endParaRPr lang="en-US" sz="1350" dirty="0">
+                      <a:endParaRPr lang="en-US" sz="1400" dirty="0">
                         <a:latin typeface="Calibri" charset="0"/>
                         <a:ea typeface="Calibri" charset="0"/>
                         <a:cs typeface="Calibri" charset="0"/>
@@ -5135,7 +4767,7 @@
                         <a:buNone/>
                       </a:pPr>
                       <a:r>
-                        <a:rPr lang="en-US" sz="1350" dirty="0">
+                        <a:rPr lang="en-US" sz="1400" dirty="0">
                           <a:solidFill>
                             <a:srgbClr val="1B2A3A"/>
                           </a:solidFill>
@@ -5143,9 +4775,9 @@
                           <a:ea typeface="Calibri" pitchFamily="34" charset="-122"/>
                           <a:cs typeface="Calibri" pitchFamily="34" charset="-120"/>
                         </a:rPr>
-                        <a:t>39.90 dB / 0.9734</a:t>
+                        <a:t>31.19 dB / 0.8882</a:t>
                       </a:r>
-                      <a:endParaRPr lang="en-US" sz="1350" dirty="0">
+                      <a:endParaRPr lang="en-US" sz="1400" dirty="0">
                         <a:latin typeface="Calibri" charset="0"/>
                         <a:ea typeface="Calibri" charset="0"/>
                         <a:cs typeface="Calibri" charset="0"/>
@@ -5207,7 +4839,7 @@
                         <a:buNone/>
                       </a:pPr>
                       <a:r>
-                        <a:rPr lang="en-US" sz="1350" dirty="0">
+                        <a:rPr lang="en-US" sz="1400" dirty="0">
                           <a:solidFill>
                             <a:srgbClr val="1B2A3A"/>
                           </a:solidFill>
@@ -5217,7 +4849,7 @@
                         </a:rPr>
                         <a:t>×4</a:t>
                       </a:r>
-                      <a:endParaRPr lang="en-US" sz="1350" dirty="0">
+                      <a:endParaRPr lang="en-US" sz="1400" dirty="0">
                         <a:latin typeface="Calibri" charset="0"/>
                         <a:ea typeface="Calibri" charset="0"/>
                         <a:cs typeface="Calibri" charset="0"/>
@@ -5272,7 +4904,7 @@
                         <a:buNone/>
                       </a:pPr>
                       <a:r>
-                        <a:rPr lang="en-US" sz="1350" dirty="0">
+                        <a:rPr lang="en-US" sz="1400" dirty="0">
                           <a:solidFill>
                             <a:srgbClr val="1B2A3A"/>
                           </a:solidFill>
@@ -5282,7 +4914,7 @@
                         </a:rPr>
                         <a:t>0.005</a:t>
                       </a:r>
-                      <a:endParaRPr lang="en-US" sz="1350" dirty="0">
+                      <a:endParaRPr lang="en-US" sz="1400" dirty="0">
                         <a:latin typeface="Calibri" charset="0"/>
                         <a:ea typeface="Calibri" charset="0"/>
                         <a:cs typeface="Calibri" charset="0"/>
@@ -5337,7 +4969,7 @@
                         <a:buNone/>
                       </a:pPr>
                       <a:r>
-                        <a:rPr lang="en-US" sz="1350" dirty="0">
+                        <a:rPr lang="en-US" sz="1400" dirty="0">
                           <a:solidFill>
                             <a:srgbClr val="1B2A3A"/>
                           </a:solidFill>
@@ -5345,9 +4977,9 @@
                           <a:ea typeface="Calibri" pitchFamily="34" charset="-122"/>
                           <a:cs typeface="Calibri" pitchFamily="34" charset="-120"/>
                         </a:rPr>
-                        <a:t>33.98 dB / 0.9199</a:t>
+                        <a:t>26.85 dB / 0.7790</a:t>
                       </a:r>
-                      <a:endParaRPr lang="en-US" sz="1350" dirty="0">
+                      <a:endParaRPr lang="en-US" sz="1400" dirty="0">
                         <a:latin typeface="Calibri" charset="0"/>
                         <a:ea typeface="Calibri" charset="0"/>
                         <a:cs typeface="Calibri" charset="0"/>
@@ -5402,7 +5034,7 @@
                         <a:buNone/>
                       </a:pPr>
                       <a:r>
-                        <a:rPr lang="en-US" sz="1350" dirty="0">
+                        <a:rPr lang="en-US" sz="1400" dirty="0">
                           <a:solidFill>
                             <a:srgbClr val="1B2A3A"/>
                           </a:solidFill>
@@ -5410,9 +5042,9 @@
                           <a:ea typeface="Calibri" pitchFamily="34" charset="-122"/>
                           <a:cs typeface="Calibri" pitchFamily="34" charset="-120"/>
                         </a:rPr>
-                        <a:t>34.25 dB / 0.9212</a:t>
+                        <a:t>27.13 dB / 0.7845</a:t>
                       </a:r>
-                      <a:endParaRPr lang="en-US" sz="1350" dirty="0">
+                      <a:endParaRPr lang="en-US" sz="1400" dirty="0">
                         <a:latin typeface="Calibri" charset="0"/>
                         <a:ea typeface="Calibri" charset="0"/>
                         <a:cs typeface="Calibri" charset="0"/>
@@ -5474,7 +5106,7 @@
                         <a:buNone/>
                       </a:pPr>
                       <a:r>
-                        <a:rPr lang="en-US" sz="1350" dirty="0">
+                        <a:rPr lang="en-US" sz="1400" dirty="0">
                           <a:solidFill>
                             <a:srgbClr val="1B2A3A"/>
                           </a:solidFill>
@@ -5484,7 +5116,7 @@
                         </a:rPr>
                         <a:t>×4</a:t>
                       </a:r>
-                      <a:endParaRPr lang="en-US" sz="1350" dirty="0">
+                      <a:endParaRPr lang="en-US" sz="1400" dirty="0">
                         <a:latin typeface="Calibri" charset="0"/>
                         <a:ea typeface="Calibri" charset="0"/>
                         <a:cs typeface="Calibri" charset="0"/>
@@ -5539,7 +5171,7 @@
                         <a:buNone/>
                       </a:pPr>
                       <a:r>
-                        <a:rPr lang="en-US" sz="1350" dirty="0">
+                        <a:rPr lang="en-US" sz="1400" dirty="0">
                           <a:solidFill>
                             <a:srgbClr val="1B2A3A"/>
                           </a:solidFill>
@@ -5549,7 +5181,7 @@
                         </a:rPr>
                         <a:t>0.01</a:t>
                       </a:r>
-                      <a:endParaRPr lang="en-US" sz="1350" dirty="0">
+                      <a:endParaRPr lang="en-US" sz="1400" dirty="0">
                         <a:latin typeface="Calibri" charset="0"/>
                         <a:ea typeface="Calibri" charset="0"/>
                         <a:cs typeface="Calibri" charset="0"/>
@@ -5604,7 +5236,7 @@
                         <a:buNone/>
                       </a:pPr>
                       <a:r>
-                        <a:rPr lang="en-US" sz="1350" dirty="0">
+                        <a:rPr lang="en-US" sz="1400" dirty="0">
                           <a:solidFill>
                             <a:srgbClr val="1B2A3A"/>
                           </a:solidFill>
@@ -5612,9 +5244,9 @@
                           <a:ea typeface="Calibri" pitchFamily="34" charset="-122"/>
                           <a:cs typeface="Calibri" pitchFamily="34" charset="-120"/>
                         </a:rPr>
-                        <a:t>33.74 dB / 0.9139</a:t>
+                        <a:t>26.78 dB / 0.7725</a:t>
                       </a:r>
-                      <a:endParaRPr lang="en-US" sz="1350" dirty="0">
+                      <a:endParaRPr lang="en-US" sz="1400" dirty="0">
                         <a:latin typeface="Calibri" charset="0"/>
                         <a:ea typeface="Calibri" charset="0"/>
                         <a:cs typeface="Calibri" charset="0"/>
@@ -5669,7 +5301,7 @@
                         <a:buNone/>
                       </a:pPr>
                       <a:r>
-                        <a:rPr lang="en-US" sz="1350" dirty="0">
+                        <a:rPr lang="en-US" sz="1400" dirty="0">
                           <a:solidFill>
                             <a:srgbClr val="1B2A3A"/>
                           </a:solidFill>
@@ -5677,9 +5309,9 @@
                           <a:ea typeface="Calibri" pitchFamily="34" charset="-122"/>
                           <a:cs typeface="Calibri" pitchFamily="34" charset="-120"/>
                         </a:rPr>
-                        <a:t>34.00 dB / 0.9154</a:t>
+                        <a:t>27.06 dB / 0.7785</a:t>
                       </a:r>
-                      <a:endParaRPr lang="en-US" sz="1350" dirty="0">
+                      <a:endParaRPr lang="en-US" sz="1400" dirty="0">
                         <a:latin typeface="Calibri" charset="0"/>
                         <a:ea typeface="Calibri" charset="0"/>
                         <a:cs typeface="Calibri" charset="0"/>
@@ -5839,7 +5471,7 @@
               <a:buChar char="•"/>
             </a:pPr>
             <a:r>
-              <a:rPr lang="en-US" sz="1150" dirty="0">
+              <a:rPr lang="en-US" sz="1200" dirty="0">
                 <a:solidFill>
                   <a:srgbClr val="1B2A3A"/>
                 </a:solidFill>
@@ -5847,9 +5479,9 @@
                 <a:ea typeface="Calibri" pitchFamily="34" charset="-122"/>
                 <a:cs typeface="Calibri" pitchFamily="34" charset="-120"/>
               </a:rPr>
-              <a:t>U-Net clearly outperforms TpV in every configuration (up to +9–12 dB PSNR)</a:t>
-            </a:r>
-            <a:endParaRPr lang="en-US" sz="1150" dirty="0"/>
+              <a:t>λ = 9×10⁻² is the best regularization weight across every scale/noise combination tested</a:t>
+            </a:r>
+            <a:endParaRPr lang="en-US" sz="1200" dirty="0"/>
           </a:p>
           <a:p>
             <a:pPr marL="342900" indent="-342900">
@@ -5860,7 +5492,7 @@
               <a:buChar char="•"/>
             </a:pPr>
             <a:r>
-              <a:rPr lang="en-US" sz="1150" dirty="0">
+              <a:rPr lang="en-US" sz="1200" dirty="0">
                 <a:solidFill>
                   <a:srgbClr val="1B2A3A"/>
                 </a:solidFill>
@@ -5868,9 +5500,9 @@
                 <a:ea typeface="Calibri" pitchFamily="34" charset="-122"/>
                 <a:cs typeface="Calibri" pitchFamily="34" charset="-120"/>
               </a:rPr>
-              <a:t>Unlike TpV, PSNR/SSIM stay close (or improve) when moving from ×2 to ×4, showing the network compensates for the coarser degradation</a:t>
-            </a:r>
-            <a:endParaRPr lang="en-US" sz="1150" dirty="0"/>
+              <a:t>p = 0.4 consistently outperforms p = 0.1 (both PSNR and SSIM)</a:t>
+            </a:r>
+            <a:endParaRPr lang="en-US" sz="1200" dirty="0"/>
           </a:p>
           <a:p>
             <a:pPr marL="342900" indent="-342900">
@@ -5881,7 +5513,7 @@
               <a:buChar char="•"/>
             </a:pPr>
             <a:r>
-              <a:rPr lang="en-US" sz="1150" dirty="0">
+              <a:rPr lang="en-US" sz="1200" dirty="0">
                 <a:solidFill>
                   <a:srgbClr val="1B2A3A"/>
                 </a:solidFill>
@@ -5889,9 +5521,9 @@
                 <a:ea typeface="Calibri" pitchFamily="34" charset="-122"/>
                 <a:cs typeface="Calibri" pitchFamily="34" charset="-120"/>
               </a:rPr>
-              <a:t>Scale ×2, noise 0.01 is the best result overall (39.78 dB / 0.9723) — notably higher than ×2, noise 0.005</a:t>
-            </a:r>
-            <a:endParaRPr lang="en-US" sz="1150" dirty="0"/>
+              <a:t>Performance is dominated by the downscale factor: ×2 reaches ~31 dB, ×4 drops to ~27 dB</a:t>
+            </a:r>
+            <a:endParaRPr lang="en-US" sz="1200" dirty="0"/>
           </a:p>
           <a:p>
             <a:pPr marL="342900" indent="-342900">
@@ -5902,7 +5534,7 @@
               <a:buChar char="•"/>
             </a:pPr>
             <a:r>
-              <a:rPr lang="en-US" sz="1150" dirty="0">
+              <a:rPr lang="en-US" sz="1200" dirty="0">
                 <a:solidFill>
                   <a:srgbClr val="1B2A3A"/>
                 </a:solidFill>
@@ -5910,15 +5542,15 @@
                 <a:ea typeface="Calibri" pitchFamily="34" charset="-122"/>
                 <a:cs typeface="Calibri" pitchFamily="34" charset="-120"/>
               </a:rPr>
-              <a:t>Single-image (0.png) metrics are consistently with the test set batch average</a:t>
-            </a:r>
-            <a:endParaRPr lang="en-US" sz="1150" dirty="0"/>
-          </a:p>
-        </p:txBody>
-      </p:sp>
-      <p:sp>
-        <p:nvSpPr>
-          <p:cNvPr id="8" name="Text 5"/>
+              <a:t>Sensitivity to noise level (0.005 vs 0.01) is comparatively small</a:t>
+            </a:r>
+            <a:endParaRPr lang="en-US" sz="1200" dirty="0"/>
+          </a:p>
+        </p:txBody>
+      </p:sp>
+      <p:sp>
+        <p:nvSpPr>
+          <p:cNvPr id="4" name="Text 5"/>
           <p:cNvSpPr/>
           <p:nvPr/>
         </p:nvSpPr>
@@ -5949,7 +5581,7 @@
                 <a:ea typeface="Calibri" pitchFamily="34" charset="-122"/>
                 <a:cs typeface="Calibri" pitchFamily="34" charset="-120"/>
               </a:rPr>
-              <a:t>Each (scale, noise) combination corresponds to an independently trained model checkpoint (4 variants).</a:t>
+              <a:t>λ ∈ {1e-3, 8e-2, 9e-2} tested for scale ×4; λ ∈ {5e-3, 9e-2, 4e-1} for scale ×2 (test-set batch average)</a:t>
             </a:r>
             <a:endParaRPr lang="en-US" sz="1150" dirty="0"/>
           </a:p>
@@ -6027,7 +5659,7 @@
                 <a:ea typeface="Calibri" pitchFamily="34" charset="-122"/>
                 <a:cs typeface="Calibri" pitchFamily="34" charset="-120"/>
               </a:rPr>
-              <a:t>10</a:t>
+              <a:t>7</a:t>
             </a:r>
             <a:endParaRPr lang="en-US" sz="900" dirty="0"/>
           </a:p>
@@ -6038,7 +5670,7 @@
           <p:cNvPr id="12" name="object 9">
             <a:extLst>
               <a:ext uri="{FF2B5EF4-FFF2-40B4-BE49-F238E27FC236}">
-                <a16:creationId xmlns:a16="http://schemas.microsoft.com/office/drawing/2014/main" id="{C68A74D3-3372-B5B2-493B-81A32B0722FD}"/>
+                <a16:creationId xmlns:a16="http://schemas.microsoft.com/office/drawing/2014/main" id="{BA8709F8-1B28-56A8-A4C3-7C2F4067AB1A}"/>
               </a:ext>
             </a:extLst>
           </p:cNvPr>
@@ -6080,7 +5712,7 @@
 
 <file path=ppt/slides/slide12.xml><?xml version="1.0" encoding="utf-8"?>
 <p:sld xmlns:a="http://schemas.openxmlformats.org/drawingml/2006/main" xmlns:r="http://schemas.openxmlformats.org/officeDocument/2006/relationships" xmlns:p="http://schemas.openxmlformats.org/presentationml/2006/main">
-  <p:cSld name="Slide 11">
+  <p:cSld name="Slide 8">
     <p:bg>
       <p:bgPr>
         <a:solidFill>
@@ -6136,7 +5768,7 @@
                 <a:ea typeface="Cambria" pitchFamily="34" charset="-122"/>
                 <a:cs typeface="Cambria" pitchFamily="34" charset="-120"/>
               </a:rPr>
-              <a:t>U-Net — Visual Comparison (Scale ×2)</a:t>
+              <a:t>TpV — Visual Comparison (Scale ×2)</a:t>
             </a:r>
             <a:endParaRPr lang="en-US" sz="3000" dirty="0"/>
           </a:p>
@@ -6175,7 +5807,7 @@
                 <a:ea typeface="Calibri" pitchFamily="34" charset="-122"/>
                 <a:cs typeface="Calibri" pitchFamily="34" charset="-120"/>
               </a:rPr>
-              <a:t>Single test image (0.png) — Ground truth vs. U-Net reconstruction</a:t>
+              <a:t>Single test image (0.png) — Ground truth vs. corrupted observation vs. TpV reconstruction (λ = 9×10⁻²)</a:t>
             </a:r>
             <a:endParaRPr lang="en-US" sz="1250" dirty="0"/>
           </a:p>
@@ -6208,7 +5840,7 @@
             <a:r>
               <a:rPr lang="en-US" sz="1350" b="1" dirty="0">
                 <a:solidFill>
-                  <a:srgbClr val="0B2545"/>
+                  <a:srgbClr val="13678A"/>
                 </a:solidFill>
                 <a:latin typeface="Calibri" pitchFamily="34" charset="0"/>
                 <a:ea typeface="Calibri" pitchFamily="34" charset="-122"/>
@@ -6236,8 +5868,8 @@
         </p:blipFill>
         <p:spPr>
           <a:xfrm>
-            <a:off x="3396996" y="1708036"/>
-            <a:ext cx="2286000" cy="2286000"/>
+            <a:off x="1175004" y="1828800"/>
+            <a:ext cx="1508760" cy="1508760"/>
           </a:xfrm>
           <a:prstGeom prst="rect">
             <a:avLst/>
@@ -6252,8 +5884,8 @@
         </p:nvSpPr>
         <p:spPr>
           <a:xfrm>
-            <a:off x="3396996" y="1708036"/>
-            <a:ext cx="2286000" cy="2286000"/>
+            <a:off x="1175004" y="1828800"/>
+            <a:ext cx="1508760" cy="1508760"/>
           </a:xfrm>
           <a:prstGeom prst="rect">
             <a:avLst/>
@@ -6281,8 +5913,8 @@
         </p:nvSpPr>
         <p:spPr>
           <a:xfrm>
-            <a:off x="2985516" y="4030612"/>
-            <a:ext cx="3108960" cy="274320"/>
+            <a:off x="548640" y="3374136"/>
+            <a:ext cx="2761488" cy="320040"/>
           </a:xfrm>
           <a:prstGeom prst="rect">
             <a:avLst/>
@@ -6298,7 +5930,7 @@
               <a:buNone/>
             </a:pPr>
             <a:r>
-              <a:rPr lang="en-US" sz="1050" dirty="0">
+              <a:rPr lang="en-US" sz="950" dirty="0">
                 <a:solidFill>
                   <a:srgbClr val="5C7285"/>
                 </a:solidFill>
@@ -6308,13 +5940,13 @@
               </a:rPr>
               <a:t>512×512 reference</a:t>
             </a:r>
-            <a:endParaRPr lang="en-US" sz="1050" dirty="0"/>
+            <a:endParaRPr lang="en-US" sz="950" dirty="0"/>
           </a:p>
         </p:txBody>
       </p:sp>
       <p:pic>
         <p:nvPicPr>
-          <p:cNvPr id="8" name="Image 1" descr="/home/claude/work/img2/prediction_UNet_MSE_SSIM_FL_Residual_Attention_PixelShuffle_noise005_scale2.png"/>
+          <p:cNvPr id="8" name="Image 1" descr="/home/claude/work/img/Noisy_image_scale_2_noise_0_005.png"/>
           <p:cNvPicPr>
             <a:picLocks noChangeAspect="1"/>
           </p:cNvPicPr>
@@ -6328,8 +5960,8 @@
         </p:blipFill>
         <p:spPr>
           <a:xfrm>
-            <a:off x="6505956" y="1708036"/>
-            <a:ext cx="2286000" cy="2286000"/>
+            <a:off x="3936492" y="1828800"/>
+            <a:ext cx="1508760" cy="1508760"/>
           </a:xfrm>
           <a:prstGeom prst="rect">
             <a:avLst/>
@@ -6344,8 +5976,8 @@
         </p:nvSpPr>
         <p:spPr>
           <a:xfrm>
-            <a:off x="6505956" y="1708036"/>
-            <a:ext cx="2286000" cy="2286000"/>
+            <a:off x="3936492" y="1828800"/>
+            <a:ext cx="1508760" cy="1508760"/>
           </a:xfrm>
           <a:prstGeom prst="rect">
             <a:avLst/>
@@ -6373,8 +6005,8 @@
         </p:nvSpPr>
         <p:spPr>
           <a:xfrm>
-            <a:off x="6094476" y="4030612"/>
-            <a:ext cx="3108960" cy="274320"/>
+            <a:off x="3310128" y="3374136"/>
+            <a:ext cx="2761488" cy="320040"/>
           </a:xfrm>
           <a:prstGeom prst="rect">
             <a:avLst/>
@@ -6390,7 +6022,7 @@
               <a:buNone/>
             </a:pPr>
             <a:r>
-              <a:rPr lang="en-US" sz="1050" dirty="0">
+              <a:rPr lang="en-US" sz="950" dirty="0">
                 <a:solidFill>
                   <a:srgbClr val="5C7285"/>
                 </a:solidFill>
@@ -6398,15 +6030,199 @@
                 <a:ea typeface="Calibri" pitchFamily="34" charset="-122"/>
                 <a:cs typeface="Calibri" pitchFamily="34" charset="-120"/>
               </a:rPr>
-              <a:t>PSNR 33.57 dB | SSIM 0.9487</a:t>
-            </a:r>
-            <a:endParaRPr lang="en-US" sz="1050" dirty="0"/>
-          </a:p>
-        </p:txBody>
-      </p:sp>
-      <p:sp>
-        <p:nvSpPr>
-          <p:cNvPr id="11" name="Text 7"/>
+              <a:t>×2, σ=0.005</a:t>
+            </a:r>
+            <a:endParaRPr lang="en-US" sz="950" dirty="0"/>
+          </a:p>
+        </p:txBody>
+      </p:sp>
+      <p:pic>
+        <p:nvPicPr>
+          <p:cNvPr id="11" name="Image 2" descr="/home/claude/work/img/SR_image_scale_2_noise_0_005_lambda_9_000000e-02_p_0_1_PSNR_31_29_SSIM_0_8937.png"/>
+          <p:cNvPicPr>
+            <a:picLocks noChangeAspect="1"/>
+          </p:cNvPicPr>
+          <p:nvPr/>
+        </p:nvPicPr>
+        <p:blipFill>
+          <a:blip r:embed="rId5"/>
+          <a:stretch>
+            <a:fillRect/>
+          </a:stretch>
+        </p:blipFill>
+        <p:spPr>
+          <a:xfrm>
+            <a:off x="6697980" y="1828800"/>
+            <a:ext cx="1508760" cy="1508760"/>
+          </a:xfrm>
+          <a:prstGeom prst="rect">
+            <a:avLst/>
+          </a:prstGeom>
+        </p:spPr>
+      </p:pic>
+      <p:sp>
+        <p:nvSpPr>
+          <p:cNvPr id="12" name="Shape 7"/>
+          <p:cNvSpPr/>
+          <p:nvPr/>
+        </p:nvSpPr>
+        <p:spPr>
+          <a:xfrm>
+            <a:off x="6697980" y="1828800"/>
+            <a:ext cx="1508760" cy="1508760"/>
+          </a:xfrm>
+          <a:prstGeom prst="rect">
+            <a:avLst/>
+          </a:prstGeom>
+          <a:ln w="9525">
+            <a:solidFill>
+              <a:srgbClr val="D8E2E5"/>
+            </a:solidFill>
+            <a:prstDash val="solid"/>
+          </a:ln>
+        </p:spPr>
+        <p:txBody>
+          <a:bodyPr/>
+          <a:lstStyle/>
+          <a:p>
+            <a:endParaRPr lang="it-IT"/>
+          </a:p>
+        </p:txBody>
+      </p:sp>
+      <p:sp>
+        <p:nvSpPr>
+          <p:cNvPr id="13" name="Text 8"/>
+          <p:cNvSpPr/>
+          <p:nvPr/>
+        </p:nvSpPr>
+        <p:spPr>
+          <a:xfrm>
+            <a:off x="6071616" y="3374136"/>
+            <a:ext cx="2761488" cy="320040"/>
+          </a:xfrm>
+          <a:prstGeom prst="rect">
+            <a:avLst/>
+          </a:prstGeom>
+          <a:noFill/>
+          <a:ln/>
+        </p:spPr>
+        <p:txBody>
+          <a:bodyPr wrap="square" rtlCol="0" anchor="ctr"/>
+          <a:lstStyle/>
+          <a:p>
+            <a:pPr marL="0" indent="0" algn="ctr">
+              <a:buNone/>
+            </a:pPr>
+            <a:r>
+              <a:rPr lang="en-US" sz="950" dirty="0">
+                <a:solidFill>
+                  <a:srgbClr val="5C7285"/>
+                </a:solidFill>
+                <a:latin typeface="Calibri" pitchFamily="34" charset="0"/>
+                <a:ea typeface="Calibri" pitchFamily="34" charset="-122"/>
+                <a:cs typeface="Calibri" pitchFamily="34" charset="-120"/>
+              </a:rPr>
+              <a:t>PSNR 31.29 dB | SSIM 0.8937</a:t>
+            </a:r>
+            <a:endParaRPr lang="en-US" sz="950" dirty="0"/>
+          </a:p>
+        </p:txBody>
+      </p:sp>
+      <p:pic>
+        <p:nvPicPr>
+          <p:cNvPr id="14" name="Image 3" descr="/home/claude/work/img/SR_image_scale_2_noise_0_005_lambda_9_000000e-02_p_0_4_PSNR_31_53_SSIM_0_8913.png"/>
+          <p:cNvPicPr>
+            <a:picLocks noChangeAspect="1"/>
+          </p:cNvPicPr>
+          <p:nvPr/>
+        </p:nvPicPr>
+        <p:blipFill>
+          <a:blip r:embed="rId6"/>
+          <a:stretch>
+            <a:fillRect/>
+          </a:stretch>
+        </p:blipFill>
+        <p:spPr>
+          <a:xfrm>
+            <a:off x="9459468" y="1828800"/>
+            <a:ext cx="1508760" cy="1508760"/>
+          </a:xfrm>
+          <a:prstGeom prst="rect">
+            <a:avLst/>
+          </a:prstGeom>
+        </p:spPr>
+      </p:pic>
+      <p:sp>
+        <p:nvSpPr>
+          <p:cNvPr id="15" name="Shape 9"/>
+          <p:cNvSpPr/>
+          <p:nvPr/>
+        </p:nvSpPr>
+        <p:spPr>
+          <a:xfrm>
+            <a:off x="9459468" y="1828800"/>
+            <a:ext cx="1508760" cy="1508760"/>
+          </a:xfrm>
+          <a:prstGeom prst="rect">
+            <a:avLst/>
+          </a:prstGeom>
+          <a:ln w="9525">
+            <a:solidFill>
+              <a:srgbClr val="D8E2E5"/>
+            </a:solidFill>
+            <a:prstDash val="solid"/>
+          </a:ln>
+        </p:spPr>
+        <p:txBody>
+          <a:bodyPr/>
+          <a:lstStyle/>
+          <a:p>
+            <a:endParaRPr lang="it-IT"/>
+          </a:p>
+        </p:txBody>
+      </p:sp>
+      <p:sp>
+        <p:nvSpPr>
+          <p:cNvPr id="16" name="Text 10"/>
+          <p:cNvSpPr/>
+          <p:nvPr/>
+        </p:nvSpPr>
+        <p:spPr>
+          <a:xfrm>
+            <a:off x="8833104" y="3374136"/>
+            <a:ext cx="2761488" cy="320040"/>
+          </a:xfrm>
+          <a:prstGeom prst="rect">
+            <a:avLst/>
+          </a:prstGeom>
+          <a:noFill/>
+          <a:ln/>
+        </p:spPr>
+        <p:txBody>
+          <a:bodyPr wrap="square" rtlCol="0" anchor="ctr"/>
+          <a:lstStyle/>
+          <a:p>
+            <a:pPr marL="0" indent="0" algn="ctr">
+              <a:buNone/>
+            </a:pPr>
+            <a:r>
+              <a:rPr lang="en-US" sz="950" dirty="0">
+                <a:solidFill>
+                  <a:srgbClr val="5C7285"/>
+                </a:solidFill>
+                <a:latin typeface="Calibri" pitchFamily="34" charset="0"/>
+                <a:ea typeface="Calibri" pitchFamily="34" charset="-122"/>
+                <a:cs typeface="Calibri" pitchFamily="34" charset="-120"/>
+              </a:rPr>
+              <a:t>PSNR 31.53 dB | SSIM 0.8913</a:t>
+            </a:r>
+            <a:endParaRPr lang="en-US" sz="950" dirty="0"/>
+          </a:p>
+        </p:txBody>
+      </p:sp>
+      <p:sp>
+        <p:nvSpPr>
+          <p:cNvPr id="17" name="Text 11"/>
           <p:cNvSpPr/>
           <p:nvPr/>
         </p:nvSpPr>
@@ -6431,7 +6247,7 @@
             <a:r>
               <a:rPr lang="en-US" sz="1350" b="1" dirty="0">
                 <a:solidFill>
-                  <a:srgbClr val="0B2545"/>
+                  <a:srgbClr val="13678A"/>
                 </a:solidFill>
                 <a:latin typeface="Calibri" pitchFamily="34" charset="0"/>
                 <a:ea typeface="Calibri" pitchFamily="34" charset="-122"/>
@@ -6445,7 +6261,7 @@
       </p:sp>
       <p:pic>
         <p:nvPicPr>
-          <p:cNvPr id="12" name="Image 2" descr="/home/claude/work/img/0.png"/>
+          <p:cNvPr id="18" name="Image 4" descr="/home/claude/work/img/0.png"/>
           <p:cNvPicPr>
             <a:picLocks noChangeAspect="1"/>
           </p:cNvPicPr>
@@ -6459,8 +6275,8 @@
         </p:blipFill>
         <p:spPr>
           <a:xfrm>
-            <a:off x="3396996" y="4297680"/>
-            <a:ext cx="2286000" cy="2286000"/>
+            <a:off x="1175004" y="4297680"/>
+            <a:ext cx="1508760" cy="1508760"/>
           </a:xfrm>
           <a:prstGeom prst="rect">
             <a:avLst/>
@@ -6469,14 +6285,14 @@
       </p:pic>
       <p:sp>
         <p:nvSpPr>
-          <p:cNvPr id="13" name="Shape 8"/>
-          <p:cNvSpPr/>
-          <p:nvPr/>
-        </p:nvSpPr>
-        <p:spPr>
-          <a:xfrm>
-            <a:off x="3396996" y="4297680"/>
-            <a:ext cx="2286000" cy="2286000"/>
+          <p:cNvPr id="19" name="Shape 12"/>
+          <p:cNvSpPr/>
+          <p:nvPr/>
+        </p:nvSpPr>
+        <p:spPr>
+          <a:xfrm>
+            <a:off x="1175004" y="4297680"/>
+            <a:ext cx="1508760" cy="1508760"/>
           </a:xfrm>
           <a:prstGeom prst="rect">
             <a:avLst/>
@@ -6498,14 +6314,14 @@
       </p:sp>
       <p:sp>
         <p:nvSpPr>
-          <p:cNvPr id="14" name="Text 9"/>
-          <p:cNvSpPr/>
-          <p:nvPr/>
-        </p:nvSpPr>
-        <p:spPr>
-          <a:xfrm>
-            <a:off x="2985516" y="6620256"/>
-            <a:ext cx="3108960" cy="274320"/>
+          <p:cNvPr id="20" name="Text 13"/>
+          <p:cNvSpPr/>
+          <p:nvPr/>
+        </p:nvSpPr>
+        <p:spPr>
+          <a:xfrm>
+            <a:off x="548640" y="5843016"/>
+            <a:ext cx="2761488" cy="320040"/>
           </a:xfrm>
           <a:prstGeom prst="rect">
             <a:avLst/>
@@ -6521,7 +6337,7 @@
               <a:buNone/>
             </a:pPr>
             <a:r>
-              <a:rPr lang="en-US" sz="1050" dirty="0">
+              <a:rPr lang="en-US" sz="950" dirty="0">
                 <a:solidFill>
                   <a:srgbClr val="5C7285"/>
                 </a:solidFill>
@@ -6531,28 +6347,28 @@
               </a:rPr>
               <a:t>512×512 reference</a:t>
             </a:r>
-            <a:endParaRPr lang="en-US" sz="1050" dirty="0"/>
+            <a:endParaRPr lang="en-US" sz="950" dirty="0"/>
           </a:p>
         </p:txBody>
       </p:sp>
       <p:pic>
         <p:nvPicPr>
-          <p:cNvPr id="15" name="Image 3" descr="/home/claude/work/img2/prediction_UNet_MSE_SSIM_FL_Residual_Attention_PixelShuffle_noise01_scale2.png"/>
+          <p:cNvPr id="21" name="Image 5" descr="/home/claude/work/img/Noisy_image_scale_2_noise_0_01.png"/>
           <p:cNvPicPr>
             <a:picLocks noChangeAspect="1"/>
           </p:cNvPicPr>
           <p:nvPr/>
         </p:nvPicPr>
         <p:blipFill>
-          <a:blip r:embed="rId5"/>
+          <a:blip r:embed="rId7"/>
           <a:stretch>
             <a:fillRect/>
           </a:stretch>
         </p:blipFill>
         <p:spPr>
           <a:xfrm>
-            <a:off x="6505956" y="4297680"/>
-            <a:ext cx="2286000" cy="2286000"/>
+            <a:off x="3936492" y="4297680"/>
+            <a:ext cx="1508760" cy="1508760"/>
           </a:xfrm>
           <a:prstGeom prst="rect">
             <a:avLst/>
@@ -6561,14 +6377,14 @@
       </p:pic>
       <p:sp>
         <p:nvSpPr>
-          <p:cNvPr id="16" name="Shape 10"/>
-          <p:cNvSpPr/>
-          <p:nvPr/>
-        </p:nvSpPr>
-        <p:spPr>
-          <a:xfrm>
-            <a:off x="6505956" y="4297680"/>
-            <a:ext cx="2286000" cy="2286000"/>
+          <p:cNvPr id="22" name="Shape 14"/>
+          <p:cNvSpPr/>
+          <p:nvPr/>
+        </p:nvSpPr>
+        <p:spPr>
+          <a:xfrm>
+            <a:off x="3936492" y="4297680"/>
+            <a:ext cx="1508760" cy="1508760"/>
           </a:xfrm>
           <a:prstGeom prst="rect">
             <a:avLst/>
@@ -6590,14 +6406,14 @@
       </p:sp>
       <p:sp>
         <p:nvSpPr>
-          <p:cNvPr id="17" name="Text 11"/>
-          <p:cNvSpPr/>
-          <p:nvPr/>
-        </p:nvSpPr>
-        <p:spPr>
-          <a:xfrm>
-            <a:off x="6094476" y="6620256"/>
-            <a:ext cx="3108960" cy="274320"/>
+          <p:cNvPr id="23" name="Text 15"/>
+          <p:cNvSpPr/>
+          <p:nvPr/>
+        </p:nvSpPr>
+        <p:spPr>
+          <a:xfrm>
+            <a:off x="3310128" y="5843016"/>
+            <a:ext cx="2761488" cy="320040"/>
           </a:xfrm>
           <a:prstGeom prst="rect">
             <a:avLst/>
@@ -6613,7 +6429,7 @@
               <a:buNone/>
             </a:pPr>
             <a:r>
-              <a:rPr lang="en-US" sz="1050" dirty="0">
+              <a:rPr lang="en-US" sz="950" dirty="0">
                 <a:solidFill>
                   <a:srgbClr val="5C7285"/>
                 </a:solidFill>
@@ -6621,15 +6437,199 @@
                 <a:ea typeface="Calibri" pitchFamily="34" charset="-122"/>
                 <a:cs typeface="Calibri" pitchFamily="34" charset="-120"/>
               </a:rPr>
-              <a:t>PSNR 39.90 dB | SSIM 0.9734</a:t>
-            </a:r>
-            <a:endParaRPr lang="en-US" sz="1050" dirty="0"/>
-          </a:p>
-        </p:txBody>
-      </p:sp>
-      <p:sp>
-        <p:nvSpPr>
-          <p:cNvPr id="18" name="Text 12"/>
+              <a:t>×2, σ=0.01</a:t>
+            </a:r>
+            <a:endParaRPr lang="en-US" sz="950" dirty="0"/>
+          </a:p>
+        </p:txBody>
+      </p:sp>
+      <p:pic>
+        <p:nvPicPr>
+          <p:cNvPr id="24" name="Image 6" descr="/home/claude/work/img/SR_image_scale_2_noise_0_01_lambda_9_000000e-02_p_0_1_PSNR_31_08_SSIM_0_8842.png"/>
+          <p:cNvPicPr>
+            <a:picLocks noChangeAspect="1"/>
+          </p:cNvPicPr>
+          <p:nvPr/>
+        </p:nvPicPr>
+        <p:blipFill>
+          <a:blip r:embed="rId8"/>
+          <a:stretch>
+            <a:fillRect/>
+          </a:stretch>
+        </p:blipFill>
+        <p:spPr>
+          <a:xfrm>
+            <a:off x="6697980" y="4297680"/>
+            <a:ext cx="1508760" cy="1508760"/>
+          </a:xfrm>
+          <a:prstGeom prst="rect">
+            <a:avLst/>
+          </a:prstGeom>
+        </p:spPr>
+      </p:pic>
+      <p:sp>
+        <p:nvSpPr>
+          <p:cNvPr id="25" name="Shape 16"/>
+          <p:cNvSpPr/>
+          <p:nvPr/>
+        </p:nvSpPr>
+        <p:spPr>
+          <a:xfrm>
+            <a:off x="6697980" y="4297680"/>
+            <a:ext cx="1508760" cy="1508760"/>
+          </a:xfrm>
+          <a:prstGeom prst="rect">
+            <a:avLst/>
+          </a:prstGeom>
+          <a:ln w="9525">
+            <a:solidFill>
+              <a:srgbClr val="D8E2E5"/>
+            </a:solidFill>
+            <a:prstDash val="solid"/>
+          </a:ln>
+        </p:spPr>
+        <p:txBody>
+          <a:bodyPr/>
+          <a:lstStyle/>
+          <a:p>
+            <a:endParaRPr lang="it-IT"/>
+          </a:p>
+        </p:txBody>
+      </p:sp>
+      <p:sp>
+        <p:nvSpPr>
+          <p:cNvPr id="26" name="Text 17"/>
+          <p:cNvSpPr/>
+          <p:nvPr/>
+        </p:nvSpPr>
+        <p:spPr>
+          <a:xfrm>
+            <a:off x="6071616" y="5843016"/>
+            <a:ext cx="2761488" cy="320040"/>
+          </a:xfrm>
+          <a:prstGeom prst="rect">
+            <a:avLst/>
+          </a:prstGeom>
+          <a:noFill/>
+          <a:ln/>
+        </p:spPr>
+        <p:txBody>
+          <a:bodyPr wrap="square" rtlCol="0" anchor="ctr"/>
+          <a:lstStyle/>
+          <a:p>
+            <a:pPr marL="0" indent="0" algn="ctr">
+              <a:buNone/>
+            </a:pPr>
+            <a:r>
+              <a:rPr lang="en-US" sz="950" dirty="0">
+                <a:solidFill>
+                  <a:srgbClr val="5C7285"/>
+                </a:solidFill>
+                <a:latin typeface="Calibri" pitchFamily="34" charset="0"/>
+                <a:ea typeface="Calibri" pitchFamily="34" charset="-122"/>
+                <a:cs typeface="Calibri" pitchFamily="34" charset="-120"/>
+              </a:rPr>
+              <a:t>PSNR 31.08 dB | SSIM 0.8842</a:t>
+            </a:r>
+            <a:endParaRPr lang="en-US" sz="950" dirty="0"/>
+          </a:p>
+        </p:txBody>
+      </p:sp>
+      <p:pic>
+        <p:nvPicPr>
+          <p:cNvPr id="27" name="Image 7" descr="/home/claude/work/img/SR_image_scale_2_noise_0_01_lambda_9_000000e-02_p_0_4_PSNR_31_47_SSIM_0_8874.png"/>
+          <p:cNvPicPr>
+            <a:picLocks noChangeAspect="1"/>
+          </p:cNvPicPr>
+          <p:nvPr/>
+        </p:nvPicPr>
+        <p:blipFill>
+          <a:blip r:embed="rId9"/>
+          <a:stretch>
+            <a:fillRect/>
+          </a:stretch>
+        </p:blipFill>
+        <p:spPr>
+          <a:xfrm>
+            <a:off x="9459468" y="4297680"/>
+            <a:ext cx="1508760" cy="1508760"/>
+          </a:xfrm>
+          <a:prstGeom prst="rect">
+            <a:avLst/>
+          </a:prstGeom>
+        </p:spPr>
+      </p:pic>
+      <p:sp>
+        <p:nvSpPr>
+          <p:cNvPr id="28" name="Shape 18"/>
+          <p:cNvSpPr/>
+          <p:nvPr/>
+        </p:nvSpPr>
+        <p:spPr>
+          <a:xfrm>
+            <a:off x="9459468" y="4297680"/>
+            <a:ext cx="1508760" cy="1508760"/>
+          </a:xfrm>
+          <a:prstGeom prst="rect">
+            <a:avLst/>
+          </a:prstGeom>
+          <a:ln w="9525">
+            <a:solidFill>
+              <a:srgbClr val="D8E2E5"/>
+            </a:solidFill>
+            <a:prstDash val="solid"/>
+          </a:ln>
+        </p:spPr>
+        <p:txBody>
+          <a:bodyPr/>
+          <a:lstStyle/>
+          <a:p>
+            <a:endParaRPr lang="it-IT"/>
+          </a:p>
+        </p:txBody>
+      </p:sp>
+      <p:sp>
+        <p:nvSpPr>
+          <p:cNvPr id="29" name="Text 19"/>
+          <p:cNvSpPr/>
+          <p:nvPr/>
+        </p:nvSpPr>
+        <p:spPr>
+          <a:xfrm>
+            <a:off x="8833104" y="5843016"/>
+            <a:ext cx="2761488" cy="320040"/>
+          </a:xfrm>
+          <a:prstGeom prst="rect">
+            <a:avLst/>
+          </a:prstGeom>
+          <a:noFill/>
+          <a:ln/>
+        </p:spPr>
+        <p:txBody>
+          <a:bodyPr wrap="square" rtlCol="0" anchor="ctr"/>
+          <a:lstStyle/>
+          <a:p>
+            <a:pPr marL="0" indent="0" algn="ctr">
+              <a:buNone/>
+            </a:pPr>
+            <a:r>
+              <a:rPr lang="en-US" sz="950" dirty="0">
+                <a:solidFill>
+                  <a:srgbClr val="5C7285"/>
+                </a:solidFill>
+                <a:latin typeface="Calibri" pitchFamily="34" charset="0"/>
+                <a:ea typeface="Calibri" pitchFamily="34" charset="-122"/>
+                <a:cs typeface="Calibri" pitchFamily="34" charset="-120"/>
+              </a:rPr>
+              <a:t>PSNR 31.47 dB | SSIM 0.8874</a:t>
+            </a:r>
+            <a:endParaRPr lang="en-US" sz="950" dirty="0"/>
+          </a:p>
+        </p:txBody>
+      </p:sp>
+      <p:sp>
+        <p:nvSpPr>
+          <p:cNvPr id="30" name="Text 20"/>
           <p:cNvSpPr/>
           <p:nvPr/>
         </p:nvSpPr>
@@ -6668,7 +6668,7 @@
       </p:sp>
       <p:sp>
         <p:nvSpPr>
-          <p:cNvPr id="19" name="Text 13"/>
+          <p:cNvPr id="31" name="Text 21"/>
           <p:cNvSpPr/>
           <p:nvPr/>
         </p:nvSpPr>
@@ -6699,7 +6699,7 @@
                 <a:ea typeface="Calibri" pitchFamily="34" charset="-122"/>
                 <a:cs typeface="Calibri" pitchFamily="34" charset="-120"/>
               </a:rPr>
-              <a:t>11</a:t>
+              <a:t>8</a:t>
             </a:r>
             <a:endParaRPr lang="en-US" sz="900" dirty="0"/>
           </a:p>
@@ -6707,10 +6707,10 @@
       </p:sp>
       <p:sp>
         <p:nvSpPr>
-          <p:cNvPr id="21" name="object 9">
+          <p:cNvPr id="33" name="object 9">
             <a:extLst>
               <a:ext uri="{FF2B5EF4-FFF2-40B4-BE49-F238E27FC236}">
-                <a16:creationId xmlns:a16="http://schemas.microsoft.com/office/drawing/2014/main" id="{52A16BE9-BBD3-25B1-8184-691542417FDE}"/>
+                <a16:creationId xmlns:a16="http://schemas.microsoft.com/office/drawing/2014/main" id="{E822C587-739B-DE24-A1B0-DC02C39F5DDD}"/>
               </a:ext>
             </a:extLst>
           </p:cNvPr>
@@ -6726,7 +6726,7 @@
             <a:avLst/>
           </a:prstGeom>
           <a:blipFill>
-            <a:blip r:embed="rId6" cstate="print"/>
+            <a:blip r:embed="rId10" cstate="print"/>
             <a:stretch>
               <a:fillRect/>
             </a:stretch>
@@ -6752,7 +6752,7 @@
 
 <file path=ppt/slides/slide13.xml><?xml version="1.0" encoding="utf-8"?>
 <p:sld xmlns:a="http://schemas.openxmlformats.org/drawingml/2006/main" xmlns:r="http://schemas.openxmlformats.org/officeDocument/2006/relationships" xmlns:p="http://schemas.openxmlformats.org/presentationml/2006/main">
-  <p:cSld name="Slide 12">
+  <p:cSld name="Slide 9">
     <p:bg>
       <p:bgPr>
         <a:solidFill>
@@ -6808,7 +6808,7 @@
                 <a:ea typeface="Cambria" pitchFamily="34" charset="-122"/>
                 <a:cs typeface="Cambria" pitchFamily="34" charset="-120"/>
               </a:rPr>
-              <a:t>U-Net — Visual Comparison (Scale ×4)</a:t>
+              <a:t>TpV — Visual Comparison (Scale ×4)</a:t>
             </a:r>
             <a:endParaRPr lang="en-US" sz="3000" dirty="0"/>
           </a:p>
@@ -6847,7 +6847,7 @@
                 <a:ea typeface="Calibri" pitchFamily="34" charset="-122"/>
                 <a:cs typeface="Calibri" pitchFamily="34" charset="-120"/>
               </a:rPr>
-              <a:t>Single test image (0.png) — Ground truth vs. U-Net reconstruction</a:t>
+              <a:t>Single test image (0.png) — Ground truth vs. corrupted observation vs. TpV reconstruction (λ = 9×10⁻²)</a:t>
             </a:r>
             <a:endParaRPr lang="en-US" sz="1250" dirty="0"/>
           </a:p>
@@ -6880,7 +6880,7 @@
             <a:r>
               <a:rPr lang="en-US" sz="1350" b="1" dirty="0">
                 <a:solidFill>
-                  <a:srgbClr val="0B2545"/>
+                  <a:srgbClr val="13678A"/>
                 </a:solidFill>
                 <a:latin typeface="Calibri" pitchFamily="34" charset="0"/>
                 <a:ea typeface="Calibri" pitchFamily="34" charset="-122"/>
@@ -6908,8 +6908,8 @@
         </p:blipFill>
         <p:spPr>
           <a:xfrm>
-            <a:off x="3396996" y="1708034"/>
-            <a:ext cx="2286000" cy="2286000"/>
+            <a:off x="1175004" y="1828800"/>
+            <a:ext cx="1508760" cy="1508760"/>
           </a:xfrm>
           <a:prstGeom prst="rect">
             <a:avLst/>
@@ -6924,8 +6924,8 @@
         </p:nvSpPr>
         <p:spPr>
           <a:xfrm>
-            <a:off x="3396996" y="1708034"/>
-            <a:ext cx="2286000" cy="2286000"/>
+            <a:off x="1175004" y="1828800"/>
+            <a:ext cx="1508760" cy="1508760"/>
           </a:xfrm>
           <a:prstGeom prst="rect">
             <a:avLst/>
@@ -6953,8 +6953,8 @@
         </p:nvSpPr>
         <p:spPr>
           <a:xfrm>
-            <a:off x="2985516" y="4030610"/>
-            <a:ext cx="3108960" cy="274320"/>
+            <a:off x="548640" y="3374136"/>
+            <a:ext cx="2761488" cy="320040"/>
           </a:xfrm>
           <a:prstGeom prst="rect">
             <a:avLst/>
@@ -6970,7 +6970,7 @@
               <a:buNone/>
             </a:pPr>
             <a:r>
-              <a:rPr lang="en-US" sz="1050" dirty="0">
+              <a:rPr lang="en-US" sz="950" dirty="0">
                 <a:solidFill>
                   <a:srgbClr val="5C7285"/>
                 </a:solidFill>
@@ -6980,13 +6980,13 @@
               </a:rPr>
               <a:t>512×512 reference</a:t>
             </a:r>
-            <a:endParaRPr lang="en-US" sz="1050" dirty="0"/>
+            <a:endParaRPr lang="en-US" sz="950" dirty="0"/>
           </a:p>
         </p:txBody>
       </p:sp>
       <p:pic>
         <p:nvPicPr>
-          <p:cNvPr id="8" name="Image 1" descr="/home/claude/work/img2/prediction_UNet_MSE_SSIM_FL_Residual_Attention_PixelShuffle_noise005_scale4.png"/>
+          <p:cNvPr id="8" name="Image 1" descr="/home/claude/work/img/Noisy_image_scale_4_noise_0_005.png"/>
           <p:cNvPicPr>
             <a:picLocks noChangeAspect="1"/>
           </p:cNvPicPr>
@@ -7000,8 +7000,8 @@
         </p:blipFill>
         <p:spPr>
           <a:xfrm>
-            <a:off x="6505956" y="1708034"/>
-            <a:ext cx="2286000" cy="2286000"/>
+            <a:off x="3936492" y="1828800"/>
+            <a:ext cx="1508760" cy="1508760"/>
           </a:xfrm>
           <a:prstGeom prst="rect">
             <a:avLst/>
@@ -7016,8 +7016,8 @@
         </p:nvSpPr>
         <p:spPr>
           <a:xfrm>
-            <a:off x="6505956" y="1708034"/>
-            <a:ext cx="2286000" cy="2286000"/>
+            <a:off x="3936492" y="1828800"/>
+            <a:ext cx="1508760" cy="1508760"/>
           </a:xfrm>
           <a:prstGeom prst="rect">
             <a:avLst/>
@@ -7045,8 +7045,8 @@
         </p:nvSpPr>
         <p:spPr>
           <a:xfrm>
-            <a:off x="6094476" y="4030610"/>
-            <a:ext cx="3108960" cy="274320"/>
+            <a:off x="3310128" y="3374136"/>
+            <a:ext cx="2761488" cy="320040"/>
           </a:xfrm>
           <a:prstGeom prst="rect">
             <a:avLst/>
@@ -7062,7 +7062,7 @@
               <a:buNone/>
             </a:pPr>
             <a:r>
-              <a:rPr lang="en-US" sz="1050" dirty="0">
+              <a:rPr lang="en-US" sz="950" dirty="0">
                 <a:solidFill>
                   <a:srgbClr val="5C7285"/>
                 </a:solidFill>
@@ -7070,15 +7070,199 @@
                 <a:ea typeface="Calibri" pitchFamily="34" charset="-122"/>
                 <a:cs typeface="Calibri" pitchFamily="34" charset="-120"/>
               </a:rPr>
-              <a:t>PSNR 34.25 dB | SSIM 0.9212</a:t>
-            </a:r>
-            <a:endParaRPr lang="en-US" sz="1050" dirty="0"/>
-          </a:p>
-        </p:txBody>
-      </p:sp>
-      <p:sp>
-        <p:nvSpPr>
-          <p:cNvPr id="11" name="Text 7"/>
+              <a:t>×4, σ=0.005</a:t>
+            </a:r>
+            <a:endParaRPr lang="en-US" sz="950" dirty="0"/>
+          </a:p>
+        </p:txBody>
+      </p:sp>
+      <p:pic>
+        <p:nvPicPr>
+          <p:cNvPr id="11" name="Image 2" descr="/home/claude/work/img/SR_image_scale_4_noise_0_005_lambda_9_000000e-02_p_0_1_PSNR_27_03_SSIM_0_7737.png"/>
+          <p:cNvPicPr>
+            <a:picLocks noChangeAspect="1"/>
+          </p:cNvPicPr>
+          <p:nvPr/>
+        </p:nvPicPr>
+        <p:blipFill>
+          <a:blip r:embed="rId5"/>
+          <a:stretch>
+            <a:fillRect/>
+          </a:stretch>
+        </p:blipFill>
+        <p:spPr>
+          <a:xfrm>
+            <a:off x="6697980" y="1828800"/>
+            <a:ext cx="1508760" cy="1508760"/>
+          </a:xfrm>
+          <a:prstGeom prst="rect">
+            <a:avLst/>
+          </a:prstGeom>
+        </p:spPr>
+      </p:pic>
+      <p:sp>
+        <p:nvSpPr>
+          <p:cNvPr id="12" name="Shape 7"/>
+          <p:cNvSpPr/>
+          <p:nvPr/>
+        </p:nvSpPr>
+        <p:spPr>
+          <a:xfrm>
+            <a:off x="6697980" y="1828800"/>
+            <a:ext cx="1508760" cy="1508760"/>
+          </a:xfrm>
+          <a:prstGeom prst="rect">
+            <a:avLst/>
+          </a:prstGeom>
+          <a:ln w="9525">
+            <a:solidFill>
+              <a:srgbClr val="D8E2E5"/>
+            </a:solidFill>
+            <a:prstDash val="solid"/>
+          </a:ln>
+        </p:spPr>
+        <p:txBody>
+          <a:bodyPr/>
+          <a:lstStyle/>
+          <a:p>
+            <a:endParaRPr lang="it-IT"/>
+          </a:p>
+        </p:txBody>
+      </p:sp>
+      <p:sp>
+        <p:nvSpPr>
+          <p:cNvPr id="13" name="Text 8"/>
+          <p:cNvSpPr/>
+          <p:nvPr/>
+        </p:nvSpPr>
+        <p:spPr>
+          <a:xfrm>
+            <a:off x="6071616" y="3374136"/>
+            <a:ext cx="2761488" cy="320040"/>
+          </a:xfrm>
+          <a:prstGeom prst="rect">
+            <a:avLst/>
+          </a:prstGeom>
+          <a:noFill/>
+          <a:ln/>
+        </p:spPr>
+        <p:txBody>
+          <a:bodyPr wrap="square" rtlCol="0" anchor="ctr"/>
+          <a:lstStyle/>
+          <a:p>
+            <a:pPr marL="0" indent="0" algn="ctr">
+              <a:buNone/>
+            </a:pPr>
+            <a:r>
+              <a:rPr lang="en-US" sz="950" dirty="0">
+                <a:solidFill>
+                  <a:srgbClr val="5C7285"/>
+                </a:solidFill>
+                <a:latin typeface="Calibri" pitchFamily="34" charset="0"/>
+                <a:ea typeface="Calibri" pitchFamily="34" charset="-122"/>
+                <a:cs typeface="Calibri" pitchFamily="34" charset="-120"/>
+              </a:rPr>
+              <a:t>PSNR 27.03 dB | SSIM 0.7737</a:t>
+            </a:r>
+            <a:endParaRPr lang="en-US" sz="950" dirty="0"/>
+          </a:p>
+        </p:txBody>
+      </p:sp>
+      <p:pic>
+        <p:nvPicPr>
+          <p:cNvPr id="14" name="Image 3" descr="/home/claude/work/img/SR_image_scale_4_noise_0_005_lambda_9_000000e-02_p_0_4_PSNR_27_28_SSIM_0_7780.png"/>
+          <p:cNvPicPr>
+            <a:picLocks noChangeAspect="1"/>
+          </p:cNvPicPr>
+          <p:nvPr/>
+        </p:nvPicPr>
+        <p:blipFill>
+          <a:blip r:embed="rId6"/>
+          <a:stretch>
+            <a:fillRect/>
+          </a:stretch>
+        </p:blipFill>
+        <p:spPr>
+          <a:xfrm>
+            <a:off x="9459468" y="1828800"/>
+            <a:ext cx="1508760" cy="1508760"/>
+          </a:xfrm>
+          <a:prstGeom prst="rect">
+            <a:avLst/>
+          </a:prstGeom>
+        </p:spPr>
+      </p:pic>
+      <p:sp>
+        <p:nvSpPr>
+          <p:cNvPr id="15" name="Shape 9"/>
+          <p:cNvSpPr/>
+          <p:nvPr/>
+        </p:nvSpPr>
+        <p:spPr>
+          <a:xfrm>
+            <a:off x="9459468" y="1828800"/>
+            <a:ext cx="1508760" cy="1508760"/>
+          </a:xfrm>
+          <a:prstGeom prst="rect">
+            <a:avLst/>
+          </a:prstGeom>
+          <a:ln w="9525">
+            <a:solidFill>
+              <a:srgbClr val="D8E2E5"/>
+            </a:solidFill>
+            <a:prstDash val="solid"/>
+          </a:ln>
+        </p:spPr>
+        <p:txBody>
+          <a:bodyPr/>
+          <a:lstStyle/>
+          <a:p>
+            <a:endParaRPr lang="it-IT"/>
+          </a:p>
+        </p:txBody>
+      </p:sp>
+      <p:sp>
+        <p:nvSpPr>
+          <p:cNvPr id="16" name="Text 10"/>
+          <p:cNvSpPr/>
+          <p:nvPr/>
+        </p:nvSpPr>
+        <p:spPr>
+          <a:xfrm>
+            <a:off x="8833104" y="3374136"/>
+            <a:ext cx="2761488" cy="320040"/>
+          </a:xfrm>
+          <a:prstGeom prst="rect">
+            <a:avLst/>
+          </a:prstGeom>
+          <a:noFill/>
+          <a:ln/>
+        </p:spPr>
+        <p:txBody>
+          <a:bodyPr wrap="square" rtlCol="0" anchor="ctr"/>
+          <a:lstStyle/>
+          <a:p>
+            <a:pPr marL="0" indent="0" algn="ctr">
+              <a:buNone/>
+            </a:pPr>
+            <a:r>
+              <a:rPr lang="en-US" sz="950" dirty="0">
+                <a:solidFill>
+                  <a:srgbClr val="5C7285"/>
+                </a:solidFill>
+                <a:latin typeface="Calibri" pitchFamily="34" charset="0"/>
+                <a:ea typeface="Calibri" pitchFamily="34" charset="-122"/>
+                <a:cs typeface="Calibri" pitchFamily="34" charset="-120"/>
+              </a:rPr>
+              <a:t>PSNR 27.28 dB | SSIM 0.7780</a:t>
+            </a:r>
+            <a:endParaRPr lang="en-US" sz="950" dirty="0"/>
+          </a:p>
+        </p:txBody>
+      </p:sp>
+      <p:sp>
+        <p:nvSpPr>
+          <p:cNvPr id="17" name="Text 11"/>
           <p:cNvSpPr/>
           <p:nvPr/>
         </p:nvSpPr>
@@ -7103,7 +7287,7 @@
             <a:r>
               <a:rPr lang="en-US" sz="1350" b="1" dirty="0">
                 <a:solidFill>
-                  <a:srgbClr val="0B2545"/>
+                  <a:srgbClr val="13678A"/>
                 </a:solidFill>
                 <a:latin typeface="Calibri" pitchFamily="34" charset="0"/>
                 <a:ea typeface="Calibri" pitchFamily="34" charset="-122"/>
@@ -7117,7 +7301,7 @@
       </p:sp>
       <p:pic>
         <p:nvPicPr>
-          <p:cNvPr id="12" name="Image 2" descr="/home/claude/work/img/0.png"/>
+          <p:cNvPr id="18" name="Image 4" descr="/home/claude/work/img/0.png"/>
           <p:cNvPicPr>
             <a:picLocks noChangeAspect="1"/>
           </p:cNvPicPr>
@@ -7131,8 +7315,8 @@
         </p:blipFill>
         <p:spPr>
           <a:xfrm>
-            <a:off x="3396996" y="4297680"/>
-            <a:ext cx="2286000" cy="2286000"/>
+            <a:off x="1175004" y="4297680"/>
+            <a:ext cx="1508760" cy="1508760"/>
           </a:xfrm>
           <a:prstGeom prst="rect">
             <a:avLst/>
@@ -7141,14 +7325,14 @@
       </p:pic>
       <p:sp>
         <p:nvSpPr>
-          <p:cNvPr id="13" name="Shape 8"/>
-          <p:cNvSpPr/>
-          <p:nvPr/>
-        </p:nvSpPr>
-        <p:spPr>
-          <a:xfrm>
-            <a:off x="3396996" y="4297680"/>
-            <a:ext cx="2286000" cy="2286000"/>
+          <p:cNvPr id="19" name="Shape 12"/>
+          <p:cNvSpPr/>
+          <p:nvPr/>
+        </p:nvSpPr>
+        <p:spPr>
+          <a:xfrm>
+            <a:off x="1175004" y="4297680"/>
+            <a:ext cx="1508760" cy="1508760"/>
           </a:xfrm>
           <a:prstGeom prst="rect">
             <a:avLst/>
@@ -7170,14 +7354,14 @@
       </p:sp>
       <p:sp>
         <p:nvSpPr>
-          <p:cNvPr id="14" name="Text 9"/>
-          <p:cNvSpPr/>
-          <p:nvPr/>
-        </p:nvSpPr>
-        <p:spPr>
-          <a:xfrm>
-            <a:off x="2985516" y="6620256"/>
-            <a:ext cx="3108960" cy="274320"/>
+          <p:cNvPr id="20" name="Text 13"/>
+          <p:cNvSpPr/>
+          <p:nvPr/>
+        </p:nvSpPr>
+        <p:spPr>
+          <a:xfrm>
+            <a:off x="548640" y="5843016"/>
+            <a:ext cx="2761488" cy="320040"/>
           </a:xfrm>
           <a:prstGeom prst="rect">
             <a:avLst/>
@@ -7193,7 +7377,7 @@
               <a:buNone/>
             </a:pPr>
             <a:r>
-              <a:rPr lang="en-US" sz="1050" dirty="0">
+              <a:rPr lang="en-US" sz="950" dirty="0">
                 <a:solidFill>
                   <a:srgbClr val="5C7285"/>
                 </a:solidFill>
@@ -7203,28 +7387,28 @@
               </a:rPr>
               <a:t>512×512 reference</a:t>
             </a:r>
-            <a:endParaRPr lang="en-US" sz="1050" dirty="0"/>
+            <a:endParaRPr lang="en-US" sz="950" dirty="0"/>
           </a:p>
         </p:txBody>
       </p:sp>
       <p:pic>
         <p:nvPicPr>
-          <p:cNvPr id="15" name="Image 3" descr="/home/claude/work/img2/prediction_UNet_MSE_SSIM_FL_Residual_Attention_PixelShuffle_noise01_scale4.png"/>
+          <p:cNvPr id="21" name="Image 5" descr="/home/claude/work/img/Noisy_image_scale_4_noise_0_01.png"/>
           <p:cNvPicPr>
             <a:picLocks noChangeAspect="1"/>
           </p:cNvPicPr>
           <p:nvPr/>
         </p:nvPicPr>
         <p:blipFill>
-          <a:blip r:embed="rId5"/>
+          <a:blip r:embed="rId7"/>
           <a:stretch>
             <a:fillRect/>
           </a:stretch>
         </p:blipFill>
         <p:spPr>
           <a:xfrm>
-            <a:off x="6505956" y="4297680"/>
-            <a:ext cx="2286000" cy="2286000"/>
+            <a:off x="3936492" y="4297680"/>
+            <a:ext cx="1508760" cy="1508760"/>
           </a:xfrm>
           <a:prstGeom prst="rect">
             <a:avLst/>
@@ -7233,14 +7417,14 @@
       </p:pic>
       <p:sp>
         <p:nvSpPr>
-          <p:cNvPr id="16" name="Shape 10"/>
-          <p:cNvSpPr/>
-          <p:nvPr/>
-        </p:nvSpPr>
-        <p:spPr>
-          <a:xfrm>
-            <a:off x="6505956" y="4297680"/>
-            <a:ext cx="2286000" cy="2286000"/>
+          <p:cNvPr id="22" name="Shape 14"/>
+          <p:cNvSpPr/>
+          <p:nvPr/>
+        </p:nvSpPr>
+        <p:spPr>
+          <a:xfrm>
+            <a:off x="3936492" y="4297680"/>
+            <a:ext cx="1508760" cy="1508760"/>
           </a:xfrm>
           <a:prstGeom prst="rect">
             <a:avLst/>
@@ -7262,14 +7446,14 @@
       </p:sp>
       <p:sp>
         <p:nvSpPr>
-          <p:cNvPr id="17" name="Text 11"/>
-          <p:cNvSpPr/>
-          <p:nvPr/>
-        </p:nvSpPr>
-        <p:spPr>
-          <a:xfrm>
-            <a:off x="6094476" y="6620256"/>
-            <a:ext cx="3108960" cy="274320"/>
+          <p:cNvPr id="23" name="Text 15"/>
+          <p:cNvSpPr/>
+          <p:nvPr/>
+        </p:nvSpPr>
+        <p:spPr>
+          <a:xfrm>
+            <a:off x="3310128" y="5843016"/>
+            <a:ext cx="2761488" cy="320040"/>
           </a:xfrm>
           <a:prstGeom prst="rect">
             <a:avLst/>
@@ -7285,7 +7469,7 @@
               <a:buNone/>
             </a:pPr>
             <a:r>
-              <a:rPr lang="en-US" sz="1050" dirty="0">
+              <a:rPr lang="en-US" sz="950" dirty="0">
                 <a:solidFill>
                   <a:srgbClr val="5C7285"/>
                 </a:solidFill>
@@ -7293,15 +7477,199 @@
                 <a:ea typeface="Calibri" pitchFamily="34" charset="-122"/>
                 <a:cs typeface="Calibri" pitchFamily="34" charset="-120"/>
               </a:rPr>
-              <a:t>PSNR 34.00 dB | SSIM 0.9154</a:t>
-            </a:r>
-            <a:endParaRPr lang="en-US" sz="1050" dirty="0"/>
-          </a:p>
-        </p:txBody>
-      </p:sp>
-      <p:sp>
-        <p:nvSpPr>
-          <p:cNvPr id="18" name="Text 12"/>
+              <a:t>×4, σ=0.01</a:t>
+            </a:r>
+            <a:endParaRPr lang="en-US" sz="950" dirty="0"/>
+          </a:p>
+        </p:txBody>
+      </p:sp>
+      <p:pic>
+        <p:nvPicPr>
+          <p:cNvPr id="24" name="Image 6" descr="/home/claude/work/img/SR_image_scale_4_noise_0_01_lambda_9_000000e-02_p_0_1_PSNR_27_06_SSIM_0_7709.png"/>
+          <p:cNvPicPr>
+            <a:picLocks noChangeAspect="1"/>
+          </p:cNvPicPr>
+          <p:nvPr/>
+        </p:nvPicPr>
+        <p:blipFill>
+          <a:blip r:embed="rId8"/>
+          <a:stretch>
+            <a:fillRect/>
+          </a:stretch>
+        </p:blipFill>
+        <p:spPr>
+          <a:xfrm>
+            <a:off x="6697980" y="4297680"/>
+            <a:ext cx="1508760" cy="1508760"/>
+          </a:xfrm>
+          <a:prstGeom prst="rect">
+            <a:avLst/>
+          </a:prstGeom>
+        </p:spPr>
+      </p:pic>
+      <p:sp>
+        <p:nvSpPr>
+          <p:cNvPr id="25" name="Shape 16"/>
+          <p:cNvSpPr/>
+          <p:nvPr/>
+        </p:nvSpPr>
+        <p:spPr>
+          <a:xfrm>
+            <a:off x="6697980" y="4297680"/>
+            <a:ext cx="1508760" cy="1508760"/>
+          </a:xfrm>
+          <a:prstGeom prst="rect">
+            <a:avLst/>
+          </a:prstGeom>
+          <a:ln w="9525">
+            <a:solidFill>
+              <a:srgbClr val="D8E2E5"/>
+            </a:solidFill>
+            <a:prstDash val="solid"/>
+          </a:ln>
+        </p:spPr>
+        <p:txBody>
+          <a:bodyPr/>
+          <a:lstStyle/>
+          <a:p>
+            <a:endParaRPr lang="it-IT"/>
+          </a:p>
+        </p:txBody>
+      </p:sp>
+      <p:sp>
+        <p:nvSpPr>
+          <p:cNvPr id="26" name="Text 17"/>
+          <p:cNvSpPr/>
+          <p:nvPr/>
+        </p:nvSpPr>
+        <p:spPr>
+          <a:xfrm>
+            <a:off x="6071616" y="5843016"/>
+            <a:ext cx="2761488" cy="320040"/>
+          </a:xfrm>
+          <a:prstGeom prst="rect">
+            <a:avLst/>
+          </a:prstGeom>
+          <a:noFill/>
+          <a:ln/>
+        </p:spPr>
+        <p:txBody>
+          <a:bodyPr wrap="square" rtlCol="0" anchor="ctr"/>
+          <a:lstStyle/>
+          <a:p>
+            <a:pPr marL="0" indent="0" algn="ctr">
+              <a:buNone/>
+            </a:pPr>
+            <a:r>
+              <a:rPr lang="en-US" sz="950" dirty="0">
+                <a:solidFill>
+                  <a:srgbClr val="5C7285"/>
+                </a:solidFill>
+                <a:latin typeface="Calibri" pitchFamily="34" charset="0"/>
+                <a:ea typeface="Calibri" pitchFamily="34" charset="-122"/>
+                <a:cs typeface="Calibri" pitchFamily="34" charset="-120"/>
+              </a:rPr>
+              <a:t>PSNR 27.06 dB | SSIM 0.7709</a:t>
+            </a:r>
+            <a:endParaRPr lang="en-US" sz="950" dirty="0"/>
+          </a:p>
+        </p:txBody>
+      </p:sp>
+      <p:pic>
+        <p:nvPicPr>
+          <p:cNvPr id="27" name="Image 7" descr="/home/claude/work/img/SR_image_scale_4_noise_0_01_lambda_9_000000e-02_p_0_4_PSNR_27_24_SSIM_0_7737.png"/>
+          <p:cNvPicPr>
+            <a:picLocks noChangeAspect="1"/>
+          </p:cNvPicPr>
+          <p:nvPr/>
+        </p:nvPicPr>
+        <p:blipFill>
+          <a:blip r:embed="rId9"/>
+          <a:stretch>
+            <a:fillRect/>
+          </a:stretch>
+        </p:blipFill>
+        <p:spPr>
+          <a:xfrm>
+            <a:off x="9459468" y="4297680"/>
+            <a:ext cx="1508760" cy="1508760"/>
+          </a:xfrm>
+          <a:prstGeom prst="rect">
+            <a:avLst/>
+          </a:prstGeom>
+        </p:spPr>
+      </p:pic>
+      <p:sp>
+        <p:nvSpPr>
+          <p:cNvPr id="28" name="Shape 18"/>
+          <p:cNvSpPr/>
+          <p:nvPr/>
+        </p:nvSpPr>
+        <p:spPr>
+          <a:xfrm>
+            <a:off x="9459468" y="4297680"/>
+            <a:ext cx="1508760" cy="1508760"/>
+          </a:xfrm>
+          <a:prstGeom prst="rect">
+            <a:avLst/>
+          </a:prstGeom>
+          <a:ln w="9525">
+            <a:solidFill>
+              <a:srgbClr val="D8E2E5"/>
+            </a:solidFill>
+            <a:prstDash val="solid"/>
+          </a:ln>
+        </p:spPr>
+        <p:txBody>
+          <a:bodyPr/>
+          <a:lstStyle/>
+          <a:p>
+            <a:endParaRPr lang="it-IT"/>
+          </a:p>
+        </p:txBody>
+      </p:sp>
+      <p:sp>
+        <p:nvSpPr>
+          <p:cNvPr id="29" name="Text 19"/>
+          <p:cNvSpPr/>
+          <p:nvPr/>
+        </p:nvSpPr>
+        <p:spPr>
+          <a:xfrm>
+            <a:off x="8833104" y="5843016"/>
+            <a:ext cx="2761488" cy="320040"/>
+          </a:xfrm>
+          <a:prstGeom prst="rect">
+            <a:avLst/>
+          </a:prstGeom>
+          <a:noFill/>
+          <a:ln/>
+        </p:spPr>
+        <p:txBody>
+          <a:bodyPr wrap="square" rtlCol="0" anchor="ctr"/>
+          <a:lstStyle/>
+          <a:p>
+            <a:pPr marL="0" indent="0" algn="ctr">
+              <a:buNone/>
+            </a:pPr>
+            <a:r>
+              <a:rPr lang="en-US" sz="950" dirty="0">
+                <a:solidFill>
+                  <a:srgbClr val="5C7285"/>
+                </a:solidFill>
+                <a:latin typeface="Calibri" pitchFamily="34" charset="0"/>
+                <a:ea typeface="Calibri" pitchFamily="34" charset="-122"/>
+                <a:cs typeface="Calibri" pitchFamily="34" charset="-120"/>
+              </a:rPr>
+              <a:t>PSNR 27.24 dB | SSIM 0.7737</a:t>
+            </a:r>
+            <a:endParaRPr lang="en-US" sz="950" dirty="0"/>
+          </a:p>
+        </p:txBody>
+      </p:sp>
+      <p:sp>
+        <p:nvSpPr>
+          <p:cNvPr id="30" name="Text 20"/>
           <p:cNvSpPr/>
           <p:nvPr/>
         </p:nvSpPr>
@@ -7340,7 +7708,7 @@
       </p:sp>
       <p:sp>
         <p:nvSpPr>
-          <p:cNvPr id="19" name="Text 13"/>
+          <p:cNvPr id="31" name="Text 21"/>
           <p:cNvSpPr/>
           <p:nvPr/>
         </p:nvSpPr>
@@ -7371,7 +7739,7 @@
                 <a:ea typeface="Calibri" pitchFamily="34" charset="-122"/>
                 <a:cs typeface="Calibri" pitchFamily="34" charset="-120"/>
               </a:rPr>
-              <a:t>12</a:t>
+              <a:t>9</a:t>
             </a:r>
             <a:endParaRPr lang="en-US" sz="900" dirty="0"/>
           </a:p>
@@ -7379,10 +7747,10 @@
       </p:sp>
       <p:sp>
         <p:nvSpPr>
-          <p:cNvPr id="21" name="object 9">
+          <p:cNvPr id="33" name="object 9">
             <a:extLst>
               <a:ext uri="{FF2B5EF4-FFF2-40B4-BE49-F238E27FC236}">
-                <a16:creationId xmlns:a16="http://schemas.microsoft.com/office/drawing/2014/main" id="{964A8F11-0F4C-8ABC-FA4A-7D38A973C5C0}"/>
+                <a16:creationId xmlns:a16="http://schemas.microsoft.com/office/drawing/2014/main" id="{DBD61B10-B1E2-4AFB-B373-3FEF49A33E17}"/>
               </a:ext>
             </a:extLst>
           </p:cNvPr>
@@ -7398,7 +7766,7 @@
             <a:avLst/>
           </a:prstGeom>
           <a:blipFill>
-            <a:blip r:embed="rId6" cstate="print"/>
+            <a:blip r:embed="rId10" cstate="print"/>
             <a:stretch>
               <a:fillRect/>
             </a:stretch>
@@ -22520,7 +22888,7 @@
 
 <file path=ppt/slides/slide8.xml><?xml version="1.0" encoding="utf-8"?>
 <p:sld xmlns:a="http://schemas.openxmlformats.org/drawingml/2006/main" xmlns:r="http://schemas.openxmlformats.org/officeDocument/2006/relationships" xmlns:p="http://schemas.openxmlformats.org/presentationml/2006/main">
-  <p:cSld name="Slide 7">
+  <p:cSld name="Slide 10">
     <p:bg>
       <p:bgPr>
         <a:solidFill>
@@ -22576,7 +22944,7 @@
                 <a:ea typeface="Cambria" pitchFamily="34" charset="-122"/>
                 <a:cs typeface="Cambria" pitchFamily="34" charset="-120"/>
               </a:rPr>
-              <a:t>TpV — Quantitative Results</a:t>
+              <a:t>End-to-End (U-Net) — Quantitative Results</a:t>
             </a:r>
             <a:endParaRPr lang="en-US" sz="3000" dirty="0"/>
           </a:p>
@@ -22615,7 +22983,7 @@
                 <a:ea typeface="Calibri" pitchFamily="34" charset="-122"/>
                 <a:cs typeface="Calibri" pitchFamily="34" charset="-120"/>
               </a:rPr>
-              <a:t>Average PSNR / SSIM on the first batch of test set (Chambolle-Pock, 150 iterations, best λ = 9×10⁻²)</a:t>
+              <a:t>Average PSNR / SSIM on the first batch of test set, and on the single reference image 0.png (Attention U-Net, 8 epochs)</a:t>
             </a:r>
             <a:endParaRPr lang="en-US" sz="1300" dirty="0"/>
           </a:p>
@@ -22623,7 +22991,7 @@
       </p:sp>
       <p:graphicFrame>
         <p:nvGraphicFramePr>
-          <p:cNvPr id="8" name="Table 0"/>
+          <p:cNvPr id="11" name="Table 0"/>
           <p:cNvGraphicFramePr>
             <a:graphicFrameLocks noGrp="1"/>
           </p:cNvGraphicFramePr>
@@ -22683,7 +23051,7 @@
                         <a:buNone/>
                       </a:pPr>
                       <a:r>
-                        <a:rPr lang="en-US" sz="1400" b="1" dirty="0">
+                        <a:rPr lang="en-US" sz="1350" b="1" dirty="0">
                           <a:solidFill>
                             <a:srgbClr val="FFFFFF"/>
                           </a:solidFill>
@@ -22693,7 +23061,7 @@
                         </a:rPr>
                         <a:t>Scale</a:t>
                       </a:r>
-                      <a:endParaRPr lang="en-US" sz="1400" dirty="0">
+                      <a:endParaRPr lang="en-US" sz="1350" dirty="0">
                         <a:latin typeface="Calibri" charset="0"/>
                         <a:ea typeface="Calibri" charset="0"/>
                         <a:cs typeface="Calibri" charset="0"/>
@@ -22738,7 +23106,7 @@
                       <a:tailEnd type="none" w="med" len="med"/>
                     </a:lnB>
                     <a:solidFill>
-                      <a:srgbClr val="13678A"/>
+                      <a:srgbClr val="0B2545"/>
                     </a:solidFill>
                   </a:tcPr>
                 </a:tc>
@@ -22751,7 +23119,7 @@
                         <a:buNone/>
                       </a:pPr>
                       <a:r>
-                        <a:rPr lang="en-US" sz="1400" b="1" dirty="0">
+                        <a:rPr lang="en-US" sz="1350" b="1" dirty="0">
                           <a:solidFill>
                             <a:srgbClr val="FFFFFF"/>
                           </a:solidFill>
@@ -22761,7 +23129,7 @@
                         </a:rPr>
                         <a:t>Noise σ</a:t>
                       </a:r>
-                      <a:endParaRPr lang="en-US" sz="1400" dirty="0">
+                      <a:endParaRPr lang="en-US" sz="1350" dirty="0">
                         <a:latin typeface="Calibri" charset="0"/>
                         <a:ea typeface="Calibri" charset="0"/>
                         <a:cs typeface="Calibri" charset="0"/>
@@ -22806,7 +23174,7 @@
                       <a:tailEnd type="none" w="med" len="med"/>
                     </a:lnB>
                     <a:solidFill>
-                      <a:srgbClr val="13678A"/>
+                      <a:srgbClr val="0B2545"/>
                     </a:solidFill>
                   </a:tcPr>
                 </a:tc>
@@ -22819,7 +23187,7 @@
                         <a:buNone/>
                       </a:pPr>
                       <a:r>
-                        <a:rPr lang="en-US" sz="1400" b="1" dirty="0">
+                        <a:rPr lang="en-US" sz="1350" b="1" dirty="0">
                           <a:solidFill>
                             <a:srgbClr val="FFFFFF"/>
                           </a:solidFill>
@@ -22827,9 +23195,9 @@
                           <a:ea typeface="Calibri" pitchFamily="34" charset="-122"/>
                           <a:cs typeface="Calibri" pitchFamily="34" charset="-120"/>
                         </a:rPr>
-                        <a:t>p = 0.1  (PSNR / SSIM)</a:t>
+                        <a:t>Test set (PSNR / SSIM)</a:t>
                       </a:r>
-                      <a:endParaRPr lang="en-US" sz="1400" dirty="0">
+                      <a:endParaRPr lang="en-US" sz="1350" dirty="0">
                         <a:latin typeface="Calibri" charset="0"/>
                         <a:ea typeface="Calibri" charset="0"/>
                         <a:cs typeface="Calibri" charset="0"/>
@@ -22874,7 +23242,7 @@
                       <a:tailEnd type="none" w="med" len="med"/>
                     </a:lnB>
                     <a:solidFill>
-                      <a:srgbClr val="13678A"/>
+                      <a:srgbClr val="0B2545"/>
                     </a:solidFill>
                   </a:tcPr>
                 </a:tc>
@@ -22887,7 +23255,7 @@
                         <a:buNone/>
                       </a:pPr>
                       <a:r>
-                        <a:rPr lang="en-US" sz="1400" b="1" dirty="0">
+                        <a:rPr lang="en-US" sz="1350" b="1" dirty="0">
                           <a:solidFill>
                             <a:srgbClr val="FFFFFF"/>
                           </a:solidFill>
@@ -22895,9 +23263,9 @@
                           <a:ea typeface="Calibri" pitchFamily="34" charset="-122"/>
                           <a:cs typeface="Calibri" pitchFamily="34" charset="-120"/>
                         </a:rPr>
-                        <a:t>p = 0.4  (PSNR / SSIM)</a:t>
+                        <a:t>0.png (PSNR / SSIM)</a:t>
                       </a:r>
-                      <a:endParaRPr lang="en-US" sz="1400" dirty="0">
+                      <a:endParaRPr lang="en-US" sz="1350" dirty="0">
                         <a:latin typeface="Calibri" charset="0"/>
                         <a:ea typeface="Calibri" charset="0"/>
                         <a:cs typeface="Calibri" charset="0"/>
@@ -22942,7 +23310,7 @@
                       <a:tailEnd type="none" w="med" len="med"/>
                     </a:lnB>
                     <a:solidFill>
-                      <a:srgbClr val="13678A"/>
+                      <a:srgbClr val="0B2545"/>
                     </a:solidFill>
                   </a:tcPr>
                 </a:tc>
@@ -22962,7 +23330,7 @@
                         <a:buNone/>
                       </a:pPr>
                       <a:r>
-                        <a:rPr lang="en-US" sz="1400" dirty="0">
+                        <a:rPr lang="en-US" sz="1350" dirty="0">
                           <a:solidFill>
                             <a:srgbClr val="1B2A3A"/>
                           </a:solidFill>
@@ -22972,7 +23340,7 @@
                         </a:rPr>
                         <a:t>×2</a:t>
                       </a:r>
-                      <a:endParaRPr lang="en-US" sz="1400" dirty="0">
+                      <a:endParaRPr lang="en-US" sz="1350" dirty="0">
                         <a:latin typeface="Calibri" charset="0"/>
                         <a:ea typeface="Calibri" charset="0"/>
                         <a:cs typeface="Calibri" charset="0"/>
@@ -23027,7 +23395,7 @@
                         <a:buNone/>
                       </a:pPr>
                       <a:r>
-                        <a:rPr lang="en-US" sz="1400" dirty="0">
+                        <a:rPr lang="en-US" sz="1350" dirty="0">
                           <a:solidFill>
                             <a:srgbClr val="1B2A3A"/>
                           </a:solidFill>
@@ -23037,7 +23405,7 @@
                         </a:rPr>
                         <a:t>0.005</a:t>
                       </a:r>
-                      <a:endParaRPr lang="en-US" sz="1400" dirty="0">
+                      <a:endParaRPr lang="en-US" sz="1350" dirty="0">
                         <a:latin typeface="Calibri" charset="0"/>
                         <a:ea typeface="Calibri" charset="0"/>
                         <a:cs typeface="Calibri" charset="0"/>
@@ -23092,7 +23460,7 @@
                         <a:buNone/>
                       </a:pPr>
                       <a:r>
-                        <a:rPr lang="en-US" sz="1400" dirty="0">
+                        <a:rPr lang="en-US" sz="1350" dirty="0">
                           <a:solidFill>
                             <a:srgbClr val="1B2A3A"/>
                           </a:solidFill>
@@ -23100,9 +23468,9 @@
                           <a:ea typeface="Calibri" pitchFamily="34" charset="-122"/>
                           <a:cs typeface="Calibri" pitchFamily="34" charset="-120"/>
                         </a:rPr>
-                        <a:t>31.06 dB / 0.8956</a:t>
+                        <a:t>33.19 dB / 0.9460</a:t>
                       </a:r>
-                      <a:endParaRPr lang="en-US" sz="1400" dirty="0">
+                      <a:endParaRPr lang="en-US" sz="1350" dirty="0">
                         <a:latin typeface="Calibri" charset="0"/>
                         <a:ea typeface="Calibri" charset="0"/>
                         <a:cs typeface="Calibri" charset="0"/>
@@ -23157,7 +23525,7 @@
                         <a:buNone/>
                       </a:pPr>
                       <a:r>
-                        <a:rPr lang="en-US" sz="1400" dirty="0">
+                        <a:rPr lang="en-US" sz="1350" dirty="0">
                           <a:solidFill>
                             <a:srgbClr val="1B2A3A"/>
                           </a:solidFill>
@@ -23165,9 +23533,9 @@
                           <a:ea typeface="Calibri" pitchFamily="34" charset="-122"/>
                           <a:cs typeface="Calibri" pitchFamily="34" charset="-120"/>
                         </a:rPr>
-                        <a:t>31.32 dB / 0.8932</a:t>
+                        <a:t>33.57 dB / 0.9487</a:t>
                       </a:r>
-                      <a:endParaRPr lang="en-US" sz="1400" dirty="0">
+                      <a:endParaRPr lang="en-US" sz="1350" dirty="0">
                         <a:latin typeface="Calibri" charset="0"/>
                         <a:ea typeface="Calibri" charset="0"/>
                         <a:cs typeface="Calibri" charset="0"/>
@@ -23229,7 +23597,7 @@
                         <a:buNone/>
                       </a:pPr>
                       <a:r>
-                        <a:rPr lang="en-US" sz="1400" dirty="0">
+                        <a:rPr lang="en-US" sz="1350" dirty="0">
                           <a:solidFill>
                             <a:srgbClr val="1B2A3A"/>
                           </a:solidFill>
@@ -23239,7 +23607,7 @@
                         </a:rPr>
                         <a:t>×2</a:t>
                       </a:r>
-                      <a:endParaRPr lang="en-US" sz="1400" dirty="0">
+                      <a:endParaRPr lang="en-US" sz="1350" dirty="0">
                         <a:latin typeface="Calibri" charset="0"/>
                         <a:ea typeface="Calibri" charset="0"/>
                         <a:cs typeface="Calibri" charset="0"/>
@@ -23294,7 +23662,7 @@
                         <a:buNone/>
                       </a:pPr>
                       <a:r>
-                        <a:rPr lang="en-US" sz="1400" dirty="0">
+                        <a:rPr lang="en-US" sz="1350" dirty="0">
                           <a:solidFill>
                             <a:srgbClr val="1B2A3A"/>
                           </a:solidFill>
@@ -23304,7 +23672,7 @@
                         </a:rPr>
                         <a:t>0.01</a:t>
                       </a:r>
-                      <a:endParaRPr lang="en-US" sz="1400" dirty="0">
+                      <a:endParaRPr lang="en-US" sz="1350" dirty="0">
                         <a:latin typeface="Calibri" charset="0"/>
                         <a:ea typeface="Calibri" charset="0"/>
                         <a:cs typeface="Calibri" charset="0"/>
@@ -23359,7 +23727,7 @@
                         <a:buNone/>
                       </a:pPr>
                       <a:r>
-                        <a:rPr lang="en-US" sz="1400" dirty="0">
+                        <a:rPr lang="en-US" sz="1350" dirty="0">
                           <a:solidFill>
                             <a:srgbClr val="1B2A3A"/>
                           </a:solidFill>
@@ -23367,9 +23735,9 @@
                           <a:ea typeface="Calibri" pitchFamily="34" charset="-122"/>
                           <a:cs typeface="Calibri" pitchFamily="34" charset="-120"/>
                         </a:rPr>
-                        <a:t>30.88 dB / 0.8870</a:t>
+                        <a:t>39.78 dB / 0.9723</a:t>
                       </a:r>
-                      <a:endParaRPr lang="en-US" sz="1400" dirty="0">
+                      <a:endParaRPr lang="en-US" sz="1350" dirty="0">
                         <a:latin typeface="Calibri" charset="0"/>
                         <a:ea typeface="Calibri" charset="0"/>
                         <a:cs typeface="Calibri" charset="0"/>
@@ -23424,7 +23792,7 @@
                         <a:buNone/>
                       </a:pPr>
                       <a:r>
-                        <a:rPr lang="en-US" sz="1400" dirty="0">
+                        <a:rPr lang="en-US" sz="1350" dirty="0">
                           <a:solidFill>
                             <a:srgbClr val="1B2A3A"/>
                           </a:solidFill>
@@ -23432,9 +23800,9 @@
                           <a:ea typeface="Calibri" pitchFamily="34" charset="-122"/>
                           <a:cs typeface="Calibri" pitchFamily="34" charset="-120"/>
                         </a:rPr>
-                        <a:t>31.19 dB / 0.8882</a:t>
+                        <a:t>39.90 dB / 0.9734</a:t>
                       </a:r>
-                      <a:endParaRPr lang="en-US" sz="1400" dirty="0">
+                      <a:endParaRPr lang="en-US" sz="1350" dirty="0">
                         <a:latin typeface="Calibri" charset="0"/>
                         <a:ea typeface="Calibri" charset="0"/>
                         <a:cs typeface="Calibri" charset="0"/>
@@ -23496,7 +23864,7 @@
                         <a:buNone/>
                       </a:pPr>
                       <a:r>
-                        <a:rPr lang="en-US" sz="1400" dirty="0">
+                        <a:rPr lang="en-US" sz="1350" dirty="0">
                           <a:solidFill>
                             <a:srgbClr val="1B2A3A"/>
                           </a:solidFill>
@@ -23506,7 +23874,7 @@
                         </a:rPr>
                         <a:t>×4</a:t>
                       </a:r>
-                      <a:endParaRPr lang="en-US" sz="1400" dirty="0">
+                      <a:endParaRPr lang="en-US" sz="1350" dirty="0">
                         <a:latin typeface="Calibri" charset="0"/>
                         <a:ea typeface="Calibri" charset="0"/>
                         <a:cs typeface="Calibri" charset="0"/>
@@ -23561,7 +23929,7 @@
                         <a:buNone/>
                       </a:pPr>
                       <a:r>
-                        <a:rPr lang="en-US" sz="1400" dirty="0">
+                        <a:rPr lang="en-US" sz="1350" dirty="0">
                           <a:solidFill>
                             <a:srgbClr val="1B2A3A"/>
                           </a:solidFill>
@@ -23571,7 +23939,7 @@
                         </a:rPr>
                         <a:t>0.005</a:t>
                       </a:r>
-                      <a:endParaRPr lang="en-US" sz="1400" dirty="0">
+                      <a:endParaRPr lang="en-US" sz="1350" dirty="0">
                         <a:latin typeface="Calibri" charset="0"/>
                         <a:ea typeface="Calibri" charset="0"/>
                         <a:cs typeface="Calibri" charset="0"/>
@@ -23626,7 +23994,7 @@
                         <a:buNone/>
                       </a:pPr>
                       <a:r>
-                        <a:rPr lang="en-US" sz="1400" dirty="0">
+                        <a:rPr lang="en-US" sz="1350" dirty="0">
                           <a:solidFill>
                             <a:srgbClr val="1B2A3A"/>
                           </a:solidFill>
@@ -23634,9 +24002,9 @@
                           <a:ea typeface="Calibri" pitchFamily="34" charset="-122"/>
                           <a:cs typeface="Calibri" pitchFamily="34" charset="-120"/>
                         </a:rPr>
-                        <a:t>26.85 dB / 0.7790</a:t>
+                        <a:t>33.98 dB / 0.9199</a:t>
                       </a:r>
-                      <a:endParaRPr lang="en-US" sz="1400" dirty="0">
+                      <a:endParaRPr lang="en-US" sz="1350" dirty="0">
                         <a:latin typeface="Calibri" charset="0"/>
                         <a:ea typeface="Calibri" charset="0"/>
                         <a:cs typeface="Calibri" charset="0"/>
@@ -23691,7 +24059,7 @@
                         <a:buNone/>
                       </a:pPr>
                       <a:r>
-                        <a:rPr lang="en-US" sz="1400" dirty="0">
+                        <a:rPr lang="en-US" sz="1350" dirty="0">
                           <a:solidFill>
                             <a:srgbClr val="1B2A3A"/>
                           </a:solidFill>
@@ -23699,9 +24067,9 @@
                           <a:ea typeface="Calibri" pitchFamily="34" charset="-122"/>
                           <a:cs typeface="Calibri" pitchFamily="34" charset="-120"/>
                         </a:rPr>
-                        <a:t>27.13 dB / 0.7845</a:t>
+                        <a:t>34.25 dB / 0.9212</a:t>
                       </a:r>
-                      <a:endParaRPr lang="en-US" sz="1400" dirty="0">
+                      <a:endParaRPr lang="en-US" sz="1350" dirty="0">
                         <a:latin typeface="Calibri" charset="0"/>
                         <a:ea typeface="Calibri" charset="0"/>
                         <a:cs typeface="Calibri" charset="0"/>
@@ -23763,7 +24131,7 @@
                         <a:buNone/>
                       </a:pPr>
                       <a:r>
-                        <a:rPr lang="en-US" sz="1400" dirty="0">
+                        <a:rPr lang="en-US" sz="1350" dirty="0">
                           <a:solidFill>
                             <a:srgbClr val="1B2A3A"/>
                           </a:solidFill>
@@ -23773,7 +24141,7 @@
                         </a:rPr>
                         <a:t>×4</a:t>
                       </a:r>
-                      <a:endParaRPr lang="en-US" sz="1400" dirty="0">
+                      <a:endParaRPr lang="en-US" sz="1350" dirty="0">
                         <a:latin typeface="Calibri" charset="0"/>
                         <a:ea typeface="Calibri" charset="0"/>
                         <a:cs typeface="Calibri" charset="0"/>
@@ -23828,7 +24196,7 @@
                         <a:buNone/>
                       </a:pPr>
                       <a:r>
-                        <a:rPr lang="en-US" sz="1400" dirty="0">
+                        <a:rPr lang="en-US" sz="1350" dirty="0">
                           <a:solidFill>
                             <a:srgbClr val="1B2A3A"/>
                           </a:solidFill>
@@ -23838,7 +24206,7 @@
                         </a:rPr>
                         <a:t>0.01</a:t>
                       </a:r>
-                      <a:endParaRPr lang="en-US" sz="1400" dirty="0">
+                      <a:endParaRPr lang="en-US" sz="1350" dirty="0">
                         <a:latin typeface="Calibri" charset="0"/>
                         <a:ea typeface="Calibri" charset="0"/>
                         <a:cs typeface="Calibri" charset="0"/>
@@ -23893,7 +24261,7 @@
                         <a:buNone/>
                       </a:pPr>
                       <a:r>
-                        <a:rPr lang="en-US" sz="1400" dirty="0">
+                        <a:rPr lang="en-US" sz="1350" dirty="0">
                           <a:solidFill>
                             <a:srgbClr val="1B2A3A"/>
                           </a:solidFill>
@@ -23901,9 +24269,9 @@
                           <a:ea typeface="Calibri" pitchFamily="34" charset="-122"/>
                           <a:cs typeface="Calibri" pitchFamily="34" charset="-120"/>
                         </a:rPr>
-                        <a:t>26.78 dB / 0.7725</a:t>
+                        <a:t>33.74 dB / 0.9139</a:t>
                       </a:r>
-                      <a:endParaRPr lang="en-US" sz="1400" dirty="0">
+                      <a:endParaRPr lang="en-US" sz="1350" dirty="0">
                         <a:latin typeface="Calibri" charset="0"/>
                         <a:ea typeface="Calibri" charset="0"/>
                         <a:cs typeface="Calibri" charset="0"/>
@@ -23958,7 +24326,7 @@
                         <a:buNone/>
                       </a:pPr>
                       <a:r>
-                        <a:rPr lang="en-US" sz="1400" dirty="0">
+                        <a:rPr lang="en-US" sz="1350" dirty="0">
                           <a:solidFill>
                             <a:srgbClr val="1B2A3A"/>
                           </a:solidFill>
@@ -23966,9 +24334,9 @@
                           <a:ea typeface="Calibri" pitchFamily="34" charset="-122"/>
                           <a:cs typeface="Calibri" pitchFamily="34" charset="-120"/>
                         </a:rPr>
-                        <a:t>27.06 dB / 0.7785</a:t>
+                        <a:t>34.00 dB / 0.9154</a:t>
                       </a:r>
-                      <a:endParaRPr lang="en-US" sz="1400" dirty="0">
+                      <a:endParaRPr lang="en-US" sz="1350" dirty="0">
                         <a:latin typeface="Calibri" charset="0"/>
                         <a:ea typeface="Calibri" charset="0"/>
                         <a:cs typeface="Calibri" charset="0"/>
@@ -24128,7 +24496,7 @@
               <a:buChar char="•"/>
             </a:pPr>
             <a:r>
-              <a:rPr lang="en-US" sz="1200" dirty="0">
+              <a:rPr lang="en-US" sz="1150" dirty="0">
                 <a:solidFill>
                   <a:srgbClr val="1B2A3A"/>
                 </a:solidFill>
@@ -24136,9 +24504,9 @@
                 <a:ea typeface="Calibri" pitchFamily="34" charset="-122"/>
                 <a:cs typeface="Calibri" pitchFamily="34" charset="-120"/>
               </a:rPr>
-              <a:t>λ = 9×10⁻² is the best regularization weight across every scale/noise combination tested</a:t>
-            </a:r>
-            <a:endParaRPr lang="en-US" sz="1200" dirty="0"/>
+              <a:t>U-Net clearly outperforms TpV in every configuration (up to +9–12 dB PSNR)</a:t>
+            </a:r>
+            <a:endParaRPr lang="en-US" sz="1150" dirty="0"/>
           </a:p>
           <a:p>
             <a:pPr marL="342900" indent="-342900">
@@ -24149,7 +24517,7 @@
               <a:buChar char="•"/>
             </a:pPr>
             <a:r>
-              <a:rPr lang="en-US" sz="1200" dirty="0">
+              <a:rPr lang="en-US" sz="1150" dirty="0">
                 <a:solidFill>
                   <a:srgbClr val="1B2A3A"/>
                 </a:solidFill>
@@ -24157,9 +24525,9 @@
                 <a:ea typeface="Calibri" pitchFamily="34" charset="-122"/>
                 <a:cs typeface="Calibri" pitchFamily="34" charset="-120"/>
               </a:rPr>
-              <a:t>p = 0.4 consistently outperforms p = 0.1 (both PSNR and SSIM)</a:t>
-            </a:r>
-            <a:endParaRPr lang="en-US" sz="1200" dirty="0"/>
+              <a:t>Unlike TpV, PSNR/SSIM stay close (or improve) when moving from ×2 to ×4, showing the network compensates for the coarser degradation</a:t>
+            </a:r>
+            <a:endParaRPr lang="en-US" sz="1150" dirty="0"/>
           </a:p>
           <a:p>
             <a:pPr marL="342900" indent="-342900">
@@ -24170,7 +24538,7 @@
               <a:buChar char="•"/>
             </a:pPr>
             <a:r>
-              <a:rPr lang="en-US" sz="1200" dirty="0">
+              <a:rPr lang="en-US" sz="1150" dirty="0">
                 <a:solidFill>
                   <a:srgbClr val="1B2A3A"/>
                 </a:solidFill>
@@ -24178,9 +24546,9 @@
                 <a:ea typeface="Calibri" pitchFamily="34" charset="-122"/>
                 <a:cs typeface="Calibri" pitchFamily="34" charset="-120"/>
               </a:rPr>
-              <a:t>Performance is dominated by the downscale factor: ×2 reaches ~31 dB, ×4 drops to ~27 dB</a:t>
-            </a:r>
-            <a:endParaRPr lang="en-US" sz="1200" dirty="0"/>
+              <a:t>Scale ×2, noise 0.01 is the best result overall (39.78 dB / 0.9723) — notably higher than ×2, noise 0.005</a:t>
+            </a:r>
+            <a:endParaRPr lang="en-US" sz="1150" dirty="0"/>
           </a:p>
           <a:p>
             <a:pPr marL="342900" indent="-342900">
@@ -24191,7 +24559,7 @@
               <a:buChar char="•"/>
             </a:pPr>
             <a:r>
-              <a:rPr lang="en-US" sz="1200" dirty="0">
+              <a:rPr lang="en-US" sz="1150" dirty="0">
                 <a:solidFill>
                   <a:srgbClr val="1B2A3A"/>
                 </a:solidFill>
@@ -24199,15 +24567,15 @@
                 <a:ea typeface="Calibri" pitchFamily="34" charset="-122"/>
                 <a:cs typeface="Calibri" pitchFamily="34" charset="-120"/>
               </a:rPr>
-              <a:t>Sensitivity to noise level (0.005 vs 0.01) is comparatively small</a:t>
-            </a:r>
-            <a:endParaRPr lang="en-US" sz="1200" dirty="0"/>
-          </a:p>
-        </p:txBody>
-      </p:sp>
-      <p:sp>
-        <p:nvSpPr>
-          <p:cNvPr id="4" name="Text 5"/>
+              <a:t>Single-image (0.png) metrics are consistently with the test set batch average</a:t>
+            </a:r>
+            <a:endParaRPr lang="en-US" sz="1150" dirty="0"/>
+          </a:p>
+        </p:txBody>
+      </p:sp>
+      <p:sp>
+        <p:nvSpPr>
+          <p:cNvPr id="8" name="Text 5"/>
           <p:cNvSpPr/>
           <p:nvPr/>
         </p:nvSpPr>
@@ -24238,7 +24606,7 @@
                 <a:ea typeface="Calibri" pitchFamily="34" charset="-122"/>
                 <a:cs typeface="Calibri" pitchFamily="34" charset="-120"/>
               </a:rPr>
-              <a:t>λ ∈ {1e-3, 8e-2, 9e-2} tested for scale ×4; λ ∈ {5e-3, 9e-2, 4e-1} for scale ×2 (test-set batch average)</a:t>
+              <a:t>Each (scale, noise) combination corresponds to an independently trained model checkpoint (4 variants).</a:t>
             </a:r>
             <a:endParaRPr lang="en-US" sz="1150" dirty="0"/>
           </a:p>
@@ -24316,7 +24684,7 @@
                 <a:ea typeface="Calibri" pitchFamily="34" charset="-122"/>
                 <a:cs typeface="Calibri" pitchFamily="34" charset="-120"/>
               </a:rPr>
-              <a:t>7</a:t>
+              <a:t>10</a:t>
             </a:r>
             <a:endParaRPr lang="en-US" sz="900" dirty="0"/>
           </a:p>
@@ -24327,7 +24695,7 @@
           <p:cNvPr id="12" name="object 9">
             <a:extLst>
               <a:ext uri="{FF2B5EF4-FFF2-40B4-BE49-F238E27FC236}">
-                <a16:creationId xmlns:a16="http://schemas.microsoft.com/office/drawing/2014/main" id="{BA8709F8-1B28-56A8-A4C3-7C2F4067AB1A}"/>
+                <a16:creationId xmlns:a16="http://schemas.microsoft.com/office/drawing/2014/main" id="{C68A74D3-3372-B5B2-493B-81A32B0722FD}"/>
               </a:ext>
             </a:extLst>
           </p:cNvPr>
@@ -24369,7 +24737,7 @@
 
 <file path=ppt/slides/slide9.xml><?xml version="1.0" encoding="utf-8"?>
 <p:sld xmlns:a="http://schemas.openxmlformats.org/drawingml/2006/main" xmlns:r="http://schemas.openxmlformats.org/officeDocument/2006/relationships" xmlns:p="http://schemas.openxmlformats.org/presentationml/2006/main">
-  <p:cSld name="Slide 8">
+  <p:cSld name="Slide 11">
     <p:bg>
       <p:bgPr>
         <a:solidFill>
@@ -24425,7 +24793,7 @@
                 <a:ea typeface="Cambria" pitchFamily="34" charset="-122"/>
                 <a:cs typeface="Cambria" pitchFamily="34" charset="-120"/>
               </a:rPr>
-              <a:t>TpV — Visual Comparison (Scale ×2)</a:t>
+              <a:t>U-Net — Visual Comparison (Scale ×2)</a:t>
             </a:r>
             <a:endParaRPr lang="en-US" sz="3000" dirty="0"/>
           </a:p>
@@ -24464,7 +24832,7 @@
                 <a:ea typeface="Calibri" pitchFamily="34" charset="-122"/>
                 <a:cs typeface="Calibri" pitchFamily="34" charset="-120"/>
               </a:rPr>
-              <a:t>Single test image (0.png) — Ground truth vs. corrupted observation vs. TpV reconstruction (λ = 9×10⁻²)</a:t>
+              <a:t>Single test image (0.png) — Ground truth vs. U-Net reconstruction</a:t>
             </a:r>
             <a:endParaRPr lang="en-US" sz="1250" dirty="0"/>
           </a:p>
@@ -24497,7 +24865,7 @@
             <a:r>
               <a:rPr lang="en-US" sz="1350" b="1" dirty="0">
                 <a:solidFill>
-                  <a:srgbClr val="13678A"/>
+                  <a:srgbClr val="0B2545"/>
                 </a:solidFill>
                 <a:latin typeface="Calibri" pitchFamily="34" charset="0"/>
                 <a:ea typeface="Calibri" pitchFamily="34" charset="-122"/>
@@ -24525,8 +24893,8 @@
         </p:blipFill>
         <p:spPr>
           <a:xfrm>
-            <a:off x="1175004" y="1828800"/>
-            <a:ext cx="1508760" cy="1508760"/>
+            <a:off x="3396996" y="1708036"/>
+            <a:ext cx="2286000" cy="2286000"/>
           </a:xfrm>
           <a:prstGeom prst="rect">
             <a:avLst/>
@@ -24541,8 +24909,8 @@
         </p:nvSpPr>
         <p:spPr>
           <a:xfrm>
-            <a:off x="1175004" y="1828800"/>
-            <a:ext cx="1508760" cy="1508760"/>
+            <a:off x="3396996" y="1708036"/>
+            <a:ext cx="2286000" cy="2286000"/>
           </a:xfrm>
           <a:prstGeom prst="rect">
             <a:avLst/>
@@ -24570,8 +24938,8 @@
         </p:nvSpPr>
         <p:spPr>
           <a:xfrm>
-            <a:off x="548640" y="3374136"/>
-            <a:ext cx="2761488" cy="320040"/>
+            <a:off x="2985516" y="4030612"/>
+            <a:ext cx="3108960" cy="274320"/>
           </a:xfrm>
           <a:prstGeom prst="rect">
             <a:avLst/>
@@ -24587,7 +24955,7 @@
               <a:buNone/>
             </a:pPr>
             <a:r>
-              <a:rPr lang="en-US" sz="950" dirty="0">
+              <a:rPr lang="en-US" sz="1050" dirty="0">
                 <a:solidFill>
                   <a:srgbClr val="5C7285"/>
                 </a:solidFill>
@@ -24597,13 +24965,13 @@
               </a:rPr>
               <a:t>512×512 reference</a:t>
             </a:r>
-            <a:endParaRPr lang="en-US" sz="950" dirty="0"/>
+            <a:endParaRPr lang="en-US" sz="1050" dirty="0"/>
           </a:p>
         </p:txBody>
       </p:sp>
       <p:pic>
         <p:nvPicPr>
-          <p:cNvPr id="8" name="Image 1" descr="/home/claude/work/img/Noisy_image_scale_2_noise_0_005.png"/>
+          <p:cNvPr id="8" name="Image 1" descr="/home/claude/work/img2/prediction_UNet_MSE_SSIM_FL_Residual_Attention_PixelShuffle_noise005_scale2.png"/>
           <p:cNvPicPr>
             <a:picLocks noChangeAspect="1"/>
           </p:cNvPicPr>
@@ -24617,8 +24985,8 @@
         </p:blipFill>
         <p:spPr>
           <a:xfrm>
-            <a:off x="3936492" y="1828800"/>
-            <a:ext cx="1508760" cy="1508760"/>
+            <a:off x="6505956" y="1708036"/>
+            <a:ext cx="2286000" cy="2286000"/>
           </a:xfrm>
           <a:prstGeom prst="rect">
             <a:avLst/>
@@ -24633,8 +25001,8 @@
         </p:nvSpPr>
         <p:spPr>
           <a:xfrm>
-            <a:off x="3936492" y="1828800"/>
-            <a:ext cx="1508760" cy="1508760"/>
+            <a:off x="6505956" y="1708036"/>
+            <a:ext cx="2286000" cy="2286000"/>
           </a:xfrm>
           <a:prstGeom prst="rect">
             <a:avLst/>
@@ -24662,8 +25030,8 @@
         </p:nvSpPr>
         <p:spPr>
           <a:xfrm>
-            <a:off x="3310128" y="3374136"/>
-            <a:ext cx="2761488" cy="320040"/>
+            <a:off x="6094476" y="4030612"/>
+            <a:ext cx="3108960" cy="274320"/>
           </a:xfrm>
           <a:prstGeom prst="rect">
             <a:avLst/>
@@ -24679,7 +25047,7 @@
               <a:buNone/>
             </a:pPr>
             <a:r>
-              <a:rPr lang="en-US" sz="950" dirty="0">
+              <a:rPr lang="en-US" sz="1050" dirty="0">
                 <a:solidFill>
                   <a:srgbClr val="5C7285"/>
                 </a:solidFill>
@@ -24687,15 +25055,146 @@
                 <a:ea typeface="Calibri" pitchFamily="34" charset="-122"/>
                 <a:cs typeface="Calibri" pitchFamily="34" charset="-120"/>
               </a:rPr>
-              <a:t>×2, σ=0.005</a:t>
-            </a:r>
-            <a:endParaRPr lang="en-US" sz="950" dirty="0"/>
+              <a:t>PSNR 33.57 dB | SSIM 0.9487</a:t>
+            </a:r>
+            <a:endParaRPr lang="en-US" sz="1050" dirty="0"/>
+          </a:p>
+        </p:txBody>
+      </p:sp>
+      <p:sp>
+        <p:nvSpPr>
+          <p:cNvPr id="11" name="Text 7"/>
+          <p:cNvSpPr/>
+          <p:nvPr/>
+        </p:nvSpPr>
+        <p:spPr>
+          <a:xfrm>
+            <a:off x="548640" y="3977640"/>
+            <a:ext cx="5486400" cy="274320"/>
+          </a:xfrm>
+          <a:prstGeom prst="rect">
+            <a:avLst/>
+          </a:prstGeom>
+          <a:noFill/>
+          <a:ln/>
+        </p:spPr>
+        <p:txBody>
+          <a:bodyPr wrap="square" rtlCol="0" anchor="ctr"/>
+          <a:lstStyle/>
+          <a:p>
+            <a:pPr marL="0" indent="0">
+              <a:buNone/>
+            </a:pPr>
+            <a:r>
+              <a:rPr lang="en-US" sz="1350" b="1" dirty="0">
+                <a:solidFill>
+                  <a:srgbClr val="0B2545"/>
+                </a:solidFill>
+                <a:latin typeface="Calibri" pitchFamily="34" charset="0"/>
+                <a:ea typeface="Calibri" pitchFamily="34" charset="-122"/>
+                <a:cs typeface="Calibri" pitchFamily="34" charset="-120"/>
+              </a:rPr>
+              <a:t>Noise level σ = 0.01</a:t>
+            </a:r>
+            <a:endParaRPr lang="en-US" sz="1350" dirty="0"/>
           </a:p>
         </p:txBody>
       </p:sp>
       <p:pic>
         <p:nvPicPr>
-          <p:cNvPr id="11" name="Image 2" descr="/home/claude/work/img/SR_image_scale_2_noise_0_005_lambda_9_000000e-02_p_0_1_PSNR_31_29_SSIM_0_8937.png"/>
+          <p:cNvPr id="12" name="Image 2" descr="/home/claude/work/img/0.png"/>
+          <p:cNvPicPr>
+            <a:picLocks noChangeAspect="1"/>
+          </p:cNvPicPr>
+          <p:nvPr/>
+        </p:nvPicPr>
+        <p:blipFill>
+          <a:blip r:embed="rId3"/>
+          <a:stretch>
+            <a:fillRect/>
+          </a:stretch>
+        </p:blipFill>
+        <p:spPr>
+          <a:xfrm>
+            <a:off x="3396996" y="4297680"/>
+            <a:ext cx="2286000" cy="2286000"/>
+          </a:xfrm>
+          <a:prstGeom prst="rect">
+            <a:avLst/>
+          </a:prstGeom>
+        </p:spPr>
+      </p:pic>
+      <p:sp>
+        <p:nvSpPr>
+          <p:cNvPr id="13" name="Shape 8"/>
+          <p:cNvSpPr/>
+          <p:nvPr/>
+        </p:nvSpPr>
+        <p:spPr>
+          <a:xfrm>
+            <a:off x="3396996" y="4297680"/>
+            <a:ext cx="2286000" cy="2286000"/>
+          </a:xfrm>
+          <a:prstGeom prst="rect">
+            <a:avLst/>
+          </a:prstGeom>
+          <a:ln w="9525">
+            <a:solidFill>
+              <a:srgbClr val="D8E2E5"/>
+            </a:solidFill>
+            <a:prstDash val="solid"/>
+          </a:ln>
+        </p:spPr>
+        <p:txBody>
+          <a:bodyPr/>
+          <a:lstStyle/>
+          <a:p>
+            <a:endParaRPr lang="it-IT"/>
+          </a:p>
+        </p:txBody>
+      </p:sp>
+      <p:sp>
+        <p:nvSpPr>
+          <p:cNvPr id="14" name="Text 9"/>
+          <p:cNvSpPr/>
+          <p:nvPr/>
+        </p:nvSpPr>
+        <p:spPr>
+          <a:xfrm>
+            <a:off x="2985516" y="6620256"/>
+            <a:ext cx="3108960" cy="274320"/>
+          </a:xfrm>
+          <a:prstGeom prst="rect">
+            <a:avLst/>
+          </a:prstGeom>
+          <a:noFill/>
+          <a:ln/>
+        </p:spPr>
+        <p:txBody>
+          <a:bodyPr wrap="square" rtlCol="0" anchor="ctr"/>
+          <a:lstStyle/>
+          <a:p>
+            <a:pPr marL="0" indent="0" algn="ctr">
+              <a:buNone/>
+            </a:pPr>
+            <a:r>
+              <a:rPr lang="en-US" sz="1050" dirty="0">
+                <a:solidFill>
+                  <a:srgbClr val="5C7285"/>
+                </a:solidFill>
+                <a:latin typeface="Calibri" pitchFamily="34" charset="0"/>
+                <a:ea typeface="Calibri" pitchFamily="34" charset="-122"/>
+                <a:cs typeface="Calibri" pitchFamily="34" charset="-120"/>
+              </a:rPr>
+              <a:t>512×512 reference</a:t>
+            </a:r>
+            <a:endParaRPr lang="en-US" sz="1050" dirty="0"/>
+          </a:p>
+        </p:txBody>
+      </p:sp>
+      <p:pic>
+        <p:nvPicPr>
+          <p:cNvPr id="15" name="Image 3" descr="/home/claude/work/img2/prediction_UNet_MSE_SSIM_FL_Residual_Attention_PixelShuffle_noise01_scale2.png"/>
           <p:cNvPicPr>
             <a:picLocks noChangeAspect="1"/>
           </p:cNvPicPr>
@@ -24709,8 +25208,8 @@
         </p:blipFill>
         <p:spPr>
           <a:xfrm>
-            <a:off x="6697980" y="1828800"/>
-            <a:ext cx="1508760" cy="1508760"/>
+            <a:off x="6505956" y="4297680"/>
+            <a:ext cx="2286000" cy="2286000"/>
           </a:xfrm>
           <a:prstGeom prst="rect">
             <a:avLst/>
@@ -24719,14 +25218,14 @@
       </p:pic>
       <p:sp>
         <p:nvSpPr>
-          <p:cNvPr id="12" name="Shape 7"/>
-          <p:cNvSpPr/>
-          <p:nvPr/>
-        </p:nvSpPr>
-        <p:spPr>
-          <a:xfrm>
-            <a:off x="6697980" y="1828800"/>
-            <a:ext cx="1508760" cy="1508760"/>
+          <p:cNvPr id="16" name="Shape 10"/>
+          <p:cNvSpPr/>
+          <p:nvPr/>
+        </p:nvSpPr>
+        <p:spPr>
+          <a:xfrm>
+            <a:off x="6505956" y="4297680"/>
+            <a:ext cx="2286000" cy="2286000"/>
           </a:xfrm>
           <a:prstGeom prst="rect">
             <a:avLst/>
@@ -24748,14 +25247,14 @@
       </p:sp>
       <p:sp>
         <p:nvSpPr>
-          <p:cNvPr id="13" name="Text 8"/>
-          <p:cNvSpPr/>
-          <p:nvPr/>
-        </p:nvSpPr>
-        <p:spPr>
-          <a:xfrm>
-            <a:off x="6071616" y="3374136"/>
-            <a:ext cx="2761488" cy="320040"/>
+          <p:cNvPr id="17" name="Text 11"/>
+          <p:cNvSpPr/>
+          <p:nvPr/>
+        </p:nvSpPr>
+        <p:spPr>
+          <a:xfrm>
+            <a:off x="6094476" y="6620256"/>
+            <a:ext cx="3108960" cy="274320"/>
           </a:xfrm>
           <a:prstGeom prst="rect">
             <a:avLst/>
@@ -24771,7 +25270,7 @@
               <a:buNone/>
             </a:pPr>
             <a:r>
-              <a:rPr lang="en-US" sz="950" dirty="0">
+              <a:rPr lang="en-US" sz="1050" dirty="0">
                 <a:solidFill>
                   <a:srgbClr val="5C7285"/>
                 </a:solidFill>
@@ -24779,75 +25278,22 @@
                 <a:ea typeface="Calibri" pitchFamily="34" charset="-122"/>
                 <a:cs typeface="Calibri" pitchFamily="34" charset="-120"/>
               </a:rPr>
-              <a:t>PSNR 31.29 dB | SSIM 0.8937</a:t>
-            </a:r>
-            <a:endParaRPr lang="en-US" sz="950" dirty="0"/>
-          </a:p>
-        </p:txBody>
-      </p:sp>
-      <p:pic>
-        <p:nvPicPr>
-          <p:cNvPr id="14" name="Image 3" descr="/home/claude/work/img/SR_image_scale_2_noise_0_005_lambda_9_000000e-02_p_0_4_PSNR_31_53_SSIM_0_8913.png"/>
-          <p:cNvPicPr>
-            <a:picLocks noChangeAspect="1"/>
-          </p:cNvPicPr>
-          <p:nvPr/>
-        </p:nvPicPr>
-        <p:blipFill>
-          <a:blip r:embed="rId6"/>
-          <a:stretch>
-            <a:fillRect/>
-          </a:stretch>
-        </p:blipFill>
-        <p:spPr>
-          <a:xfrm>
-            <a:off x="9459468" y="1828800"/>
-            <a:ext cx="1508760" cy="1508760"/>
-          </a:xfrm>
-          <a:prstGeom prst="rect">
-            <a:avLst/>
-          </a:prstGeom>
-        </p:spPr>
-      </p:pic>
-      <p:sp>
-        <p:nvSpPr>
-          <p:cNvPr id="15" name="Shape 9"/>
-          <p:cNvSpPr/>
-          <p:nvPr/>
-        </p:nvSpPr>
-        <p:spPr>
-          <a:xfrm>
-            <a:off x="9459468" y="1828800"/>
-            <a:ext cx="1508760" cy="1508760"/>
-          </a:xfrm>
-          <a:prstGeom prst="rect">
-            <a:avLst/>
-          </a:prstGeom>
-          <a:ln w="9525">
-            <a:solidFill>
-              <a:srgbClr val="D8E2E5"/>
-            </a:solidFill>
-            <a:prstDash val="solid"/>
-          </a:ln>
-        </p:spPr>
-        <p:txBody>
-          <a:bodyPr/>
-          <a:lstStyle/>
-          <a:p>
-            <a:endParaRPr lang="it-IT"/>
-          </a:p>
-        </p:txBody>
-      </p:sp>
-      <p:sp>
-        <p:nvSpPr>
-          <p:cNvPr id="16" name="Text 10"/>
-          <p:cNvSpPr/>
-          <p:nvPr/>
-        </p:nvSpPr>
-        <p:spPr>
-          <a:xfrm>
-            <a:off x="8833104" y="3374136"/>
-            <a:ext cx="2761488" cy="320040"/>
+              <a:t>PSNR 39.90 dB | SSIM 0.9734</a:t>
+            </a:r>
+            <a:endParaRPr lang="en-US" sz="1050" dirty="0"/>
+          </a:p>
+        </p:txBody>
+      </p:sp>
+      <p:sp>
+        <p:nvSpPr>
+          <p:cNvPr id="18" name="Text 12"/>
+          <p:cNvSpPr/>
+          <p:nvPr/>
+        </p:nvSpPr>
+        <p:spPr>
+          <a:xfrm>
+            <a:off x="457200" y="6446520"/>
+            <a:ext cx="7315200" cy="274320"/>
           </a:xfrm>
           <a:prstGeom prst="rect">
             <a:avLst/>
@@ -24859,11 +25305,11 @@
           <a:bodyPr wrap="square" rtlCol="0" anchor="ctr"/>
           <a:lstStyle/>
           <a:p>
-            <a:pPr marL="0" indent="0" algn="ctr">
+            <a:pPr marL="0" indent="0">
               <a:buNone/>
             </a:pPr>
             <a:r>
-              <a:rPr lang="en-US" sz="950" dirty="0">
+              <a:rPr lang="en-US" sz="900" dirty="0">
                 <a:solidFill>
                   <a:srgbClr val="5C7285"/>
                 </a:solidFill>
@@ -24871,22 +25317,22 @@
                 <a:ea typeface="Calibri" pitchFamily="34" charset="-122"/>
                 <a:cs typeface="Calibri" pitchFamily="34" charset="-120"/>
               </a:rPr>
-              <a:t>PSNR 31.53 dB | SSIM 0.8913</a:t>
-            </a:r>
-            <a:endParaRPr lang="en-US" sz="950" dirty="0"/>
-          </a:p>
-        </p:txBody>
-      </p:sp>
-      <p:sp>
-        <p:nvSpPr>
-          <p:cNvPr id="17" name="Text 11"/>
-          <p:cNvSpPr/>
-          <p:nvPr/>
-        </p:nvSpPr>
-        <p:spPr>
-          <a:xfrm>
-            <a:off x="548640" y="3977640"/>
-            <a:ext cx="5486400" cy="274320"/>
+              <a:t>Group H  |  Computational Imaging 2025-26</a:t>
+            </a:r>
+            <a:endParaRPr lang="en-US" sz="900" dirty="0"/>
+          </a:p>
+        </p:txBody>
+      </p:sp>
+      <p:sp>
+        <p:nvSpPr>
+          <p:cNvPr id="19" name="Text 13"/>
+          <p:cNvSpPr/>
+          <p:nvPr/>
+        </p:nvSpPr>
+        <p:spPr>
+          <a:xfrm>
+            <a:off x="11274552" y="6446520"/>
+            <a:ext cx="457200" cy="274320"/>
           </a:xfrm>
           <a:prstGeom prst="rect">
             <a:avLst/>
@@ -24898,426 +25344,19 @@
           <a:bodyPr wrap="square" rtlCol="0" anchor="ctr"/>
           <a:lstStyle/>
           <a:p>
-            <a:pPr marL="0" indent="0">
+            <a:pPr marL="0" indent="0" algn="r">
               <a:buNone/>
             </a:pPr>
             <a:r>
-              <a:rPr lang="en-US" sz="1350" b="1" dirty="0">
-                <a:solidFill>
-                  <a:srgbClr val="13678A"/>
+              <a:rPr lang="en-US" sz="900" dirty="0">
+                <a:solidFill>
+                  <a:srgbClr val="5C7285"/>
                 </a:solidFill>
                 <a:latin typeface="Calibri" pitchFamily="34" charset="0"/>
                 <a:ea typeface="Calibri" pitchFamily="34" charset="-122"/>
                 <a:cs typeface="Calibri" pitchFamily="34" charset="-120"/>
               </a:rPr>
-              <a:t>Noise level σ = 0.01</a:t>
-            </a:r>
-            <a:endParaRPr lang="en-US" sz="1350" dirty="0"/>
-          </a:p>
-        </p:txBody>
-      </p:sp>
-      <p:pic>
-        <p:nvPicPr>
-          <p:cNvPr id="18" name="Image 4" descr="/home/claude/work/img/0.png"/>
-          <p:cNvPicPr>
-            <a:picLocks noChangeAspect="1"/>
-          </p:cNvPicPr>
-          <p:nvPr/>
-        </p:nvPicPr>
-        <p:blipFill>
-          <a:blip r:embed="rId3"/>
-          <a:stretch>
-            <a:fillRect/>
-          </a:stretch>
-        </p:blipFill>
-        <p:spPr>
-          <a:xfrm>
-            <a:off x="1175004" y="4297680"/>
-            <a:ext cx="1508760" cy="1508760"/>
-          </a:xfrm>
-          <a:prstGeom prst="rect">
-            <a:avLst/>
-          </a:prstGeom>
-        </p:spPr>
-      </p:pic>
-      <p:sp>
-        <p:nvSpPr>
-          <p:cNvPr id="19" name="Shape 12"/>
-          <p:cNvSpPr/>
-          <p:nvPr/>
-        </p:nvSpPr>
-        <p:spPr>
-          <a:xfrm>
-            <a:off x="1175004" y="4297680"/>
-            <a:ext cx="1508760" cy="1508760"/>
-          </a:xfrm>
-          <a:prstGeom prst="rect">
-            <a:avLst/>
-          </a:prstGeom>
-          <a:ln w="9525">
-            <a:solidFill>
-              <a:srgbClr val="D8E2E5"/>
-            </a:solidFill>
-            <a:prstDash val="solid"/>
-          </a:ln>
-        </p:spPr>
-        <p:txBody>
-          <a:bodyPr/>
-          <a:lstStyle/>
-          <a:p>
-            <a:endParaRPr lang="it-IT"/>
-          </a:p>
-        </p:txBody>
-      </p:sp>
-      <p:sp>
-        <p:nvSpPr>
-          <p:cNvPr id="20" name="Text 13"/>
-          <p:cNvSpPr/>
-          <p:nvPr/>
-        </p:nvSpPr>
-        <p:spPr>
-          <a:xfrm>
-            <a:off x="548640" y="5843016"/>
-            <a:ext cx="2761488" cy="320040"/>
-          </a:xfrm>
-          <a:prstGeom prst="rect">
-            <a:avLst/>
-          </a:prstGeom>
-          <a:noFill/>
-          <a:ln/>
-        </p:spPr>
-        <p:txBody>
-          <a:bodyPr wrap="square" rtlCol="0" anchor="ctr"/>
-          <a:lstStyle/>
-          <a:p>
-            <a:pPr marL="0" indent="0" algn="ctr">
-              <a:buNone/>
-            </a:pPr>
-            <a:r>
-              <a:rPr lang="en-US" sz="950" dirty="0">
-                <a:solidFill>
-                  <a:srgbClr val="5C7285"/>
-                </a:solidFill>
-                <a:latin typeface="Calibri" pitchFamily="34" charset="0"/>
-                <a:ea typeface="Calibri" pitchFamily="34" charset="-122"/>
-                <a:cs typeface="Calibri" pitchFamily="34" charset="-120"/>
-              </a:rPr>
-              <a:t>512×512 reference</a:t>
-            </a:r>
-            <a:endParaRPr lang="en-US" sz="950" dirty="0"/>
-          </a:p>
-        </p:txBody>
-      </p:sp>
-      <p:pic>
-        <p:nvPicPr>
-          <p:cNvPr id="21" name="Image 5" descr="/home/claude/work/img/Noisy_image_scale_2_noise_0_01.png"/>
-          <p:cNvPicPr>
-            <a:picLocks noChangeAspect="1"/>
-          </p:cNvPicPr>
-          <p:nvPr/>
-        </p:nvPicPr>
-        <p:blipFill>
-          <a:blip r:embed="rId7"/>
-          <a:stretch>
-            <a:fillRect/>
-          </a:stretch>
-        </p:blipFill>
-        <p:spPr>
-          <a:xfrm>
-            <a:off x="3936492" y="4297680"/>
-            <a:ext cx="1508760" cy="1508760"/>
-          </a:xfrm>
-          <a:prstGeom prst="rect">
-            <a:avLst/>
-          </a:prstGeom>
-        </p:spPr>
-      </p:pic>
-      <p:sp>
-        <p:nvSpPr>
-          <p:cNvPr id="22" name="Shape 14"/>
-          <p:cNvSpPr/>
-          <p:nvPr/>
-        </p:nvSpPr>
-        <p:spPr>
-          <a:xfrm>
-            <a:off x="3936492" y="4297680"/>
-            <a:ext cx="1508760" cy="1508760"/>
-          </a:xfrm>
-          <a:prstGeom prst="rect">
-            <a:avLst/>
-          </a:prstGeom>
-          <a:ln w="9525">
-            <a:solidFill>
-              <a:srgbClr val="D8E2E5"/>
-            </a:solidFill>
-            <a:prstDash val="solid"/>
-          </a:ln>
-        </p:spPr>
-        <p:txBody>
-          <a:bodyPr/>
-          <a:lstStyle/>
-          <a:p>
-            <a:endParaRPr lang="it-IT"/>
-          </a:p>
-        </p:txBody>
-      </p:sp>
-      <p:sp>
-        <p:nvSpPr>
-          <p:cNvPr id="23" name="Text 15"/>
-          <p:cNvSpPr/>
-          <p:nvPr/>
-        </p:nvSpPr>
-        <p:spPr>
-          <a:xfrm>
-            <a:off x="3310128" y="5843016"/>
-            <a:ext cx="2761488" cy="320040"/>
-          </a:xfrm>
-          <a:prstGeom prst="rect">
-            <a:avLst/>
-          </a:prstGeom>
-          <a:noFill/>
-          <a:ln/>
-        </p:spPr>
-        <p:txBody>
-          <a:bodyPr wrap="square" rtlCol="0" anchor="ctr"/>
-          <a:lstStyle/>
-          <a:p>
-            <a:pPr marL="0" indent="0" algn="ctr">
-              <a:buNone/>
-            </a:pPr>
-            <a:r>
-              <a:rPr lang="en-US" sz="950" dirty="0">
-                <a:solidFill>
-                  <a:srgbClr val="5C7285"/>
-                </a:solidFill>
-                <a:latin typeface="Calibri" pitchFamily="34" charset="0"/>
-                <a:ea typeface="Calibri" pitchFamily="34" charset="-122"/>
-                <a:cs typeface="Calibri" pitchFamily="34" charset="-120"/>
-              </a:rPr>
-              <a:t>×2, σ=0.01</a:t>
-            </a:r>
-            <a:endParaRPr lang="en-US" sz="950" dirty="0"/>
-          </a:p>
-        </p:txBody>
-      </p:sp>
-      <p:pic>
-        <p:nvPicPr>
-          <p:cNvPr id="24" name="Image 6" descr="/home/claude/work/img/SR_image_scale_2_noise_0_01_lambda_9_000000e-02_p_0_1_PSNR_31_08_SSIM_0_8842.png"/>
-          <p:cNvPicPr>
-            <a:picLocks noChangeAspect="1"/>
-          </p:cNvPicPr>
-          <p:nvPr/>
-        </p:nvPicPr>
-        <p:blipFill>
-          <a:blip r:embed="rId8"/>
-          <a:stretch>
-            <a:fillRect/>
-          </a:stretch>
-        </p:blipFill>
-        <p:spPr>
-          <a:xfrm>
-            <a:off x="6697980" y="4297680"/>
-            <a:ext cx="1508760" cy="1508760"/>
-          </a:xfrm>
-          <a:prstGeom prst="rect">
-            <a:avLst/>
-          </a:prstGeom>
-        </p:spPr>
-      </p:pic>
-      <p:sp>
-        <p:nvSpPr>
-          <p:cNvPr id="25" name="Shape 16"/>
-          <p:cNvSpPr/>
-          <p:nvPr/>
-        </p:nvSpPr>
-        <p:spPr>
-          <a:xfrm>
-            <a:off x="6697980" y="4297680"/>
-            <a:ext cx="1508760" cy="1508760"/>
-          </a:xfrm>
-          <a:prstGeom prst="rect">
-            <a:avLst/>
-          </a:prstGeom>
-          <a:ln w="9525">
-            <a:solidFill>
-              <a:srgbClr val="D8E2E5"/>
-            </a:solidFill>
-            <a:prstDash val="solid"/>
-          </a:ln>
-        </p:spPr>
-        <p:txBody>
-          <a:bodyPr/>
-          <a:lstStyle/>
-          <a:p>
-            <a:endParaRPr lang="it-IT"/>
-          </a:p>
-        </p:txBody>
-      </p:sp>
-      <p:sp>
-        <p:nvSpPr>
-          <p:cNvPr id="26" name="Text 17"/>
-          <p:cNvSpPr/>
-          <p:nvPr/>
-        </p:nvSpPr>
-        <p:spPr>
-          <a:xfrm>
-            <a:off x="6071616" y="5843016"/>
-            <a:ext cx="2761488" cy="320040"/>
-          </a:xfrm>
-          <a:prstGeom prst="rect">
-            <a:avLst/>
-          </a:prstGeom>
-          <a:noFill/>
-          <a:ln/>
-        </p:spPr>
-        <p:txBody>
-          <a:bodyPr wrap="square" rtlCol="0" anchor="ctr"/>
-          <a:lstStyle/>
-          <a:p>
-            <a:pPr marL="0" indent="0" algn="ctr">
-              <a:buNone/>
-            </a:pPr>
-            <a:r>
-              <a:rPr lang="en-US" sz="950" dirty="0">
-                <a:solidFill>
-                  <a:srgbClr val="5C7285"/>
-                </a:solidFill>
-                <a:latin typeface="Calibri" pitchFamily="34" charset="0"/>
-                <a:ea typeface="Calibri" pitchFamily="34" charset="-122"/>
-                <a:cs typeface="Calibri" pitchFamily="34" charset="-120"/>
-              </a:rPr>
-              <a:t>PSNR 31.08 dB | SSIM 0.8842</a:t>
-            </a:r>
-            <a:endParaRPr lang="en-US" sz="950" dirty="0"/>
-          </a:p>
-        </p:txBody>
-      </p:sp>
-      <p:pic>
-        <p:nvPicPr>
-          <p:cNvPr id="27" name="Image 7" descr="/home/claude/work/img/SR_image_scale_2_noise_0_01_lambda_9_000000e-02_p_0_4_PSNR_31_47_SSIM_0_8874.png"/>
-          <p:cNvPicPr>
-            <a:picLocks noChangeAspect="1"/>
-          </p:cNvPicPr>
-          <p:nvPr/>
-        </p:nvPicPr>
-        <p:blipFill>
-          <a:blip r:embed="rId9"/>
-          <a:stretch>
-            <a:fillRect/>
-          </a:stretch>
-        </p:blipFill>
-        <p:spPr>
-          <a:xfrm>
-            <a:off x="9459468" y="4297680"/>
-            <a:ext cx="1508760" cy="1508760"/>
-          </a:xfrm>
-          <a:prstGeom prst="rect">
-            <a:avLst/>
-          </a:prstGeom>
-        </p:spPr>
-      </p:pic>
-      <p:sp>
-        <p:nvSpPr>
-          <p:cNvPr id="28" name="Shape 18"/>
-          <p:cNvSpPr/>
-          <p:nvPr/>
-        </p:nvSpPr>
-        <p:spPr>
-          <a:xfrm>
-            <a:off x="9459468" y="4297680"/>
-            <a:ext cx="1508760" cy="1508760"/>
-          </a:xfrm>
-          <a:prstGeom prst="rect">
-            <a:avLst/>
-          </a:prstGeom>
-          <a:ln w="9525">
-            <a:solidFill>
-              <a:srgbClr val="D8E2E5"/>
-            </a:solidFill>
-            <a:prstDash val="solid"/>
-          </a:ln>
-        </p:spPr>
-        <p:txBody>
-          <a:bodyPr/>
-          <a:lstStyle/>
-          <a:p>
-            <a:endParaRPr lang="it-IT"/>
-          </a:p>
-        </p:txBody>
-      </p:sp>
-      <p:sp>
-        <p:nvSpPr>
-          <p:cNvPr id="29" name="Text 19"/>
-          <p:cNvSpPr/>
-          <p:nvPr/>
-        </p:nvSpPr>
-        <p:spPr>
-          <a:xfrm>
-            <a:off x="8833104" y="5843016"/>
-            <a:ext cx="2761488" cy="320040"/>
-          </a:xfrm>
-          <a:prstGeom prst="rect">
-            <a:avLst/>
-          </a:prstGeom>
-          <a:noFill/>
-          <a:ln/>
-        </p:spPr>
-        <p:txBody>
-          <a:bodyPr wrap="square" rtlCol="0" anchor="ctr"/>
-          <a:lstStyle/>
-          <a:p>
-            <a:pPr marL="0" indent="0" algn="ctr">
-              <a:buNone/>
-            </a:pPr>
-            <a:r>
-              <a:rPr lang="en-US" sz="950" dirty="0">
-                <a:solidFill>
-                  <a:srgbClr val="5C7285"/>
-                </a:solidFill>
-                <a:latin typeface="Calibri" pitchFamily="34" charset="0"/>
-                <a:ea typeface="Calibri" pitchFamily="34" charset="-122"/>
-                <a:cs typeface="Calibri" pitchFamily="34" charset="-120"/>
-              </a:rPr>
-              <a:t>PSNR 31.47 dB | SSIM 0.8874</a:t>
-            </a:r>
-            <a:endParaRPr lang="en-US" sz="950" dirty="0"/>
-          </a:p>
-        </p:txBody>
-      </p:sp>
-      <p:sp>
-        <p:nvSpPr>
-          <p:cNvPr id="30" name="Text 20"/>
-          <p:cNvSpPr/>
-          <p:nvPr/>
-        </p:nvSpPr>
-        <p:spPr>
-          <a:xfrm>
-            <a:off x="457200" y="6446520"/>
-            <a:ext cx="7315200" cy="274320"/>
-          </a:xfrm>
-          <a:prstGeom prst="rect">
-            <a:avLst/>
-          </a:prstGeom>
-          <a:noFill/>
-          <a:ln/>
-        </p:spPr>
-        <p:txBody>
-          <a:bodyPr wrap="square" rtlCol="0" anchor="ctr"/>
-          <a:lstStyle/>
-          <a:p>
-            <a:pPr marL="0" indent="0">
-              <a:buNone/>
-            </a:pPr>
-            <a:r>
-              <a:rPr lang="en-US" sz="900" dirty="0">
-                <a:solidFill>
-                  <a:srgbClr val="5C7285"/>
-                </a:solidFill>
-                <a:latin typeface="Calibri" pitchFamily="34" charset="0"/>
-                <a:ea typeface="Calibri" pitchFamily="34" charset="-122"/>
-                <a:cs typeface="Calibri" pitchFamily="34" charset="-120"/>
-              </a:rPr>
-              <a:t>Group H  |  Computational Imaging 2025-26</a:t>
+              <a:t>11</a:t>
             </a:r>
             <a:endParaRPr lang="en-US" sz="900" dirty="0"/>
           </a:p>
@@ -25325,49 +25364,10 @@
       </p:sp>
       <p:sp>
         <p:nvSpPr>
-          <p:cNvPr id="31" name="Text 21"/>
-          <p:cNvSpPr/>
-          <p:nvPr/>
-        </p:nvSpPr>
-        <p:spPr>
-          <a:xfrm>
-            <a:off x="11274552" y="6446520"/>
-            <a:ext cx="457200" cy="274320"/>
-          </a:xfrm>
-          <a:prstGeom prst="rect">
-            <a:avLst/>
-          </a:prstGeom>
-          <a:noFill/>
-          <a:ln/>
-        </p:spPr>
-        <p:txBody>
-          <a:bodyPr wrap="square" rtlCol="0" anchor="ctr"/>
-          <a:lstStyle/>
-          <a:p>
-            <a:pPr marL="0" indent="0" algn="r">
-              <a:buNone/>
-            </a:pPr>
-            <a:r>
-              <a:rPr lang="en-US" sz="900" dirty="0">
-                <a:solidFill>
-                  <a:srgbClr val="5C7285"/>
-                </a:solidFill>
-                <a:latin typeface="Calibri" pitchFamily="34" charset="0"/>
-                <a:ea typeface="Calibri" pitchFamily="34" charset="-122"/>
-                <a:cs typeface="Calibri" pitchFamily="34" charset="-120"/>
-              </a:rPr>
-              <a:t>8</a:t>
-            </a:r>
-            <a:endParaRPr lang="en-US" sz="900" dirty="0"/>
-          </a:p>
-        </p:txBody>
-      </p:sp>
-      <p:sp>
-        <p:nvSpPr>
-          <p:cNvPr id="33" name="object 9">
+          <p:cNvPr id="21" name="object 9">
             <a:extLst>
               <a:ext uri="{FF2B5EF4-FFF2-40B4-BE49-F238E27FC236}">
-                <a16:creationId xmlns:a16="http://schemas.microsoft.com/office/drawing/2014/main" id="{E822C587-739B-DE24-A1B0-DC02C39F5DDD}"/>
+                <a16:creationId xmlns:a16="http://schemas.microsoft.com/office/drawing/2014/main" id="{52A16BE9-BBD3-25B1-8184-691542417FDE}"/>
               </a:ext>
             </a:extLst>
           </p:cNvPr>
@@ -25383,7 +25383,7 @@
             <a:avLst/>
           </a:prstGeom>
           <a:blipFill>
-            <a:blip r:embed="rId10" cstate="print"/>
+            <a:blip r:embed="rId6" cstate="print"/>
             <a:stretch>
               <a:fillRect/>
             </a:stretch>

--- a/Presentazione.pptx
+++ b/Presentazione.pptx
@@ -19168,7 +19168,7 @@
                 <a:ea typeface="Calibri" pitchFamily="34" charset="-122"/>
                 <a:cs typeface="Calibri" pitchFamily="34" charset="-120"/>
               </a:rPr>
-              <a:t>150 iterations per configuration</a:t>
+              <a:t>150 iterations for configuration</a:t>
             </a:r>
             <a:endParaRPr lang="en-US" sz="1200" dirty="0"/>
           </a:p>
@@ -24504,28 +24504,7 @@
                 <a:ea typeface="Calibri" pitchFamily="34" charset="-122"/>
                 <a:cs typeface="Calibri" pitchFamily="34" charset="-120"/>
               </a:rPr>
-              <a:t>U-Net clearly outperforms TpV in every configuration (up to +9–12 dB PSNR)</a:t>
-            </a:r>
-            <a:endParaRPr lang="en-US" sz="1150" dirty="0"/>
-          </a:p>
-          <a:p>
-            <a:pPr marL="342900" indent="-342900">
-              <a:spcAft>
-                <a:spcPts val="600"/>
-              </a:spcAft>
-              <a:buSzPct val="100000"/>
-              <a:buChar char="•"/>
-            </a:pPr>
-            <a:r>
-              <a:rPr lang="en-US" sz="1150" dirty="0">
-                <a:solidFill>
-                  <a:srgbClr val="1B2A3A"/>
-                </a:solidFill>
-                <a:latin typeface="Calibri" pitchFamily="34" charset="0"/>
-                <a:ea typeface="Calibri" pitchFamily="34" charset="-122"/>
-                <a:cs typeface="Calibri" pitchFamily="34" charset="-120"/>
-              </a:rPr>
-              <a:t>Unlike TpV, PSNR/SSIM stay close (or improve) when moving from ×2 to ×4, showing the network compensates for the coarser degradation</a:t>
+              <a:t>PSNR/SSIM stay close (or improve) when moving from ×2 to ×4, showing the network compensates for the coarser degradation</a:t>
             </a:r>
             <a:endParaRPr lang="en-US" sz="1150" dirty="0"/>
           </a:p>

--- a/Presentazione.pptx
+++ b/Presentazione.pptx
@@ -12,15 +12,15 @@
     <p:sldId id="257" r:id="rId3"/>
     <p:sldId id="258" r:id="rId4"/>
     <p:sldId id="259" r:id="rId5"/>
-    <p:sldId id="279" r:id="rId6"/>
-    <p:sldId id="280" r:id="rId7"/>
-    <p:sldId id="260" r:id="rId8"/>
-    <p:sldId id="265" r:id="rId9"/>
-    <p:sldId id="266" r:id="rId10"/>
-    <p:sldId id="267" r:id="rId11"/>
-    <p:sldId id="262" r:id="rId12"/>
-    <p:sldId id="263" r:id="rId13"/>
-    <p:sldId id="264" r:id="rId14"/>
+    <p:sldId id="260" r:id="rId6"/>
+    <p:sldId id="279" r:id="rId7"/>
+    <p:sldId id="265" r:id="rId8"/>
+    <p:sldId id="266" r:id="rId9"/>
+    <p:sldId id="267" r:id="rId10"/>
+    <p:sldId id="262" r:id="rId11"/>
+    <p:sldId id="263" r:id="rId12"/>
+    <p:sldId id="264" r:id="rId13"/>
+    <p:sldId id="280" r:id="rId14"/>
     <p:sldId id="268" r:id="rId15"/>
     <p:sldId id="269" r:id="rId16"/>
     <p:sldId id="270" r:id="rId17"/>
@@ -601,7 +601,13 @@
   <p:cSld>
     <p:spTree>
       <p:nvGrpSpPr>
-        <p:cNvPr id="1" name=""/>
+        <p:cNvPr id="1" name="">
+          <a:extLst>
+            <a:ext uri="{FF2B5EF4-FFF2-40B4-BE49-F238E27FC236}">
+              <a16:creationId xmlns:a16="http://schemas.microsoft.com/office/drawing/2014/main" id="{9C02A805-D755-FE38-04F4-1C89BB148A49}"/>
+            </a:ext>
+          </a:extLst>
+        </p:cNvPr>
         <p:cNvGrpSpPr/>
         <p:nvPr/>
       </p:nvGrpSpPr>
@@ -615,7 +621,13 @@
       </p:grpSpPr>
       <p:sp>
         <p:nvSpPr>
-          <p:cNvPr id="2" name="Slide Image Placeholder 1"/>
+          <p:cNvPr id="2" name="Slide Image Placeholder 1">
+            <a:extLst>
+              <a:ext uri="{FF2B5EF4-FFF2-40B4-BE49-F238E27FC236}">
+                <a16:creationId xmlns:a16="http://schemas.microsoft.com/office/drawing/2014/main" id="{134AEB87-5064-9BD8-E858-19BDE131A60A}"/>
+              </a:ext>
+            </a:extLst>
+          </p:cNvPr>
           <p:cNvSpPr>
             <a:spLocks noGrp="1" noRot="1" noChangeAspect="1"/>
           </p:cNvSpPr>
@@ -627,7 +639,13 @@
       </p:sp>
       <p:sp>
         <p:nvSpPr>
-          <p:cNvPr id="3" name="Notes Placeholder 2"/>
+          <p:cNvPr id="3" name="Notes Placeholder 2">
+            <a:extLst>
+              <a:ext uri="{FF2B5EF4-FFF2-40B4-BE49-F238E27FC236}">
+                <a16:creationId xmlns:a16="http://schemas.microsoft.com/office/drawing/2014/main" id="{85538D01-19FB-8D21-41A1-5B184490E7D8}"/>
+              </a:ext>
+            </a:extLst>
+          </p:cNvPr>
           <p:cNvSpPr>
             <a:spLocks noGrp="1"/>
           </p:cNvSpPr>
@@ -646,7 +664,13 @@
       </p:sp>
       <p:sp>
         <p:nvSpPr>
-          <p:cNvPr id="4" name="Slide Number Placeholder 3"/>
+          <p:cNvPr id="4" name="Slide Number Placeholder 3">
+            <a:extLst>
+              <a:ext uri="{FF2B5EF4-FFF2-40B4-BE49-F238E27FC236}">
+                <a16:creationId xmlns:a16="http://schemas.microsoft.com/office/drawing/2014/main" id="{3FFFD56E-0C62-408B-F622-7032064A0117}"/>
+              </a:ext>
+            </a:extLst>
+          </p:cNvPr>
           <p:cNvSpPr>
             <a:spLocks noGrp="1"/>
           </p:cNvSpPr>
@@ -670,7 +694,7 @@
     </p:spTree>
     <p:extLst>
       <p:ext uri="{BB962C8B-B14F-4D97-AF65-F5344CB8AC3E}">
-        <p14:creationId xmlns:p14="http://schemas.microsoft.com/office/powerpoint/2010/main" val="1024086991"/>
+        <p14:creationId xmlns:p14="http://schemas.microsoft.com/office/powerpoint/2010/main" val="1773651042"/>
       </p:ext>
     </p:extLst>
   </p:cSld>
@@ -1441,6 +1465,90 @@
   <p:cSld>
     <p:spTree>
       <p:nvGrpSpPr>
+        <p:cNvPr id="1" name=""/>
+        <p:cNvGrpSpPr/>
+        <p:nvPr/>
+      </p:nvGrpSpPr>
+      <p:grpSpPr>
+        <a:xfrm>
+          <a:off x="0" y="0"/>
+          <a:ext cx="0" cy="0"/>
+          <a:chOff x="0" y="0"/>
+          <a:chExt cx="0" cy="0"/>
+        </a:xfrm>
+      </p:grpSpPr>
+      <p:sp>
+        <p:nvSpPr>
+          <p:cNvPr id="2" name="Slide Image Placeholder 1"/>
+          <p:cNvSpPr>
+            <a:spLocks noGrp="1" noRot="1" noChangeAspect="1"/>
+          </p:cNvSpPr>
+          <p:nvPr>
+            <p:ph type="sldImg"/>
+          </p:nvPr>
+        </p:nvSpPr>
+        <p:spPr/>
+      </p:sp>
+      <p:sp>
+        <p:nvSpPr>
+          <p:cNvPr id="3" name="Notes Placeholder 2"/>
+          <p:cNvSpPr>
+            <a:spLocks noGrp="1"/>
+          </p:cNvSpPr>
+          <p:nvPr>
+            <p:ph type="body" idx="1"/>
+          </p:nvPr>
+        </p:nvSpPr>
+        <p:spPr/>
+        <p:txBody>
+          <a:bodyPr/>
+          <a:lstStyle/>
+          <a:p>
+            <a:endParaRPr lang="en-US" dirty="0"/>
+          </a:p>
+        </p:txBody>
+      </p:sp>
+      <p:sp>
+        <p:nvSpPr>
+          <p:cNvPr id="4" name="Slide Number Placeholder 3"/>
+          <p:cNvSpPr>
+            <a:spLocks noGrp="1"/>
+          </p:cNvSpPr>
+          <p:nvPr>
+            <p:ph type="sldNum" sz="quarter" idx="10"/>
+          </p:nvPr>
+        </p:nvSpPr>
+        <p:spPr/>
+        <p:txBody>
+          <a:bodyPr/>
+          <a:lstStyle/>
+          <a:p>
+            <a:fld id="{F7021451-1387-4CA6-816F-3879F97B5CBC}" type="slidenum">
+              <a:rPr lang="en-US"/>
+              <a:t>5</a:t>
+            </a:fld>
+            <a:endParaRPr lang="en-US"/>
+          </a:p>
+        </p:txBody>
+      </p:sp>
+    </p:spTree>
+    <p:extLst>
+      <p:ext uri="{BB962C8B-B14F-4D97-AF65-F5344CB8AC3E}">
+        <p14:creationId xmlns:p14="http://schemas.microsoft.com/office/powerpoint/2010/main" val="1024086991"/>
+      </p:ext>
+    </p:extLst>
+  </p:cSld>
+  <p:clrMapOvr>
+    <a:masterClrMapping/>
+  </p:clrMapOvr>
+</p:notes>
+</file>
+
+<file path=ppt/notesSlides/notesSlide6.xml><?xml version="1.0" encoding="utf-8"?>
+<p:notes xmlns:a="http://schemas.openxmlformats.org/drawingml/2006/main" xmlns:r="http://schemas.openxmlformats.org/officeDocument/2006/relationships" xmlns:p="http://schemas.openxmlformats.org/presentationml/2006/main">
+  <p:cSld>
+    <p:spTree>
+      <p:nvGrpSpPr>
         <p:cNvPr id="1" name="">
           <a:extLst>
             <a:ext uri="{FF2B5EF4-FFF2-40B4-BE49-F238E27FC236}">
@@ -1525,7 +1633,7 @@
           <a:p>
             <a:fld id="{F7021451-1387-4CA6-816F-3879F97B5CBC}" type="slidenum">
               <a:rPr lang="en-US"/>
-              <a:t>5</a:t>
+              <a:t>6</a:t>
             </a:fld>
             <a:endParaRPr lang="en-US"/>
           </a:p>
@@ -1535,114 +1643,6 @@
     <p:extLst>
       <p:ext uri="{BB962C8B-B14F-4D97-AF65-F5344CB8AC3E}">
         <p14:creationId xmlns:p14="http://schemas.microsoft.com/office/powerpoint/2010/main" val="2184733456"/>
-      </p:ext>
-    </p:extLst>
-  </p:cSld>
-  <p:clrMapOvr>
-    <a:masterClrMapping/>
-  </p:clrMapOvr>
-</p:notes>
-</file>
-
-<file path=ppt/notesSlides/notesSlide6.xml><?xml version="1.0" encoding="utf-8"?>
-<p:notes xmlns:a="http://schemas.openxmlformats.org/drawingml/2006/main" xmlns:r="http://schemas.openxmlformats.org/officeDocument/2006/relationships" xmlns:p="http://schemas.openxmlformats.org/presentationml/2006/main">
-  <p:cSld>
-    <p:spTree>
-      <p:nvGrpSpPr>
-        <p:cNvPr id="1" name="">
-          <a:extLst>
-            <a:ext uri="{FF2B5EF4-FFF2-40B4-BE49-F238E27FC236}">
-              <a16:creationId xmlns:a16="http://schemas.microsoft.com/office/drawing/2014/main" id="{9C02A805-D755-FE38-04F4-1C89BB148A49}"/>
-            </a:ext>
-          </a:extLst>
-        </p:cNvPr>
-        <p:cNvGrpSpPr/>
-        <p:nvPr/>
-      </p:nvGrpSpPr>
-      <p:grpSpPr>
-        <a:xfrm>
-          <a:off x="0" y="0"/>
-          <a:ext cx="0" cy="0"/>
-          <a:chOff x="0" y="0"/>
-          <a:chExt cx="0" cy="0"/>
-        </a:xfrm>
-      </p:grpSpPr>
-      <p:sp>
-        <p:nvSpPr>
-          <p:cNvPr id="2" name="Slide Image Placeholder 1">
-            <a:extLst>
-              <a:ext uri="{FF2B5EF4-FFF2-40B4-BE49-F238E27FC236}">
-                <a16:creationId xmlns:a16="http://schemas.microsoft.com/office/drawing/2014/main" id="{134AEB87-5064-9BD8-E858-19BDE131A60A}"/>
-              </a:ext>
-            </a:extLst>
-          </p:cNvPr>
-          <p:cNvSpPr>
-            <a:spLocks noGrp="1" noRot="1" noChangeAspect="1"/>
-          </p:cNvSpPr>
-          <p:nvPr>
-            <p:ph type="sldImg"/>
-          </p:nvPr>
-        </p:nvSpPr>
-        <p:spPr/>
-      </p:sp>
-      <p:sp>
-        <p:nvSpPr>
-          <p:cNvPr id="3" name="Notes Placeholder 2">
-            <a:extLst>
-              <a:ext uri="{FF2B5EF4-FFF2-40B4-BE49-F238E27FC236}">
-                <a16:creationId xmlns:a16="http://schemas.microsoft.com/office/drawing/2014/main" id="{85538D01-19FB-8D21-41A1-5B184490E7D8}"/>
-              </a:ext>
-            </a:extLst>
-          </p:cNvPr>
-          <p:cNvSpPr>
-            <a:spLocks noGrp="1"/>
-          </p:cNvSpPr>
-          <p:nvPr>
-            <p:ph type="body" idx="1"/>
-          </p:nvPr>
-        </p:nvSpPr>
-        <p:spPr/>
-        <p:txBody>
-          <a:bodyPr/>
-          <a:lstStyle/>
-          <a:p>
-            <a:endParaRPr lang="en-US" dirty="0"/>
-          </a:p>
-        </p:txBody>
-      </p:sp>
-      <p:sp>
-        <p:nvSpPr>
-          <p:cNvPr id="4" name="Slide Number Placeholder 3">
-            <a:extLst>
-              <a:ext uri="{FF2B5EF4-FFF2-40B4-BE49-F238E27FC236}">
-                <a16:creationId xmlns:a16="http://schemas.microsoft.com/office/drawing/2014/main" id="{3FFFD56E-0C62-408B-F622-7032064A0117}"/>
-              </a:ext>
-            </a:extLst>
-          </p:cNvPr>
-          <p:cNvSpPr>
-            <a:spLocks noGrp="1"/>
-          </p:cNvSpPr>
-          <p:nvPr>
-            <p:ph type="sldNum" sz="quarter" idx="10"/>
-          </p:nvPr>
-        </p:nvSpPr>
-        <p:spPr/>
-        <p:txBody>
-          <a:bodyPr/>
-          <a:lstStyle/>
-          <a:p>
-            <a:fld id="{F7021451-1387-4CA6-816F-3879F97B5CBC}" type="slidenum">
-              <a:rPr lang="en-US"/>
-              <a:t>6</a:t>
-            </a:fld>
-            <a:endParaRPr lang="en-US"/>
-          </a:p>
-        </p:txBody>
-      </p:sp>
-    </p:spTree>
-    <p:extLst>
-      <p:ext uri="{BB962C8B-B14F-4D97-AF65-F5344CB8AC3E}">
-        <p14:creationId xmlns:p14="http://schemas.microsoft.com/office/powerpoint/2010/main" val="1773651042"/>
       </p:ext>
     </p:extLst>
   </p:cSld>
@@ -3191,678 +3191,6 @@
 
 <file path=ppt/slides/slide10.xml><?xml version="1.0" encoding="utf-8"?>
 <p:sld xmlns:a="http://schemas.openxmlformats.org/drawingml/2006/main" xmlns:r="http://schemas.openxmlformats.org/officeDocument/2006/relationships" xmlns:p="http://schemas.openxmlformats.org/presentationml/2006/main">
-  <p:cSld name="Slide 12">
-    <p:bg>
-      <p:bgPr>
-        <a:solidFill>
-          <a:srgbClr val="FFFFFF"/>
-        </a:solidFill>
-        <a:effectLst/>
-      </p:bgPr>
-    </p:bg>
-    <p:spTree>
-      <p:nvGrpSpPr>
-        <p:cNvPr id="1" name=""/>
-        <p:cNvGrpSpPr/>
-        <p:nvPr/>
-      </p:nvGrpSpPr>
-      <p:grpSpPr>
-        <a:xfrm>
-          <a:off x="0" y="0"/>
-          <a:ext cx="0" cy="0"/>
-          <a:chOff x="0" y="0"/>
-          <a:chExt cx="0" cy="0"/>
-        </a:xfrm>
-      </p:grpSpPr>
-      <p:sp>
-        <p:nvSpPr>
-          <p:cNvPr id="2" name="Text 0"/>
-          <p:cNvSpPr/>
-          <p:nvPr/>
-        </p:nvSpPr>
-        <p:spPr>
-          <a:xfrm>
-            <a:off x="548640" y="365760"/>
-            <a:ext cx="11091672" cy="731520"/>
-          </a:xfrm>
-          <a:prstGeom prst="rect">
-            <a:avLst/>
-          </a:prstGeom>
-          <a:noFill/>
-          <a:ln/>
-        </p:spPr>
-        <p:txBody>
-          <a:bodyPr wrap="square" lIns="0" tIns="0" rIns="0" bIns="0" rtlCol="0" anchor="ctr"/>
-          <a:lstStyle/>
-          <a:p>
-            <a:pPr marL="0" indent="0">
-              <a:buNone/>
-            </a:pPr>
-            <a:r>
-              <a:rPr lang="en-US" sz="3000" b="1" dirty="0">
-                <a:solidFill>
-                  <a:srgbClr val="0B2545"/>
-                </a:solidFill>
-                <a:latin typeface="Cambria" pitchFamily="34" charset="0"/>
-                <a:ea typeface="Cambria" pitchFamily="34" charset="-122"/>
-                <a:cs typeface="Cambria" pitchFamily="34" charset="-120"/>
-              </a:rPr>
-              <a:t>U-Net — Visual Comparison (Scale ×4)</a:t>
-            </a:r>
-            <a:endParaRPr lang="en-US" sz="3000" dirty="0"/>
-          </a:p>
-        </p:txBody>
-      </p:sp>
-      <p:sp>
-        <p:nvSpPr>
-          <p:cNvPr id="3" name="Text 1"/>
-          <p:cNvSpPr/>
-          <p:nvPr/>
-        </p:nvSpPr>
-        <p:spPr>
-          <a:xfrm>
-            <a:off x="548640" y="1051560"/>
-            <a:ext cx="11064240" cy="320040"/>
-          </a:xfrm>
-          <a:prstGeom prst="rect">
-            <a:avLst/>
-          </a:prstGeom>
-          <a:noFill/>
-          <a:ln/>
-        </p:spPr>
-        <p:txBody>
-          <a:bodyPr wrap="square" rtlCol="0" anchor="ctr"/>
-          <a:lstStyle/>
-          <a:p>
-            <a:pPr marL="0" indent="0">
-              <a:buNone/>
-            </a:pPr>
-            <a:r>
-              <a:rPr lang="en-US" sz="1250" i="1" dirty="0">
-                <a:solidFill>
-                  <a:srgbClr val="5C7285"/>
-                </a:solidFill>
-                <a:latin typeface="Calibri" pitchFamily="34" charset="0"/>
-                <a:ea typeface="Calibri" pitchFamily="34" charset="-122"/>
-                <a:cs typeface="Calibri" pitchFamily="34" charset="-120"/>
-              </a:rPr>
-              <a:t>Single test image (0.png) — Ground truth vs. U-Net reconstruction</a:t>
-            </a:r>
-            <a:endParaRPr lang="en-US" sz="1250" dirty="0"/>
-          </a:p>
-        </p:txBody>
-      </p:sp>
-      <p:sp>
-        <p:nvSpPr>
-          <p:cNvPr id="4" name="Text 2"/>
-          <p:cNvSpPr/>
-          <p:nvPr/>
-        </p:nvSpPr>
-        <p:spPr>
-          <a:xfrm>
-            <a:off x="548640" y="1508760"/>
-            <a:ext cx="5486400" cy="274320"/>
-          </a:xfrm>
-          <a:prstGeom prst="rect">
-            <a:avLst/>
-          </a:prstGeom>
-          <a:noFill/>
-          <a:ln/>
-        </p:spPr>
-        <p:txBody>
-          <a:bodyPr wrap="square" rtlCol="0" anchor="ctr"/>
-          <a:lstStyle/>
-          <a:p>
-            <a:pPr marL="0" indent="0">
-              <a:buNone/>
-            </a:pPr>
-            <a:r>
-              <a:rPr lang="en-US" sz="1350" b="1" dirty="0">
-                <a:solidFill>
-                  <a:srgbClr val="0B2545"/>
-                </a:solidFill>
-                <a:latin typeface="Calibri" pitchFamily="34" charset="0"/>
-                <a:ea typeface="Calibri" pitchFamily="34" charset="-122"/>
-                <a:cs typeface="Calibri" pitchFamily="34" charset="-120"/>
-              </a:rPr>
-              <a:t>Noise level σ = 0.005</a:t>
-            </a:r>
-            <a:endParaRPr lang="en-US" sz="1350" dirty="0"/>
-          </a:p>
-        </p:txBody>
-      </p:sp>
-      <p:pic>
-        <p:nvPicPr>
-          <p:cNvPr id="5" name="Image 0" descr="/home/claude/work/img/0.png"/>
-          <p:cNvPicPr>
-            <a:picLocks noChangeAspect="1"/>
-          </p:cNvPicPr>
-          <p:nvPr/>
-        </p:nvPicPr>
-        <p:blipFill>
-          <a:blip r:embed="rId3"/>
-          <a:stretch>
-            <a:fillRect/>
-          </a:stretch>
-        </p:blipFill>
-        <p:spPr>
-          <a:xfrm>
-            <a:off x="3396996" y="1708034"/>
-            <a:ext cx="2286000" cy="2286000"/>
-          </a:xfrm>
-          <a:prstGeom prst="rect">
-            <a:avLst/>
-          </a:prstGeom>
-        </p:spPr>
-      </p:pic>
-      <p:sp>
-        <p:nvSpPr>
-          <p:cNvPr id="6" name="Shape 3"/>
-          <p:cNvSpPr/>
-          <p:nvPr/>
-        </p:nvSpPr>
-        <p:spPr>
-          <a:xfrm>
-            <a:off x="3396996" y="1708034"/>
-            <a:ext cx="2286000" cy="2286000"/>
-          </a:xfrm>
-          <a:prstGeom prst="rect">
-            <a:avLst/>
-          </a:prstGeom>
-          <a:ln w="9525">
-            <a:solidFill>
-              <a:srgbClr val="D8E2E5"/>
-            </a:solidFill>
-            <a:prstDash val="solid"/>
-          </a:ln>
-        </p:spPr>
-        <p:txBody>
-          <a:bodyPr/>
-          <a:lstStyle/>
-          <a:p>
-            <a:endParaRPr lang="it-IT"/>
-          </a:p>
-        </p:txBody>
-      </p:sp>
-      <p:sp>
-        <p:nvSpPr>
-          <p:cNvPr id="7" name="Text 4"/>
-          <p:cNvSpPr/>
-          <p:nvPr/>
-        </p:nvSpPr>
-        <p:spPr>
-          <a:xfrm>
-            <a:off x="2985516" y="4030610"/>
-            <a:ext cx="3108960" cy="274320"/>
-          </a:xfrm>
-          <a:prstGeom prst="rect">
-            <a:avLst/>
-          </a:prstGeom>
-          <a:noFill/>
-          <a:ln/>
-        </p:spPr>
-        <p:txBody>
-          <a:bodyPr wrap="square" rtlCol="0" anchor="ctr"/>
-          <a:lstStyle/>
-          <a:p>
-            <a:pPr marL="0" indent="0" algn="ctr">
-              <a:buNone/>
-            </a:pPr>
-            <a:r>
-              <a:rPr lang="en-US" sz="1050" dirty="0">
-                <a:solidFill>
-                  <a:srgbClr val="5C7285"/>
-                </a:solidFill>
-                <a:latin typeface="Calibri" pitchFamily="34" charset="0"/>
-                <a:ea typeface="Calibri" pitchFamily="34" charset="-122"/>
-                <a:cs typeface="Calibri" pitchFamily="34" charset="-120"/>
-              </a:rPr>
-              <a:t>512×512 reference</a:t>
-            </a:r>
-            <a:endParaRPr lang="en-US" sz="1050" dirty="0"/>
-          </a:p>
-        </p:txBody>
-      </p:sp>
-      <p:pic>
-        <p:nvPicPr>
-          <p:cNvPr id="8" name="Image 1" descr="/home/claude/work/img2/prediction_UNet_MSE_SSIM_FL_Residual_Attention_PixelShuffle_noise005_scale4.png"/>
-          <p:cNvPicPr>
-            <a:picLocks noChangeAspect="1"/>
-          </p:cNvPicPr>
-          <p:nvPr/>
-        </p:nvPicPr>
-        <p:blipFill>
-          <a:blip r:embed="rId4"/>
-          <a:stretch>
-            <a:fillRect/>
-          </a:stretch>
-        </p:blipFill>
-        <p:spPr>
-          <a:xfrm>
-            <a:off x="6505956" y="1708034"/>
-            <a:ext cx="2286000" cy="2286000"/>
-          </a:xfrm>
-          <a:prstGeom prst="rect">
-            <a:avLst/>
-          </a:prstGeom>
-        </p:spPr>
-      </p:pic>
-      <p:sp>
-        <p:nvSpPr>
-          <p:cNvPr id="9" name="Shape 5"/>
-          <p:cNvSpPr/>
-          <p:nvPr/>
-        </p:nvSpPr>
-        <p:spPr>
-          <a:xfrm>
-            <a:off x="6505956" y="1708034"/>
-            <a:ext cx="2286000" cy="2286000"/>
-          </a:xfrm>
-          <a:prstGeom prst="rect">
-            <a:avLst/>
-          </a:prstGeom>
-          <a:ln w="9525">
-            <a:solidFill>
-              <a:srgbClr val="D8E2E5"/>
-            </a:solidFill>
-            <a:prstDash val="solid"/>
-          </a:ln>
-        </p:spPr>
-        <p:txBody>
-          <a:bodyPr/>
-          <a:lstStyle/>
-          <a:p>
-            <a:endParaRPr lang="it-IT"/>
-          </a:p>
-        </p:txBody>
-      </p:sp>
-      <p:sp>
-        <p:nvSpPr>
-          <p:cNvPr id="10" name="Text 6"/>
-          <p:cNvSpPr/>
-          <p:nvPr/>
-        </p:nvSpPr>
-        <p:spPr>
-          <a:xfrm>
-            <a:off x="6094476" y="4030610"/>
-            <a:ext cx="3108960" cy="274320"/>
-          </a:xfrm>
-          <a:prstGeom prst="rect">
-            <a:avLst/>
-          </a:prstGeom>
-          <a:noFill/>
-          <a:ln/>
-        </p:spPr>
-        <p:txBody>
-          <a:bodyPr wrap="square" rtlCol="0" anchor="ctr"/>
-          <a:lstStyle/>
-          <a:p>
-            <a:pPr marL="0" indent="0" algn="ctr">
-              <a:buNone/>
-            </a:pPr>
-            <a:r>
-              <a:rPr lang="en-US" sz="1050" dirty="0">
-                <a:solidFill>
-                  <a:srgbClr val="5C7285"/>
-                </a:solidFill>
-                <a:latin typeface="Calibri" pitchFamily="34" charset="0"/>
-                <a:ea typeface="Calibri" pitchFamily="34" charset="-122"/>
-                <a:cs typeface="Calibri" pitchFamily="34" charset="-120"/>
-              </a:rPr>
-              <a:t>PSNR 34.25 dB | SSIM 0.9212</a:t>
-            </a:r>
-            <a:endParaRPr lang="en-US" sz="1050" dirty="0"/>
-          </a:p>
-        </p:txBody>
-      </p:sp>
-      <p:sp>
-        <p:nvSpPr>
-          <p:cNvPr id="11" name="Text 7"/>
-          <p:cNvSpPr/>
-          <p:nvPr/>
-        </p:nvSpPr>
-        <p:spPr>
-          <a:xfrm>
-            <a:off x="548640" y="3977640"/>
-            <a:ext cx="5486400" cy="274320"/>
-          </a:xfrm>
-          <a:prstGeom prst="rect">
-            <a:avLst/>
-          </a:prstGeom>
-          <a:noFill/>
-          <a:ln/>
-        </p:spPr>
-        <p:txBody>
-          <a:bodyPr wrap="square" rtlCol="0" anchor="ctr"/>
-          <a:lstStyle/>
-          <a:p>
-            <a:pPr marL="0" indent="0">
-              <a:buNone/>
-            </a:pPr>
-            <a:r>
-              <a:rPr lang="en-US" sz="1350" b="1" dirty="0">
-                <a:solidFill>
-                  <a:srgbClr val="0B2545"/>
-                </a:solidFill>
-                <a:latin typeface="Calibri" pitchFamily="34" charset="0"/>
-                <a:ea typeface="Calibri" pitchFamily="34" charset="-122"/>
-                <a:cs typeface="Calibri" pitchFamily="34" charset="-120"/>
-              </a:rPr>
-              <a:t>Noise level σ = 0.01</a:t>
-            </a:r>
-            <a:endParaRPr lang="en-US" sz="1350" dirty="0"/>
-          </a:p>
-        </p:txBody>
-      </p:sp>
-      <p:pic>
-        <p:nvPicPr>
-          <p:cNvPr id="12" name="Image 2" descr="/home/claude/work/img/0.png"/>
-          <p:cNvPicPr>
-            <a:picLocks noChangeAspect="1"/>
-          </p:cNvPicPr>
-          <p:nvPr/>
-        </p:nvPicPr>
-        <p:blipFill>
-          <a:blip r:embed="rId3"/>
-          <a:stretch>
-            <a:fillRect/>
-          </a:stretch>
-        </p:blipFill>
-        <p:spPr>
-          <a:xfrm>
-            <a:off x="3396996" y="4297680"/>
-            <a:ext cx="2286000" cy="2286000"/>
-          </a:xfrm>
-          <a:prstGeom prst="rect">
-            <a:avLst/>
-          </a:prstGeom>
-        </p:spPr>
-      </p:pic>
-      <p:sp>
-        <p:nvSpPr>
-          <p:cNvPr id="13" name="Shape 8"/>
-          <p:cNvSpPr/>
-          <p:nvPr/>
-        </p:nvSpPr>
-        <p:spPr>
-          <a:xfrm>
-            <a:off x="3396996" y="4297680"/>
-            <a:ext cx="2286000" cy="2286000"/>
-          </a:xfrm>
-          <a:prstGeom prst="rect">
-            <a:avLst/>
-          </a:prstGeom>
-          <a:ln w="9525">
-            <a:solidFill>
-              <a:srgbClr val="D8E2E5"/>
-            </a:solidFill>
-            <a:prstDash val="solid"/>
-          </a:ln>
-        </p:spPr>
-        <p:txBody>
-          <a:bodyPr/>
-          <a:lstStyle/>
-          <a:p>
-            <a:endParaRPr lang="it-IT"/>
-          </a:p>
-        </p:txBody>
-      </p:sp>
-      <p:sp>
-        <p:nvSpPr>
-          <p:cNvPr id="14" name="Text 9"/>
-          <p:cNvSpPr/>
-          <p:nvPr/>
-        </p:nvSpPr>
-        <p:spPr>
-          <a:xfrm>
-            <a:off x="2985516" y="6620256"/>
-            <a:ext cx="3108960" cy="274320"/>
-          </a:xfrm>
-          <a:prstGeom prst="rect">
-            <a:avLst/>
-          </a:prstGeom>
-          <a:noFill/>
-          <a:ln/>
-        </p:spPr>
-        <p:txBody>
-          <a:bodyPr wrap="square" rtlCol="0" anchor="ctr"/>
-          <a:lstStyle/>
-          <a:p>
-            <a:pPr marL="0" indent="0" algn="ctr">
-              <a:buNone/>
-            </a:pPr>
-            <a:r>
-              <a:rPr lang="en-US" sz="1050" dirty="0">
-                <a:solidFill>
-                  <a:srgbClr val="5C7285"/>
-                </a:solidFill>
-                <a:latin typeface="Calibri" pitchFamily="34" charset="0"/>
-                <a:ea typeface="Calibri" pitchFamily="34" charset="-122"/>
-                <a:cs typeface="Calibri" pitchFamily="34" charset="-120"/>
-              </a:rPr>
-              <a:t>512×512 reference</a:t>
-            </a:r>
-            <a:endParaRPr lang="en-US" sz="1050" dirty="0"/>
-          </a:p>
-        </p:txBody>
-      </p:sp>
-      <p:pic>
-        <p:nvPicPr>
-          <p:cNvPr id="15" name="Image 3" descr="/home/claude/work/img2/prediction_UNet_MSE_SSIM_FL_Residual_Attention_PixelShuffle_noise01_scale4.png"/>
-          <p:cNvPicPr>
-            <a:picLocks noChangeAspect="1"/>
-          </p:cNvPicPr>
-          <p:nvPr/>
-        </p:nvPicPr>
-        <p:blipFill>
-          <a:blip r:embed="rId5"/>
-          <a:stretch>
-            <a:fillRect/>
-          </a:stretch>
-        </p:blipFill>
-        <p:spPr>
-          <a:xfrm>
-            <a:off x="6505956" y="4297680"/>
-            <a:ext cx="2286000" cy="2286000"/>
-          </a:xfrm>
-          <a:prstGeom prst="rect">
-            <a:avLst/>
-          </a:prstGeom>
-        </p:spPr>
-      </p:pic>
-      <p:sp>
-        <p:nvSpPr>
-          <p:cNvPr id="16" name="Shape 10"/>
-          <p:cNvSpPr/>
-          <p:nvPr/>
-        </p:nvSpPr>
-        <p:spPr>
-          <a:xfrm>
-            <a:off x="6505956" y="4297680"/>
-            <a:ext cx="2286000" cy="2286000"/>
-          </a:xfrm>
-          <a:prstGeom prst="rect">
-            <a:avLst/>
-          </a:prstGeom>
-          <a:ln w="9525">
-            <a:solidFill>
-              <a:srgbClr val="D8E2E5"/>
-            </a:solidFill>
-            <a:prstDash val="solid"/>
-          </a:ln>
-        </p:spPr>
-        <p:txBody>
-          <a:bodyPr/>
-          <a:lstStyle/>
-          <a:p>
-            <a:endParaRPr lang="it-IT"/>
-          </a:p>
-        </p:txBody>
-      </p:sp>
-      <p:sp>
-        <p:nvSpPr>
-          <p:cNvPr id="17" name="Text 11"/>
-          <p:cNvSpPr/>
-          <p:nvPr/>
-        </p:nvSpPr>
-        <p:spPr>
-          <a:xfrm>
-            <a:off x="6094476" y="6620256"/>
-            <a:ext cx="3108960" cy="274320"/>
-          </a:xfrm>
-          <a:prstGeom prst="rect">
-            <a:avLst/>
-          </a:prstGeom>
-          <a:noFill/>
-          <a:ln/>
-        </p:spPr>
-        <p:txBody>
-          <a:bodyPr wrap="square" rtlCol="0" anchor="ctr"/>
-          <a:lstStyle/>
-          <a:p>
-            <a:pPr marL="0" indent="0" algn="ctr">
-              <a:buNone/>
-            </a:pPr>
-            <a:r>
-              <a:rPr lang="en-US" sz="1050" dirty="0">
-                <a:solidFill>
-                  <a:srgbClr val="5C7285"/>
-                </a:solidFill>
-                <a:latin typeface="Calibri" pitchFamily="34" charset="0"/>
-                <a:ea typeface="Calibri" pitchFamily="34" charset="-122"/>
-                <a:cs typeface="Calibri" pitchFamily="34" charset="-120"/>
-              </a:rPr>
-              <a:t>PSNR 34.00 dB | SSIM 0.9154</a:t>
-            </a:r>
-            <a:endParaRPr lang="en-US" sz="1050" dirty="0"/>
-          </a:p>
-        </p:txBody>
-      </p:sp>
-      <p:sp>
-        <p:nvSpPr>
-          <p:cNvPr id="18" name="Text 12"/>
-          <p:cNvSpPr/>
-          <p:nvPr/>
-        </p:nvSpPr>
-        <p:spPr>
-          <a:xfrm>
-            <a:off x="457200" y="6446520"/>
-            <a:ext cx="7315200" cy="274320"/>
-          </a:xfrm>
-          <a:prstGeom prst="rect">
-            <a:avLst/>
-          </a:prstGeom>
-          <a:noFill/>
-          <a:ln/>
-        </p:spPr>
-        <p:txBody>
-          <a:bodyPr wrap="square" rtlCol="0" anchor="ctr"/>
-          <a:lstStyle/>
-          <a:p>
-            <a:pPr marL="0" indent="0">
-              <a:buNone/>
-            </a:pPr>
-            <a:r>
-              <a:rPr lang="en-US" sz="900" dirty="0">
-                <a:solidFill>
-                  <a:srgbClr val="5C7285"/>
-                </a:solidFill>
-                <a:latin typeface="Calibri" pitchFamily="34" charset="0"/>
-                <a:ea typeface="Calibri" pitchFamily="34" charset="-122"/>
-                <a:cs typeface="Calibri" pitchFamily="34" charset="-120"/>
-              </a:rPr>
-              <a:t>Group H  |  Computational Imaging 2025-26</a:t>
-            </a:r>
-            <a:endParaRPr lang="en-US" sz="900" dirty="0"/>
-          </a:p>
-        </p:txBody>
-      </p:sp>
-      <p:sp>
-        <p:nvSpPr>
-          <p:cNvPr id="19" name="Text 13"/>
-          <p:cNvSpPr/>
-          <p:nvPr/>
-        </p:nvSpPr>
-        <p:spPr>
-          <a:xfrm>
-            <a:off x="11274552" y="6446520"/>
-            <a:ext cx="457200" cy="274320"/>
-          </a:xfrm>
-          <a:prstGeom prst="rect">
-            <a:avLst/>
-          </a:prstGeom>
-          <a:noFill/>
-          <a:ln/>
-        </p:spPr>
-        <p:txBody>
-          <a:bodyPr wrap="square" rtlCol="0" anchor="ctr"/>
-          <a:lstStyle/>
-          <a:p>
-            <a:pPr marL="0" indent="0" algn="r">
-              <a:buNone/>
-            </a:pPr>
-            <a:r>
-              <a:rPr lang="en-US" sz="900" dirty="0">
-                <a:solidFill>
-                  <a:srgbClr val="5C7285"/>
-                </a:solidFill>
-                <a:latin typeface="Calibri" pitchFamily="34" charset="0"/>
-                <a:ea typeface="Calibri" pitchFamily="34" charset="-122"/>
-                <a:cs typeface="Calibri" pitchFamily="34" charset="-120"/>
-              </a:rPr>
-              <a:t>12</a:t>
-            </a:r>
-            <a:endParaRPr lang="en-US" sz="900" dirty="0"/>
-          </a:p>
-        </p:txBody>
-      </p:sp>
-      <p:sp>
-        <p:nvSpPr>
-          <p:cNvPr id="21" name="object 9">
-            <a:extLst>
-              <a:ext uri="{FF2B5EF4-FFF2-40B4-BE49-F238E27FC236}">
-                <a16:creationId xmlns:a16="http://schemas.microsoft.com/office/drawing/2014/main" id="{964A8F11-0F4C-8ABC-FA4A-7D38A973C5C0}"/>
-              </a:ext>
-            </a:extLst>
-          </p:cNvPr>
-          <p:cNvSpPr/>
-          <p:nvPr/>
-        </p:nvSpPr>
-        <p:spPr>
-          <a:xfrm>
-            <a:off x="10790026" y="0"/>
-            <a:ext cx="1391920" cy="936104"/>
-          </a:xfrm>
-          <a:prstGeom prst="rect">
-            <a:avLst/>
-          </a:prstGeom>
-          <a:blipFill>
-            <a:blip r:embed="rId6" cstate="print"/>
-            <a:stretch>
-              <a:fillRect/>
-            </a:stretch>
-          </a:blipFill>
-        </p:spPr>
-        <p:txBody>
-          <a:bodyPr wrap="square" lIns="0" tIns="0" rIns="0" bIns="0" rtlCol="0">
-            <a:noAutofit/>
-          </a:bodyPr>
-          <a:lstStyle/>
-          <a:p>
-            <a:endParaRPr/>
-          </a:p>
-        </p:txBody>
-      </p:sp>
-    </p:spTree>
-  </p:cSld>
-  <p:clrMapOvr>
-    <a:masterClrMapping/>
-  </p:clrMapOvr>
-</p:sld>
-</file>
-
-<file path=ppt/slides/slide11.xml><?xml version="1.0" encoding="utf-8"?>
-<p:sld xmlns:a="http://schemas.openxmlformats.org/drawingml/2006/main" xmlns:r="http://schemas.openxmlformats.org/officeDocument/2006/relationships" xmlns:p="http://schemas.openxmlformats.org/presentationml/2006/main">
   <p:cSld name="Slide 7">
     <p:bg>
       <p:bgPr>
@@ -5710,7 +5038,7 @@
 </p:sld>
 </file>
 
-<file path=ppt/slides/slide12.xml><?xml version="1.0" encoding="utf-8"?>
+<file path=ppt/slides/slide11.xml><?xml version="1.0" encoding="utf-8"?>
 <p:sld xmlns:a="http://schemas.openxmlformats.org/drawingml/2006/main" xmlns:r="http://schemas.openxmlformats.org/officeDocument/2006/relationships" xmlns:p="http://schemas.openxmlformats.org/presentationml/2006/main">
   <p:cSld name="Slide 8">
     <p:bg>
@@ -6750,7 +6078,7 @@
 </p:sld>
 </file>
 
-<file path=ppt/slides/slide13.xml><?xml version="1.0" encoding="utf-8"?>
+<file path=ppt/slides/slide12.xml><?xml version="1.0" encoding="utf-8"?>
 <p:sld xmlns:a="http://schemas.openxmlformats.org/drawingml/2006/main" xmlns:r="http://schemas.openxmlformats.org/officeDocument/2006/relationships" xmlns:p="http://schemas.openxmlformats.org/presentationml/2006/main">
   <p:cSld name="Slide 9">
     <p:bg>
@@ -7783,6 +7111,251 @@
         </p:txBody>
       </p:sp>
     </p:spTree>
+  </p:cSld>
+  <p:clrMapOvr>
+    <a:masterClrMapping/>
+  </p:clrMapOvr>
+</p:sld>
+</file>
+
+<file path=ppt/slides/slide13.xml><?xml version="1.0" encoding="utf-8"?>
+<p:sld xmlns:a="http://schemas.openxmlformats.org/drawingml/2006/main" xmlns:r="http://schemas.openxmlformats.org/officeDocument/2006/relationships" xmlns:p="http://schemas.openxmlformats.org/presentationml/2006/main">
+  <p:cSld>
+    <p:bg>
+      <p:bgPr>
+        <a:solidFill>
+          <a:srgbClr val="FFFFFF"/>
+        </a:solidFill>
+        <a:effectLst/>
+      </p:bgPr>
+    </p:bg>
+    <p:spTree>
+      <p:nvGrpSpPr>
+        <p:cNvPr id="1" name="">
+          <a:extLst>
+            <a:ext uri="{FF2B5EF4-FFF2-40B4-BE49-F238E27FC236}">
+              <a16:creationId xmlns:a16="http://schemas.microsoft.com/office/drawing/2014/main" id="{51825607-B783-42F7-6133-CEF0491115EF}"/>
+            </a:ext>
+          </a:extLst>
+        </p:cNvPr>
+        <p:cNvGrpSpPr/>
+        <p:nvPr/>
+      </p:nvGrpSpPr>
+      <p:grpSpPr>
+        <a:xfrm>
+          <a:off x="0" y="0"/>
+          <a:ext cx="0" cy="0"/>
+          <a:chOff x="0" y="0"/>
+          <a:chExt cx="0" cy="0"/>
+        </a:xfrm>
+      </p:grpSpPr>
+      <p:sp>
+        <p:nvSpPr>
+          <p:cNvPr id="2" name="Text 0">
+            <a:extLst>
+              <a:ext uri="{FF2B5EF4-FFF2-40B4-BE49-F238E27FC236}">
+                <a16:creationId xmlns:a16="http://schemas.microsoft.com/office/drawing/2014/main" id="{F12D5A53-3330-928F-3AAC-88693CC449FE}"/>
+              </a:ext>
+            </a:extLst>
+          </p:cNvPr>
+          <p:cNvSpPr/>
+          <p:nvPr/>
+        </p:nvSpPr>
+        <p:spPr>
+          <a:xfrm>
+            <a:off x="548640" y="365760"/>
+            <a:ext cx="11091672" cy="731520"/>
+          </a:xfrm>
+          <a:prstGeom prst="rect">
+            <a:avLst/>
+          </a:prstGeom>
+          <a:noFill/>
+          <a:ln/>
+        </p:spPr>
+        <p:txBody>
+          <a:bodyPr wrap="square" lIns="0" tIns="0" rIns="0" bIns="0" rtlCol="0" anchor="ctr"/>
+          <a:lstStyle/>
+          <a:p>
+            <a:pPr marL="0" indent="0">
+              <a:buNone/>
+            </a:pPr>
+            <a:r>
+              <a:rPr lang="en-US" sz="3000" b="1" dirty="0">
+                <a:solidFill>
+                  <a:srgbClr val="0B2545"/>
+                </a:solidFill>
+                <a:latin typeface="Cambria" pitchFamily="34" charset="0"/>
+                <a:ea typeface="Cambria" pitchFamily="34" charset="-122"/>
+                <a:cs typeface="Cambria" pitchFamily="34" charset="-120"/>
+              </a:rPr>
+              <a:t>Implementation GAN</a:t>
+            </a:r>
+            <a:endParaRPr lang="en-US" sz="3000" dirty="0"/>
+          </a:p>
+        </p:txBody>
+      </p:sp>
+      <p:sp>
+        <p:nvSpPr>
+          <p:cNvPr id="12" name="Text 10">
+            <a:extLst>
+              <a:ext uri="{FF2B5EF4-FFF2-40B4-BE49-F238E27FC236}">
+                <a16:creationId xmlns:a16="http://schemas.microsoft.com/office/drawing/2014/main" id="{FFA7B17F-3079-4A67-647D-EBDE837C8853}"/>
+              </a:ext>
+            </a:extLst>
+          </p:cNvPr>
+          <p:cNvSpPr/>
+          <p:nvPr/>
+        </p:nvSpPr>
+        <p:spPr>
+          <a:xfrm>
+            <a:off x="457200" y="6446520"/>
+            <a:ext cx="7315200" cy="274320"/>
+          </a:xfrm>
+          <a:prstGeom prst="rect">
+            <a:avLst/>
+          </a:prstGeom>
+          <a:noFill/>
+          <a:ln/>
+        </p:spPr>
+        <p:txBody>
+          <a:bodyPr wrap="square" rtlCol="0" anchor="ctr"/>
+          <a:lstStyle/>
+          <a:p>
+            <a:pPr marL="0" indent="0">
+              <a:buNone/>
+            </a:pPr>
+            <a:r>
+              <a:rPr lang="en-US" sz="900" dirty="0">
+                <a:solidFill>
+                  <a:srgbClr val="5C7285"/>
+                </a:solidFill>
+                <a:latin typeface="Calibri" pitchFamily="34" charset="0"/>
+                <a:ea typeface="Calibri" pitchFamily="34" charset="-122"/>
+                <a:cs typeface="Calibri" pitchFamily="34" charset="-120"/>
+              </a:rPr>
+              <a:t>Group H  |  Computational Imaging 2025-26</a:t>
+            </a:r>
+            <a:endParaRPr lang="en-US" sz="900" dirty="0"/>
+          </a:p>
+        </p:txBody>
+      </p:sp>
+      <p:sp>
+        <p:nvSpPr>
+          <p:cNvPr id="13" name="Text 11">
+            <a:extLst>
+              <a:ext uri="{FF2B5EF4-FFF2-40B4-BE49-F238E27FC236}">
+                <a16:creationId xmlns:a16="http://schemas.microsoft.com/office/drawing/2014/main" id="{5BECDD48-A984-C78A-D778-23D3C66C6BCC}"/>
+              </a:ext>
+            </a:extLst>
+          </p:cNvPr>
+          <p:cNvSpPr/>
+          <p:nvPr/>
+        </p:nvSpPr>
+        <p:spPr>
+          <a:xfrm>
+            <a:off x="11274552" y="6446520"/>
+            <a:ext cx="457200" cy="274320"/>
+          </a:xfrm>
+          <a:prstGeom prst="rect">
+            <a:avLst/>
+          </a:prstGeom>
+          <a:noFill/>
+          <a:ln/>
+        </p:spPr>
+        <p:txBody>
+          <a:bodyPr wrap="square" rtlCol="0" anchor="ctr"/>
+          <a:lstStyle/>
+          <a:p>
+            <a:pPr marL="0" indent="0" algn="r">
+              <a:buNone/>
+            </a:pPr>
+            <a:r>
+              <a:rPr lang="en-US" sz="900" dirty="0">
+                <a:solidFill>
+                  <a:srgbClr val="5C7285"/>
+                </a:solidFill>
+                <a:latin typeface="Calibri" pitchFamily="34" charset="0"/>
+                <a:ea typeface="Calibri" pitchFamily="34" charset="-122"/>
+                <a:cs typeface="Calibri" pitchFamily="34" charset="-120"/>
+              </a:rPr>
+              <a:t>4</a:t>
+            </a:r>
+            <a:endParaRPr lang="en-US" sz="900" dirty="0"/>
+          </a:p>
+        </p:txBody>
+      </p:sp>
+      <p:sp>
+        <p:nvSpPr>
+          <p:cNvPr id="15" name="object 9">
+            <a:extLst>
+              <a:ext uri="{FF2B5EF4-FFF2-40B4-BE49-F238E27FC236}">
+                <a16:creationId xmlns:a16="http://schemas.microsoft.com/office/drawing/2014/main" id="{C01BF505-9EBB-018D-C96A-C6A134D5DCCF}"/>
+              </a:ext>
+            </a:extLst>
+          </p:cNvPr>
+          <p:cNvSpPr/>
+          <p:nvPr/>
+        </p:nvSpPr>
+        <p:spPr>
+          <a:xfrm>
+            <a:off x="10790026" y="0"/>
+            <a:ext cx="1391920" cy="936104"/>
+          </a:xfrm>
+          <a:prstGeom prst="rect">
+            <a:avLst/>
+          </a:prstGeom>
+          <a:blipFill>
+            <a:blip r:embed="rId3" cstate="print"/>
+            <a:stretch>
+              <a:fillRect/>
+            </a:stretch>
+          </a:blipFill>
+        </p:spPr>
+        <p:txBody>
+          <a:bodyPr wrap="square" lIns="0" tIns="0" rIns="0" bIns="0" rtlCol="0">
+            <a:noAutofit/>
+          </a:bodyPr>
+          <a:lstStyle/>
+          <a:p>
+            <a:endParaRPr/>
+          </a:p>
+        </p:txBody>
+      </p:sp>
+      <p:pic>
+        <p:nvPicPr>
+          <p:cNvPr id="16" name="Immagine 15">
+            <a:extLst>
+              <a:ext uri="{FF2B5EF4-FFF2-40B4-BE49-F238E27FC236}">
+                <a16:creationId xmlns:a16="http://schemas.microsoft.com/office/drawing/2014/main" id="{B153687E-915E-B100-B236-9CBFAECAB20C}"/>
+              </a:ext>
+            </a:extLst>
+          </p:cNvPr>
+          <p:cNvPicPr>
+            <a:picLocks noChangeAspect="1"/>
+          </p:cNvPicPr>
+          <p:nvPr/>
+        </p:nvPicPr>
+        <p:blipFill>
+          <a:blip r:embed="rId4"/>
+          <a:srcRect/>
+          <a:stretch/>
+        </p:blipFill>
+        <p:spPr>
+          <a:xfrm>
+            <a:off x="1418808" y="1097280"/>
+            <a:ext cx="9351336" cy="5100728"/>
+          </a:xfrm>
+          <a:prstGeom prst="rect">
+            <a:avLst/>
+          </a:prstGeom>
+        </p:spPr>
+      </p:pic>
+    </p:spTree>
+    <p:extLst>
+      <p:ext uri="{BB962C8B-B14F-4D97-AF65-F5344CB8AC3E}">
+        <p14:creationId xmlns:p14="http://schemas.microsoft.com/office/powerpoint/2010/main" val="2749810787"/>
+      </p:ext>
+    </p:extLst>
   </p:cSld>
   <p:clrMapOvr>
     <a:masterClrMapping/>
@@ -14341,7 +13914,7 @@
                 <a:ea typeface="Calibri" pitchFamily="34" charset="-122"/>
                 <a:cs typeface="Calibri" pitchFamily="34" charset="-120"/>
               </a:rPr>
-              <a:t>Split into training / validation (85% / 15%, random_state=42) / test sets</a:t>
+              <a:t>Split into training / validation (85% / 15%, random_state=42 only End-to-End) / test sets</a:t>
             </a:r>
             <a:endParaRPr lang="en-US" sz="1400" dirty="0"/>
           </a:p>
@@ -19178,6 +18751,7 @@
                 <a:spcPts val="600"/>
               </a:spcAft>
               <a:buSzPct val="100000"/>
+              <a:buFontTx/>
               <a:buChar char="•"/>
             </a:pPr>
             <a:r>
@@ -19189,7 +18763,7 @@
                 <a:ea typeface="Calibri" pitchFamily="34" charset="-122"/>
                 <a:cs typeface="Calibri" pitchFamily="34" charset="-120"/>
               </a:rPr>
-              <a:t>Grid search over λ, p and noise level</a:t>
+              <a:t>Grid search over λ, p and noise level derived from the trace </a:t>
             </a:r>
             <a:endParaRPr lang="en-US" sz="1200" dirty="0"/>
           </a:p>
@@ -19577,7 +19151,7 @@
                 <a:ea typeface="Calibri" pitchFamily="34" charset="-122"/>
                 <a:cs typeface="Calibri" pitchFamily="34" charset="-120"/>
               </a:rPr>
-              <a:t>GAN + DPS-inspired inversion</a:t>
+              <a:t>GAN + DPS</a:t>
             </a:r>
             <a:endParaRPr lang="en-US" sz="1250" dirty="0"/>
           </a:p>
@@ -19641,7 +19215,7 @@
                 <a:ea typeface="Calibri" pitchFamily="34" charset="-122"/>
                 <a:cs typeface="Calibri" pitchFamily="34" charset="-120"/>
               </a:rPr>
-              <a:t>Data-fidelity loss ||K(G(z)) - y||² / (2σ²), 1000 steps</a:t>
+              <a:t>Data-fidelity loss ||K(G(z)) - y||² / (2σ²) and 1000 steps</a:t>
             </a:r>
             <a:endParaRPr lang="en-US" sz="1200" dirty="0"/>
           </a:p>
@@ -20301,6 +19875,26 @@
               </a:rPr>
               <a:t>8 epochs, batch size 32, best model saved on validation loss</a:t>
             </a:r>
+          </a:p>
+          <a:p>
+            <a:pPr marL="342900" indent="-342900">
+              <a:spcAft>
+                <a:spcPts val="400"/>
+              </a:spcAft>
+              <a:buSzPct val="100000"/>
+              <a:buChar char="•"/>
+            </a:pPr>
+            <a:r>
+              <a:rPr lang="en-US" sz="1250" dirty="0">
+                <a:solidFill>
+                  <a:srgbClr val="1B2A3A"/>
+                </a:solidFill>
+                <a:latin typeface="Calibri" pitchFamily="34" charset="0"/>
+                <a:ea typeface="Calibri" pitchFamily="34" charset="-122"/>
+                <a:cs typeface="Calibri" pitchFamily="34" charset="-120"/>
+              </a:rPr>
+              <a:t>The same setup is keeping for all models</a:t>
+            </a:r>
             <a:endParaRPr lang="en-US" sz="1250" dirty="0"/>
           </a:p>
         </p:txBody>
@@ -20532,1125 +20126,6 @@
 </file>
 
 <file path=ppt/slides/slide5.xml><?xml version="1.0" encoding="utf-8"?>
-<p:sld xmlns:a="http://schemas.openxmlformats.org/drawingml/2006/main" xmlns:r="http://schemas.openxmlformats.org/officeDocument/2006/relationships" xmlns:p="http://schemas.openxmlformats.org/presentationml/2006/main">
-  <p:cSld>
-    <p:bg>
-      <p:bgPr>
-        <a:solidFill>
-          <a:srgbClr val="FFFFFF"/>
-        </a:solidFill>
-        <a:effectLst/>
-      </p:bgPr>
-    </p:bg>
-    <p:spTree>
-      <p:nvGrpSpPr>
-        <p:cNvPr id="1" name="">
-          <a:extLst>
-            <a:ext uri="{FF2B5EF4-FFF2-40B4-BE49-F238E27FC236}">
-              <a16:creationId xmlns:a16="http://schemas.microsoft.com/office/drawing/2014/main" id="{CBE9453D-EA3A-63B9-DF08-6D235AA951EC}"/>
-            </a:ext>
-          </a:extLst>
-        </p:cNvPr>
-        <p:cNvGrpSpPr/>
-        <p:nvPr/>
-      </p:nvGrpSpPr>
-      <p:grpSpPr>
-        <a:xfrm>
-          <a:off x="0" y="0"/>
-          <a:ext cx="0" cy="0"/>
-          <a:chOff x="0" y="0"/>
-          <a:chExt cx="0" cy="0"/>
-        </a:xfrm>
-      </p:grpSpPr>
-      <p:sp>
-        <p:nvSpPr>
-          <p:cNvPr id="2" name="Text 0">
-            <a:extLst>
-              <a:ext uri="{FF2B5EF4-FFF2-40B4-BE49-F238E27FC236}">
-                <a16:creationId xmlns:a16="http://schemas.microsoft.com/office/drawing/2014/main" id="{AD7A83FE-6564-7336-F6DE-6D6FDE63F109}"/>
-              </a:ext>
-            </a:extLst>
-          </p:cNvPr>
-          <p:cNvSpPr/>
-          <p:nvPr/>
-        </p:nvSpPr>
-        <p:spPr>
-          <a:xfrm>
-            <a:off x="548640" y="365760"/>
-            <a:ext cx="11091672" cy="731520"/>
-          </a:xfrm>
-          <a:prstGeom prst="rect">
-            <a:avLst/>
-          </a:prstGeom>
-          <a:noFill/>
-          <a:ln/>
-        </p:spPr>
-        <p:txBody>
-          <a:bodyPr wrap="square" lIns="0" tIns="0" rIns="0" bIns="0" rtlCol="0" anchor="ctr"/>
-          <a:lstStyle/>
-          <a:p>
-            <a:pPr marL="0" indent="0">
-              <a:buNone/>
-            </a:pPr>
-            <a:r>
-              <a:rPr lang="en-US" sz="3000" b="1" dirty="0">
-                <a:solidFill>
-                  <a:srgbClr val="0B2545"/>
-                </a:solidFill>
-                <a:latin typeface="Cambria" pitchFamily="34" charset="0"/>
-                <a:ea typeface="Cambria" pitchFamily="34" charset="-122"/>
-                <a:cs typeface="Cambria" pitchFamily="34" charset="-120"/>
-              </a:rPr>
-              <a:t>Implementation End-to-End (</a:t>
-            </a:r>
-            <a:r>
-              <a:rPr lang="en-US" sz="3000" b="1" dirty="0" err="1">
-                <a:solidFill>
-                  <a:srgbClr val="0B2545"/>
-                </a:solidFill>
-                <a:latin typeface="Cambria" pitchFamily="34" charset="0"/>
-                <a:ea typeface="Cambria" pitchFamily="34" charset="-122"/>
-                <a:cs typeface="Cambria" pitchFamily="34" charset="-120"/>
-              </a:rPr>
-              <a:t>UNet</a:t>
-            </a:r>
-            <a:r>
-              <a:rPr lang="en-US" sz="3000" b="1" dirty="0">
-                <a:solidFill>
-                  <a:srgbClr val="0B2545"/>
-                </a:solidFill>
-                <a:latin typeface="Cambria" pitchFamily="34" charset="0"/>
-                <a:ea typeface="Cambria" pitchFamily="34" charset="-122"/>
-                <a:cs typeface="Cambria" pitchFamily="34" charset="-120"/>
-              </a:rPr>
-              <a:t>)</a:t>
-            </a:r>
-            <a:endParaRPr lang="en-US" sz="3000" dirty="0"/>
-          </a:p>
-        </p:txBody>
-      </p:sp>
-      <p:sp>
-        <p:nvSpPr>
-          <p:cNvPr id="7" name="Shape 5">
-            <a:extLst>
-              <a:ext uri="{FF2B5EF4-FFF2-40B4-BE49-F238E27FC236}">
-                <a16:creationId xmlns:a16="http://schemas.microsoft.com/office/drawing/2014/main" id="{444CB0C0-9D53-682B-12F4-A147C4E071B2}"/>
-              </a:ext>
-            </a:extLst>
-          </p:cNvPr>
-          <p:cNvSpPr/>
-          <p:nvPr/>
-        </p:nvSpPr>
-        <p:spPr>
-          <a:xfrm>
-            <a:off x="7847044" y="2080727"/>
-            <a:ext cx="3765835" cy="2519266"/>
-          </a:xfrm>
-          <a:prstGeom prst="roundRect">
-            <a:avLst>
-              <a:gd name="adj" fmla="val 2449"/>
-            </a:avLst>
-          </a:prstGeom>
-          <a:solidFill>
-            <a:srgbClr val="E8F1F2"/>
-          </a:solidFill>
-          <a:ln/>
-          <a:effectLst>
-            <a:outerShdw blurRad="101600" dist="38100" dir="2700000" algn="bl" rotWithShape="0">
-              <a:srgbClr val="000000">
-                <a:alpha val="12000"/>
-              </a:srgbClr>
-            </a:outerShdw>
-          </a:effectLst>
-        </p:spPr>
-        <p:txBody>
-          <a:bodyPr/>
-          <a:lstStyle/>
-          <a:p>
-            <a:endParaRPr lang="it-IT" dirty="0"/>
-          </a:p>
-        </p:txBody>
-      </p:sp>
-      <p:sp>
-        <p:nvSpPr>
-          <p:cNvPr id="12" name="Text 10">
-            <a:extLst>
-              <a:ext uri="{FF2B5EF4-FFF2-40B4-BE49-F238E27FC236}">
-                <a16:creationId xmlns:a16="http://schemas.microsoft.com/office/drawing/2014/main" id="{979B2548-DAA5-B591-50C5-1B2477044CB1}"/>
-              </a:ext>
-            </a:extLst>
-          </p:cNvPr>
-          <p:cNvSpPr/>
-          <p:nvPr/>
-        </p:nvSpPr>
-        <p:spPr>
-          <a:xfrm>
-            <a:off x="457200" y="6446520"/>
-            <a:ext cx="7315200" cy="274320"/>
-          </a:xfrm>
-          <a:prstGeom prst="rect">
-            <a:avLst/>
-          </a:prstGeom>
-          <a:noFill/>
-          <a:ln/>
-        </p:spPr>
-        <p:txBody>
-          <a:bodyPr wrap="square" rtlCol="0" anchor="ctr"/>
-          <a:lstStyle/>
-          <a:p>
-            <a:pPr marL="0" indent="0">
-              <a:buNone/>
-            </a:pPr>
-            <a:r>
-              <a:rPr lang="en-US" sz="900" dirty="0">
-                <a:solidFill>
-                  <a:srgbClr val="5C7285"/>
-                </a:solidFill>
-                <a:latin typeface="Calibri" pitchFamily="34" charset="0"/>
-                <a:ea typeface="Calibri" pitchFamily="34" charset="-122"/>
-                <a:cs typeface="Calibri" pitchFamily="34" charset="-120"/>
-              </a:rPr>
-              <a:t>Group H  |  Computational Imaging 2025-26</a:t>
-            </a:r>
-            <a:endParaRPr lang="en-US" sz="900" dirty="0"/>
-          </a:p>
-        </p:txBody>
-      </p:sp>
-      <p:sp>
-        <p:nvSpPr>
-          <p:cNvPr id="13" name="Text 11">
-            <a:extLst>
-              <a:ext uri="{FF2B5EF4-FFF2-40B4-BE49-F238E27FC236}">
-                <a16:creationId xmlns:a16="http://schemas.microsoft.com/office/drawing/2014/main" id="{1CF8C4B5-C65A-96D3-C690-899559ADCDCE}"/>
-              </a:ext>
-            </a:extLst>
-          </p:cNvPr>
-          <p:cNvSpPr/>
-          <p:nvPr/>
-        </p:nvSpPr>
-        <p:spPr>
-          <a:xfrm>
-            <a:off x="11274552" y="6446520"/>
-            <a:ext cx="457200" cy="274320"/>
-          </a:xfrm>
-          <a:prstGeom prst="rect">
-            <a:avLst/>
-          </a:prstGeom>
-          <a:noFill/>
-          <a:ln/>
-        </p:spPr>
-        <p:txBody>
-          <a:bodyPr wrap="square" rtlCol="0" anchor="ctr"/>
-          <a:lstStyle/>
-          <a:p>
-            <a:pPr marL="0" indent="0" algn="r">
-              <a:buNone/>
-            </a:pPr>
-            <a:r>
-              <a:rPr lang="en-US" sz="900" dirty="0">
-                <a:solidFill>
-                  <a:srgbClr val="5C7285"/>
-                </a:solidFill>
-                <a:latin typeface="Calibri" pitchFamily="34" charset="0"/>
-                <a:ea typeface="Calibri" pitchFamily="34" charset="-122"/>
-                <a:cs typeface="Calibri" pitchFamily="34" charset="-120"/>
-              </a:rPr>
-              <a:t>4</a:t>
-            </a:r>
-            <a:endParaRPr lang="en-US" sz="900" dirty="0"/>
-          </a:p>
-        </p:txBody>
-      </p:sp>
-      <p:sp>
-        <p:nvSpPr>
-          <p:cNvPr id="15" name="object 9">
-            <a:extLst>
-              <a:ext uri="{FF2B5EF4-FFF2-40B4-BE49-F238E27FC236}">
-                <a16:creationId xmlns:a16="http://schemas.microsoft.com/office/drawing/2014/main" id="{B4945181-9977-C021-AAFF-457F43964A94}"/>
-              </a:ext>
-            </a:extLst>
-          </p:cNvPr>
-          <p:cNvSpPr/>
-          <p:nvPr/>
-        </p:nvSpPr>
-        <p:spPr>
-          <a:xfrm>
-            <a:off x="10790026" y="0"/>
-            <a:ext cx="1391920" cy="936104"/>
-          </a:xfrm>
-          <a:prstGeom prst="rect">
-            <a:avLst/>
-          </a:prstGeom>
-          <a:blipFill>
-            <a:blip r:embed="rId3" cstate="print"/>
-            <a:stretch>
-              <a:fillRect/>
-            </a:stretch>
-          </a:blipFill>
-        </p:spPr>
-        <p:txBody>
-          <a:bodyPr wrap="square" lIns="0" tIns="0" rIns="0" bIns="0" rtlCol="0">
-            <a:noAutofit/>
-          </a:bodyPr>
-          <a:lstStyle/>
-          <a:p>
-            <a:endParaRPr/>
-          </a:p>
-        </p:txBody>
-      </p:sp>
-      <p:pic>
-        <p:nvPicPr>
-          <p:cNvPr id="16" name="Immagine 15">
-            <a:extLst>
-              <a:ext uri="{FF2B5EF4-FFF2-40B4-BE49-F238E27FC236}">
-                <a16:creationId xmlns:a16="http://schemas.microsoft.com/office/drawing/2014/main" id="{F97051B9-9DC9-8CFB-21D6-BA6956095D97}"/>
-              </a:ext>
-            </a:extLst>
-          </p:cNvPr>
-          <p:cNvPicPr>
-            <a:picLocks noChangeAspect="1"/>
-          </p:cNvPicPr>
-          <p:nvPr/>
-        </p:nvPicPr>
-        <p:blipFill>
-          <a:blip r:embed="rId4"/>
-          <a:stretch>
-            <a:fillRect/>
-          </a:stretch>
-        </p:blipFill>
-        <p:spPr>
-          <a:xfrm>
-            <a:off x="548640" y="1573085"/>
-            <a:ext cx="6835081" cy="3711829"/>
-          </a:xfrm>
-          <a:prstGeom prst="rect">
-            <a:avLst/>
-          </a:prstGeom>
-        </p:spPr>
-      </p:pic>
-      <p:sp>
-        <p:nvSpPr>
-          <p:cNvPr id="18" name="Text 7">
-            <a:extLst>
-              <a:ext uri="{FF2B5EF4-FFF2-40B4-BE49-F238E27FC236}">
-                <a16:creationId xmlns:a16="http://schemas.microsoft.com/office/drawing/2014/main" id="{F25FE3E0-915E-0631-47AD-BE5A70B7F6FB}"/>
-              </a:ext>
-            </a:extLst>
-          </p:cNvPr>
-          <p:cNvSpPr/>
-          <p:nvPr/>
-        </p:nvSpPr>
-        <p:spPr>
-          <a:xfrm>
-            <a:off x="8144132" y="1874520"/>
-            <a:ext cx="3359020" cy="2948473"/>
-          </a:xfrm>
-          <a:prstGeom prst="rect">
-            <a:avLst/>
-          </a:prstGeom>
-          <a:noFill/>
-          <a:ln/>
-        </p:spPr>
-        <p:txBody>
-          <a:bodyPr wrap="square" rtlCol="0" anchor="ctr"/>
-          <a:lstStyle/>
-          <a:p>
-            <a:pPr>
-              <a:spcAft>
-                <a:spcPts val="400"/>
-              </a:spcAft>
-              <a:buSzPct val="100000"/>
-            </a:pPr>
-            <a:r>
-              <a:rPr lang="it-IT" sz="1400" b="1" dirty="0"/>
-              <a:t>U-Net </a:t>
-            </a:r>
-            <a:r>
-              <a:rPr lang="it-IT" sz="1400" b="1" dirty="0" err="1"/>
-              <a:t>architecture</a:t>
-            </a:r>
-            <a:r>
-              <a:rPr lang="it-IT" sz="1400" b="1" dirty="0"/>
-              <a:t> with </a:t>
-            </a:r>
-            <a:r>
-              <a:rPr lang="it-IT" sz="1400" b="1" dirty="0" err="1"/>
-              <a:t>Attention</a:t>
-            </a:r>
-            <a:r>
-              <a:rPr lang="it-IT" sz="1400" b="1" dirty="0"/>
-              <a:t> Gates </a:t>
-            </a:r>
-            <a:r>
-              <a:rPr lang="it-IT" sz="1400" dirty="0"/>
-              <a:t>for image </a:t>
-            </a:r>
-            <a:r>
-              <a:rPr lang="it-IT" sz="1400" dirty="0" err="1"/>
-              <a:t>reconstruction</a:t>
-            </a:r>
-            <a:r>
-              <a:rPr lang="it-IT" sz="1400" dirty="0"/>
-              <a:t>. The encoder </a:t>
-            </a:r>
-            <a:r>
-              <a:rPr lang="it-IT" sz="1400" dirty="0" err="1"/>
-              <a:t>extracts</a:t>
-            </a:r>
-            <a:r>
-              <a:rPr lang="it-IT" sz="1400" dirty="0"/>
-              <a:t> multi-scale features, </a:t>
-            </a:r>
-            <a:r>
-              <a:rPr lang="it-IT" sz="1400" dirty="0" err="1"/>
-              <a:t>while</a:t>
-            </a:r>
-            <a:r>
-              <a:rPr lang="it-IT" sz="1400" dirty="0"/>
-              <a:t> the decoder </a:t>
-            </a:r>
-            <a:r>
-              <a:rPr lang="it-IT" sz="1400" dirty="0" err="1"/>
-              <a:t>reconstructs</a:t>
-            </a:r>
-            <a:r>
-              <a:rPr lang="it-IT" sz="1400" dirty="0"/>
-              <a:t> the image </a:t>
-            </a:r>
-            <a:r>
-              <a:rPr lang="it-IT" sz="1400" dirty="0" err="1"/>
-              <a:t>using</a:t>
-            </a:r>
-            <a:r>
-              <a:rPr lang="it-IT" sz="1400" dirty="0"/>
-              <a:t> skip connections and </a:t>
-            </a:r>
-            <a:r>
-              <a:rPr lang="it-IT" sz="1400" dirty="0" err="1"/>
-              <a:t>attention</a:t>
-            </a:r>
-            <a:r>
-              <a:rPr lang="it-IT" sz="1400" dirty="0"/>
-              <a:t> </a:t>
-            </a:r>
-            <a:r>
-              <a:rPr lang="it-IT" sz="1400" dirty="0" err="1"/>
-              <a:t>mechanisms</a:t>
-            </a:r>
-            <a:r>
-              <a:rPr lang="it-IT" sz="1400" dirty="0"/>
-              <a:t> to </a:t>
-            </a:r>
-            <a:r>
-              <a:rPr lang="it-IT" sz="1400" dirty="0" err="1"/>
-              <a:t>preserve</a:t>
-            </a:r>
-            <a:r>
-              <a:rPr lang="it-IT" sz="1400" dirty="0"/>
-              <a:t> the </a:t>
-            </a:r>
-            <a:r>
-              <a:rPr lang="it-IT" sz="1400" dirty="0" err="1"/>
-              <a:t>most</a:t>
-            </a:r>
-            <a:r>
-              <a:rPr lang="it-IT" sz="1400" dirty="0"/>
-              <a:t> </a:t>
-            </a:r>
-            <a:r>
-              <a:rPr lang="it-IT" sz="1400" dirty="0" err="1"/>
-              <a:t>relevant</a:t>
-            </a:r>
-            <a:r>
-              <a:rPr lang="it-IT" sz="1400" dirty="0"/>
-              <a:t> </a:t>
-            </a:r>
-            <a:r>
-              <a:rPr lang="it-IT" sz="1400" dirty="0" err="1"/>
-              <a:t>details</a:t>
-            </a:r>
-            <a:r>
-              <a:rPr lang="it-IT" sz="1400" dirty="0"/>
-              <a:t>. The network </a:t>
-            </a:r>
-            <a:r>
-              <a:rPr lang="it-IT" sz="1400" dirty="0" err="1"/>
-              <a:t>estimates</a:t>
-            </a:r>
-            <a:r>
-              <a:rPr lang="it-IT" sz="1400" dirty="0"/>
-              <a:t> the </a:t>
-            </a:r>
-            <a:r>
-              <a:rPr lang="it-IT" sz="1400" dirty="0" err="1"/>
-              <a:t>noise</a:t>
-            </a:r>
-            <a:r>
-              <a:rPr lang="it-IT" sz="1400" dirty="0"/>
-              <a:t> </a:t>
-            </a:r>
-            <a:r>
-              <a:rPr lang="it-IT" sz="1400" dirty="0" err="1"/>
-              <a:t>present</a:t>
-            </a:r>
-            <a:r>
-              <a:rPr lang="it-IT" sz="1400" dirty="0"/>
-              <a:t> in the input image, </a:t>
-            </a:r>
-            <a:r>
-              <a:rPr lang="it-IT" sz="1400" dirty="0" err="1"/>
-              <a:t>which</a:t>
-            </a:r>
-            <a:r>
-              <a:rPr lang="it-IT" sz="1400" dirty="0"/>
-              <a:t> </a:t>
-            </a:r>
-            <a:r>
-              <a:rPr lang="it-IT" sz="1400" dirty="0" err="1"/>
-              <a:t>is</a:t>
-            </a:r>
-            <a:r>
-              <a:rPr lang="it-IT" sz="1400" dirty="0"/>
-              <a:t> </a:t>
-            </a:r>
-            <a:r>
-              <a:rPr lang="it-IT" sz="1400" dirty="0" err="1"/>
-              <a:t>then</a:t>
-            </a:r>
-            <a:r>
-              <a:rPr lang="it-IT" sz="1400" dirty="0"/>
-              <a:t> </a:t>
-            </a:r>
-            <a:r>
-              <a:rPr lang="it-IT" sz="1400" dirty="0" err="1"/>
-              <a:t>subtracted</a:t>
-            </a:r>
-            <a:r>
-              <a:rPr lang="it-IT" sz="1400" dirty="0"/>
-              <a:t> from the input </a:t>
-            </a:r>
-            <a:r>
-              <a:rPr lang="it-IT" sz="1400" dirty="0" err="1"/>
-              <a:t>using</a:t>
-            </a:r>
-            <a:r>
-              <a:rPr lang="it-IT" sz="1400" dirty="0"/>
-              <a:t> a </a:t>
-            </a:r>
-            <a:r>
-              <a:rPr lang="it-IT" sz="1400" b="1" dirty="0" err="1"/>
-              <a:t>residual</a:t>
-            </a:r>
-            <a:r>
-              <a:rPr lang="it-IT" sz="1400" b="1" dirty="0"/>
-              <a:t> learning</a:t>
-            </a:r>
-            <a:r>
-              <a:rPr lang="it-IT" sz="1400" dirty="0"/>
-              <a:t> </a:t>
-            </a:r>
-            <a:r>
-              <a:rPr lang="it-IT" sz="1400" dirty="0" err="1"/>
-              <a:t>approach</a:t>
-            </a:r>
-            <a:r>
-              <a:rPr lang="it-IT" sz="1400" dirty="0"/>
-              <a:t>.</a:t>
-            </a:r>
-            <a:endParaRPr lang="en-US" sz="1250" dirty="0"/>
-          </a:p>
-        </p:txBody>
-      </p:sp>
-    </p:spTree>
-    <p:extLst>
-      <p:ext uri="{BB962C8B-B14F-4D97-AF65-F5344CB8AC3E}">
-        <p14:creationId xmlns:p14="http://schemas.microsoft.com/office/powerpoint/2010/main" val="3414510366"/>
-      </p:ext>
-    </p:extLst>
-  </p:cSld>
-  <p:clrMapOvr>
-    <a:masterClrMapping/>
-  </p:clrMapOvr>
-</p:sld>
-</file>
-
-<file path=ppt/slides/slide6.xml><?xml version="1.0" encoding="utf-8"?>
-<p:sld xmlns:a="http://schemas.openxmlformats.org/drawingml/2006/main" xmlns:r="http://schemas.openxmlformats.org/officeDocument/2006/relationships" xmlns:p="http://schemas.openxmlformats.org/presentationml/2006/main">
-  <p:cSld>
-    <p:bg>
-      <p:bgPr>
-        <a:solidFill>
-          <a:srgbClr val="FFFFFF"/>
-        </a:solidFill>
-        <a:effectLst/>
-      </p:bgPr>
-    </p:bg>
-    <p:spTree>
-      <p:nvGrpSpPr>
-        <p:cNvPr id="1" name="">
-          <a:extLst>
-            <a:ext uri="{FF2B5EF4-FFF2-40B4-BE49-F238E27FC236}">
-              <a16:creationId xmlns:a16="http://schemas.microsoft.com/office/drawing/2014/main" id="{51825607-B783-42F7-6133-CEF0491115EF}"/>
-            </a:ext>
-          </a:extLst>
-        </p:cNvPr>
-        <p:cNvGrpSpPr/>
-        <p:nvPr/>
-      </p:nvGrpSpPr>
-      <p:grpSpPr>
-        <a:xfrm>
-          <a:off x="0" y="0"/>
-          <a:ext cx="0" cy="0"/>
-          <a:chOff x="0" y="0"/>
-          <a:chExt cx="0" cy="0"/>
-        </a:xfrm>
-      </p:grpSpPr>
-      <p:sp>
-        <p:nvSpPr>
-          <p:cNvPr id="2" name="Text 0">
-            <a:extLst>
-              <a:ext uri="{FF2B5EF4-FFF2-40B4-BE49-F238E27FC236}">
-                <a16:creationId xmlns:a16="http://schemas.microsoft.com/office/drawing/2014/main" id="{F12D5A53-3330-928F-3AAC-88693CC449FE}"/>
-              </a:ext>
-            </a:extLst>
-          </p:cNvPr>
-          <p:cNvSpPr/>
-          <p:nvPr/>
-        </p:nvSpPr>
-        <p:spPr>
-          <a:xfrm>
-            <a:off x="548640" y="365760"/>
-            <a:ext cx="11091672" cy="731520"/>
-          </a:xfrm>
-          <a:prstGeom prst="rect">
-            <a:avLst/>
-          </a:prstGeom>
-          <a:noFill/>
-          <a:ln/>
-        </p:spPr>
-        <p:txBody>
-          <a:bodyPr wrap="square" lIns="0" tIns="0" rIns="0" bIns="0" rtlCol="0" anchor="ctr"/>
-          <a:lstStyle/>
-          <a:p>
-            <a:pPr marL="0" indent="0">
-              <a:buNone/>
-            </a:pPr>
-            <a:r>
-              <a:rPr lang="en-US" sz="3000" b="1" dirty="0">
-                <a:solidFill>
-                  <a:srgbClr val="0B2545"/>
-                </a:solidFill>
-                <a:latin typeface="Cambria" pitchFamily="34" charset="0"/>
-                <a:ea typeface="Cambria" pitchFamily="34" charset="-122"/>
-                <a:cs typeface="Cambria" pitchFamily="34" charset="-120"/>
-              </a:rPr>
-              <a:t>Implementation GAN</a:t>
-            </a:r>
-            <a:endParaRPr lang="en-US" sz="3000" dirty="0"/>
-          </a:p>
-        </p:txBody>
-      </p:sp>
-      <p:sp>
-        <p:nvSpPr>
-          <p:cNvPr id="7" name="Shape 5">
-            <a:extLst>
-              <a:ext uri="{FF2B5EF4-FFF2-40B4-BE49-F238E27FC236}">
-                <a16:creationId xmlns:a16="http://schemas.microsoft.com/office/drawing/2014/main" id="{ABCFB983-3450-F171-1AC8-45AA5013EB21}"/>
-              </a:ext>
-            </a:extLst>
-          </p:cNvPr>
-          <p:cNvSpPr/>
-          <p:nvPr/>
-        </p:nvSpPr>
-        <p:spPr>
-          <a:xfrm>
-            <a:off x="7847044" y="2015412"/>
-            <a:ext cx="3765835" cy="2668555"/>
-          </a:xfrm>
-          <a:prstGeom prst="roundRect">
-            <a:avLst>
-              <a:gd name="adj" fmla="val 2449"/>
-            </a:avLst>
-          </a:prstGeom>
-          <a:solidFill>
-            <a:srgbClr val="E8F1F2"/>
-          </a:solidFill>
-          <a:ln/>
-          <a:effectLst>
-            <a:outerShdw blurRad="101600" dist="38100" dir="2700000" algn="bl" rotWithShape="0">
-              <a:srgbClr val="000000">
-                <a:alpha val="12000"/>
-              </a:srgbClr>
-            </a:outerShdw>
-          </a:effectLst>
-        </p:spPr>
-        <p:txBody>
-          <a:bodyPr/>
-          <a:lstStyle/>
-          <a:p>
-            <a:endParaRPr lang="it-IT" dirty="0"/>
-          </a:p>
-        </p:txBody>
-      </p:sp>
-      <p:sp>
-        <p:nvSpPr>
-          <p:cNvPr id="12" name="Text 10">
-            <a:extLst>
-              <a:ext uri="{FF2B5EF4-FFF2-40B4-BE49-F238E27FC236}">
-                <a16:creationId xmlns:a16="http://schemas.microsoft.com/office/drawing/2014/main" id="{FFA7B17F-3079-4A67-647D-EBDE837C8853}"/>
-              </a:ext>
-            </a:extLst>
-          </p:cNvPr>
-          <p:cNvSpPr/>
-          <p:nvPr/>
-        </p:nvSpPr>
-        <p:spPr>
-          <a:xfrm>
-            <a:off x="457200" y="6446520"/>
-            <a:ext cx="7315200" cy="274320"/>
-          </a:xfrm>
-          <a:prstGeom prst="rect">
-            <a:avLst/>
-          </a:prstGeom>
-          <a:noFill/>
-          <a:ln/>
-        </p:spPr>
-        <p:txBody>
-          <a:bodyPr wrap="square" rtlCol="0" anchor="ctr"/>
-          <a:lstStyle/>
-          <a:p>
-            <a:pPr marL="0" indent="0">
-              <a:buNone/>
-            </a:pPr>
-            <a:r>
-              <a:rPr lang="en-US" sz="900" dirty="0">
-                <a:solidFill>
-                  <a:srgbClr val="5C7285"/>
-                </a:solidFill>
-                <a:latin typeface="Calibri" pitchFamily="34" charset="0"/>
-                <a:ea typeface="Calibri" pitchFamily="34" charset="-122"/>
-                <a:cs typeface="Calibri" pitchFamily="34" charset="-120"/>
-              </a:rPr>
-              <a:t>Group H  |  Computational Imaging 2025-26</a:t>
-            </a:r>
-            <a:endParaRPr lang="en-US" sz="900" dirty="0"/>
-          </a:p>
-        </p:txBody>
-      </p:sp>
-      <p:sp>
-        <p:nvSpPr>
-          <p:cNvPr id="13" name="Text 11">
-            <a:extLst>
-              <a:ext uri="{FF2B5EF4-FFF2-40B4-BE49-F238E27FC236}">
-                <a16:creationId xmlns:a16="http://schemas.microsoft.com/office/drawing/2014/main" id="{5BECDD48-A984-C78A-D778-23D3C66C6BCC}"/>
-              </a:ext>
-            </a:extLst>
-          </p:cNvPr>
-          <p:cNvSpPr/>
-          <p:nvPr/>
-        </p:nvSpPr>
-        <p:spPr>
-          <a:xfrm>
-            <a:off x="11274552" y="6446520"/>
-            <a:ext cx="457200" cy="274320"/>
-          </a:xfrm>
-          <a:prstGeom prst="rect">
-            <a:avLst/>
-          </a:prstGeom>
-          <a:noFill/>
-          <a:ln/>
-        </p:spPr>
-        <p:txBody>
-          <a:bodyPr wrap="square" rtlCol="0" anchor="ctr"/>
-          <a:lstStyle/>
-          <a:p>
-            <a:pPr marL="0" indent="0" algn="r">
-              <a:buNone/>
-            </a:pPr>
-            <a:r>
-              <a:rPr lang="en-US" sz="900" dirty="0">
-                <a:solidFill>
-                  <a:srgbClr val="5C7285"/>
-                </a:solidFill>
-                <a:latin typeface="Calibri" pitchFamily="34" charset="0"/>
-                <a:ea typeface="Calibri" pitchFamily="34" charset="-122"/>
-                <a:cs typeface="Calibri" pitchFamily="34" charset="-120"/>
-              </a:rPr>
-              <a:t>4</a:t>
-            </a:r>
-            <a:endParaRPr lang="en-US" sz="900" dirty="0"/>
-          </a:p>
-        </p:txBody>
-      </p:sp>
-      <p:sp>
-        <p:nvSpPr>
-          <p:cNvPr id="15" name="object 9">
-            <a:extLst>
-              <a:ext uri="{FF2B5EF4-FFF2-40B4-BE49-F238E27FC236}">
-                <a16:creationId xmlns:a16="http://schemas.microsoft.com/office/drawing/2014/main" id="{C01BF505-9EBB-018D-C96A-C6A134D5DCCF}"/>
-              </a:ext>
-            </a:extLst>
-          </p:cNvPr>
-          <p:cNvSpPr/>
-          <p:nvPr/>
-        </p:nvSpPr>
-        <p:spPr>
-          <a:xfrm>
-            <a:off x="10790026" y="0"/>
-            <a:ext cx="1391920" cy="936104"/>
-          </a:xfrm>
-          <a:prstGeom prst="rect">
-            <a:avLst/>
-          </a:prstGeom>
-          <a:blipFill>
-            <a:blip r:embed="rId3" cstate="print"/>
-            <a:stretch>
-              <a:fillRect/>
-            </a:stretch>
-          </a:blipFill>
-        </p:spPr>
-        <p:txBody>
-          <a:bodyPr wrap="square" lIns="0" tIns="0" rIns="0" bIns="0" rtlCol="0">
-            <a:noAutofit/>
-          </a:bodyPr>
-          <a:lstStyle/>
-          <a:p>
-            <a:endParaRPr/>
-          </a:p>
-        </p:txBody>
-      </p:sp>
-      <p:pic>
-        <p:nvPicPr>
-          <p:cNvPr id="16" name="Immagine 15">
-            <a:extLst>
-              <a:ext uri="{FF2B5EF4-FFF2-40B4-BE49-F238E27FC236}">
-                <a16:creationId xmlns:a16="http://schemas.microsoft.com/office/drawing/2014/main" id="{B153687E-915E-B100-B236-9CBFAECAB20C}"/>
-              </a:ext>
-            </a:extLst>
-          </p:cNvPr>
-          <p:cNvPicPr>
-            <a:picLocks noChangeAspect="1"/>
-          </p:cNvPicPr>
-          <p:nvPr/>
-        </p:nvPicPr>
-        <p:blipFill>
-          <a:blip r:embed="rId4"/>
-          <a:srcRect/>
-          <a:stretch/>
-        </p:blipFill>
-        <p:spPr>
-          <a:xfrm>
-            <a:off x="563671" y="1573085"/>
-            <a:ext cx="6805019" cy="3711829"/>
-          </a:xfrm>
-          <a:prstGeom prst="rect">
-            <a:avLst/>
-          </a:prstGeom>
-        </p:spPr>
-      </p:pic>
-      <p:sp>
-        <p:nvSpPr>
-          <p:cNvPr id="18" name="Text 7">
-            <a:extLst>
-              <a:ext uri="{FF2B5EF4-FFF2-40B4-BE49-F238E27FC236}">
-                <a16:creationId xmlns:a16="http://schemas.microsoft.com/office/drawing/2014/main" id="{5F6733E1-35B4-D401-CD34-AC23F0D56B60}"/>
-              </a:ext>
-            </a:extLst>
-          </p:cNvPr>
-          <p:cNvSpPr/>
-          <p:nvPr/>
-        </p:nvSpPr>
-        <p:spPr>
-          <a:xfrm>
-            <a:off x="8144132" y="1874520"/>
-            <a:ext cx="3359020" cy="2948473"/>
-          </a:xfrm>
-          <a:prstGeom prst="rect">
-            <a:avLst/>
-          </a:prstGeom>
-          <a:noFill/>
-          <a:ln/>
-        </p:spPr>
-        <p:txBody>
-          <a:bodyPr wrap="square" rtlCol="0" anchor="ctr"/>
-          <a:lstStyle/>
-          <a:p>
-            <a:pPr>
-              <a:spcAft>
-                <a:spcPts val="400"/>
-              </a:spcAft>
-              <a:buSzPct val="100000"/>
-            </a:pPr>
-            <a:r>
-              <a:rPr lang="it-IT" sz="1400" b="1" dirty="0"/>
-              <a:t>Generator network</a:t>
-            </a:r>
-            <a:r>
-              <a:rPr lang="it-IT" sz="1400" dirty="0"/>
-              <a:t> for image </a:t>
-            </a:r>
-            <a:r>
-              <a:rPr lang="it-IT" sz="1400" dirty="0" err="1"/>
-              <a:t>synthesis</a:t>
-            </a:r>
-            <a:r>
-              <a:rPr lang="it-IT" sz="1400" dirty="0"/>
-              <a:t>. A </a:t>
-            </a:r>
-            <a:r>
-              <a:rPr lang="it-IT" sz="1400" dirty="0" err="1"/>
-              <a:t>latent</a:t>
-            </a:r>
-            <a:r>
-              <a:rPr lang="it-IT" sz="1400" dirty="0"/>
-              <a:t> </a:t>
-            </a:r>
-            <a:r>
-              <a:rPr lang="it-IT" sz="1400" dirty="0" err="1"/>
-              <a:t>vector</a:t>
-            </a:r>
-            <a:r>
-              <a:rPr lang="it-IT" sz="1400" dirty="0"/>
-              <a:t> </a:t>
-            </a:r>
-            <a:r>
-              <a:rPr lang="it-IT" sz="1400" dirty="0" err="1"/>
-              <a:t>is</a:t>
-            </a:r>
-            <a:r>
-              <a:rPr lang="it-IT" sz="1400" dirty="0"/>
-              <a:t> first </a:t>
-            </a:r>
-            <a:r>
-              <a:rPr lang="it-IT" sz="1400" dirty="0" err="1"/>
-              <a:t>projected</a:t>
-            </a:r>
-            <a:r>
-              <a:rPr lang="it-IT" sz="1400" dirty="0"/>
-              <a:t> </a:t>
-            </a:r>
-            <a:r>
-              <a:rPr lang="it-IT" sz="1400" dirty="0" err="1"/>
-              <a:t>through</a:t>
-            </a:r>
-            <a:r>
-              <a:rPr lang="it-IT" sz="1400" dirty="0"/>
-              <a:t> a </a:t>
-            </a:r>
-            <a:r>
-              <a:rPr lang="it-IT" sz="1400" dirty="0" err="1"/>
-              <a:t>fully</a:t>
-            </a:r>
-            <a:r>
-              <a:rPr lang="it-IT" sz="1400" dirty="0"/>
-              <a:t> </a:t>
-            </a:r>
-            <a:r>
-              <a:rPr lang="it-IT" sz="1400" dirty="0" err="1"/>
-              <a:t>connected</a:t>
-            </a:r>
-            <a:r>
-              <a:rPr lang="it-IT" sz="1400" dirty="0"/>
-              <a:t> </a:t>
-            </a:r>
-            <a:r>
-              <a:rPr lang="it-IT" sz="1400" dirty="0" err="1"/>
-              <a:t>layer</a:t>
-            </a:r>
-            <a:r>
-              <a:rPr lang="it-IT" sz="1400" dirty="0"/>
-              <a:t> and </a:t>
-            </a:r>
-            <a:r>
-              <a:rPr lang="it-IT" sz="1400" dirty="0" err="1"/>
-              <a:t>reshaped</a:t>
-            </a:r>
-            <a:r>
-              <a:rPr lang="it-IT" sz="1400" dirty="0"/>
-              <a:t> </a:t>
-            </a:r>
-            <a:r>
-              <a:rPr lang="it-IT" sz="1400" dirty="0" err="1"/>
-              <a:t>into</a:t>
-            </a:r>
-            <a:r>
-              <a:rPr lang="it-IT" sz="1400" dirty="0"/>
-              <a:t> a low-</a:t>
-            </a:r>
-            <a:r>
-              <a:rPr lang="it-IT" sz="1400" dirty="0" err="1"/>
-              <a:t>resolution</a:t>
-            </a:r>
-            <a:r>
-              <a:rPr lang="it-IT" sz="1400" dirty="0"/>
-              <a:t> feature </a:t>
-            </a:r>
-            <a:r>
-              <a:rPr lang="it-IT" sz="1400" dirty="0" err="1"/>
-              <a:t>map</a:t>
-            </a:r>
-            <a:r>
-              <a:rPr lang="it-IT" sz="1400" dirty="0"/>
-              <a:t>. A </a:t>
-            </a:r>
-            <a:r>
-              <a:rPr lang="it-IT" sz="1400" dirty="0" err="1"/>
-              <a:t>sequence</a:t>
-            </a:r>
-            <a:r>
-              <a:rPr lang="it-IT" sz="1400" dirty="0"/>
-              <a:t> of </a:t>
-            </a:r>
-            <a:r>
-              <a:rPr lang="it-IT" sz="1400" b="1" dirty="0" err="1"/>
-              <a:t>Residual</a:t>
-            </a:r>
-            <a:r>
-              <a:rPr lang="it-IT" sz="1400" b="1" dirty="0"/>
-              <a:t> </a:t>
-            </a:r>
-            <a:r>
-              <a:rPr lang="it-IT" sz="1400" b="1" dirty="0" err="1"/>
-              <a:t>Blocks</a:t>
-            </a:r>
-            <a:r>
-              <a:rPr lang="it-IT" sz="1400" dirty="0"/>
-              <a:t> </a:t>
-            </a:r>
-            <a:r>
-              <a:rPr lang="it-IT" sz="1400" dirty="0" err="1"/>
-              <a:t>progressively</a:t>
-            </a:r>
-            <a:r>
-              <a:rPr lang="it-IT" sz="1400" dirty="0"/>
-              <a:t> </a:t>
-            </a:r>
-            <a:r>
-              <a:rPr lang="it-IT" sz="1400" dirty="0" err="1"/>
-              <a:t>refines</a:t>
-            </a:r>
-            <a:r>
-              <a:rPr lang="it-IT" sz="1400" dirty="0"/>
-              <a:t> the features </a:t>
-            </a:r>
-            <a:r>
-              <a:rPr lang="it-IT" sz="1400" dirty="0" err="1"/>
-              <a:t>while</a:t>
-            </a:r>
-            <a:r>
-              <a:rPr lang="it-IT" sz="1400" dirty="0"/>
-              <a:t> </a:t>
-            </a:r>
-            <a:r>
-              <a:rPr lang="it-IT" sz="1400" dirty="0" err="1"/>
-              <a:t>reducing</a:t>
-            </a:r>
-            <a:r>
-              <a:rPr lang="it-IT" sz="1400" dirty="0"/>
-              <a:t> the </a:t>
-            </a:r>
-            <a:r>
-              <a:rPr lang="it-IT" sz="1400" dirty="0" err="1"/>
-              <a:t>number</a:t>
-            </a:r>
-            <a:r>
-              <a:rPr lang="it-IT" sz="1400" dirty="0"/>
-              <a:t> of </a:t>
-            </a:r>
-            <a:r>
-              <a:rPr lang="it-IT" sz="1400" dirty="0" err="1"/>
-              <a:t>channels</a:t>
-            </a:r>
-            <a:r>
-              <a:rPr lang="it-IT" sz="1400" dirty="0"/>
-              <a:t>. </a:t>
-            </a:r>
-            <a:r>
-              <a:rPr lang="it-IT" sz="1400" dirty="0" err="1"/>
-              <a:t>Finally</a:t>
-            </a:r>
-            <a:r>
-              <a:rPr lang="it-IT" sz="1400" dirty="0"/>
-              <a:t>, </a:t>
-            </a:r>
-            <a:r>
-              <a:rPr lang="it-IT" sz="1400" dirty="0" err="1"/>
-              <a:t>normalization</a:t>
-            </a:r>
-            <a:r>
-              <a:rPr lang="it-IT" sz="1400" dirty="0"/>
-              <a:t>, </a:t>
-            </a:r>
-            <a:r>
-              <a:rPr lang="it-IT" sz="1400" dirty="0" err="1"/>
-              <a:t>activation</a:t>
-            </a:r>
-            <a:r>
-              <a:rPr lang="it-IT" sz="1400" dirty="0"/>
-              <a:t>, and a </a:t>
-            </a:r>
-            <a:r>
-              <a:rPr lang="it-IT" sz="1400" b="1" dirty="0"/>
-              <a:t>1×1 </a:t>
-            </a:r>
-            <a:r>
-              <a:rPr lang="it-IT" sz="1400" b="1" dirty="0" err="1"/>
-              <a:t>convolution</a:t>
-            </a:r>
-            <a:r>
-              <a:rPr lang="it-IT" sz="1400" dirty="0"/>
-              <a:t> generate the output image, with a </a:t>
-            </a:r>
-            <a:r>
-              <a:rPr lang="it-IT" sz="1400" b="1" dirty="0" err="1"/>
-              <a:t>Sigmoid</a:t>
-            </a:r>
-            <a:r>
-              <a:rPr lang="it-IT" sz="1400" dirty="0"/>
-              <a:t> </a:t>
-            </a:r>
-            <a:r>
-              <a:rPr lang="it-IT" sz="1400" dirty="0" err="1"/>
-              <a:t>activation</a:t>
-            </a:r>
-            <a:r>
-              <a:rPr lang="it-IT" sz="1400" dirty="0"/>
-              <a:t> </a:t>
-            </a:r>
-            <a:r>
-              <a:rPr lang="it-IT" sz="1400" dirty="0" err="1"/>
-              <a:t>constraining</a:t>
-            </a:r>
-            <a:r>
-              <a:rPr lang="it-IT" sz="1400" dirty="0"/>
-              <a:t> the pixel </a:t>
-            </a:r>
-            <a:r>
-              <a:rPr lang="it-IT" sz="1400" dirty="0" err="1"/>
-              <a:t>values</a:t>
-            </a:r>
-            <a:r>
-              <a:rPr lang="it-IT" sz="1400" dirty="0"/>
-              <a:t> to the [0,1] range.</a:t>
-            </a:r>
-            <a:endParaRPr lang="en-US" sz="1250" dirty="0"/>
-          </a:p>
-        </p:txBody>
-      </p:sp>
-    </p:spTree>
-    <p:extLst>
-      <p:ext uri="{BB962C8B-B14F-4D97-AF65-F5344CB8AC3E}">
-        <p14:creationId xmlns:p14="http://schemas.microsoft.com/office/powerpoint/2010/main" val="2749810787"/>
-      </p:ext>
-    </p:extLst>
-  </p:cSld>
-  <p:clrMapOvr>
-    <a:masterClrMapping/>
-  </p:clrMapOvr>
-</p:sld>
-</file>
-
-<file path=ppt/slides/slide7.xml><?xml version="1.0" encoding="utf-8"?>
 <p:sld xmlns:a="http://schemas.openxmlformats.org/drawingml/2006/main" xmlns:r="http://schemas.openxmlformats.org/officeDocument/2006/relationships" xmlns:p="http://schemas.openxmlformats.org/presentationml/2006/main">
   <p:cSld name="Slide 5">
     <p:bg>
@@ -22886,7 +21361,550 @@
 </p:sld>
 </file>
 
-<file path=ppt/slides/slide8.xml><?xml version="1.0" encoding="utf-8"?>
+<file path=ppt/slides/slide6.xml><?xml version="1.0" encoding="utf-8"?>
+<p:sld xmlns:a="http://schemas.openxmlformats.org/drawingml/2006/main" xmlns:r="http://schemas.openxmlformats.org/officeDocument/2006/relationships" xmlns:p="http://schemas.openxmlformats.org/presentationml/2006/main">
+  <p:cSld>
+    <p:bg>
+      <p:bgPr>
+        <a:solidFill>
+          <a:srgbClr val="FFFFFF"/>
+        </a:solidFill>
+        <a:effectLst/>
+      </p:bgPr>
+    </p:bg>
+    <p:spTree>
+      <p:nvGrpSpPr>
+        <p:cNvPr id="1" name="">
+          <a:extLst>
+            <a:ext uri="{FF2B5EF4-FFF2-40B4-BE49-F238E27FC236}">
+              <a16:creationId xmlns:a16="http://schemas.microsoft.com/office/drawing/2014/main" id="{CBE9453D-EA3A-63B9-DF08-6D235AA951EC}"/>
+            </a:ext>
+          </a:extLst>
+        </p:cNvPr>
+        <p:cNvGrpSpPr/>
+        <p:nvPr/>
+      </p:nvGrpSpPr>
+      <p:grpSpPr>
+        <a:xfrm>
+          <a:off x="0" y="0"/>
+          <a:ext cx="0" cy="0"/>
+          <a:chOff x="0" y="0"/>
+          <a:chExt cx="0" cy="0"/>
+        </a:xfrm>
+      </p:grpSpPr>
+      <p:sp>
+        <p:nvSpPr>
+          <p:cNvPr id="2" name="Text 0">
+            <a:extLst>
+              <a:ext uri="{FF2B5EF4-FFF2-40B4-BE49-F238E27FC236}">
+                <a16:creationId xmlns:a16="http://schemas.microsoft.com/office/drawing/2014/main" id="{AD7A83FE-6564-7336-F6DE-6D6FDE63F109}"/>
+              </a:ext>
+            </a:extLst>
+          </p:cNvPr>
+          <p:cNvSpPr/>
+          <p:nvPr/>
+        </p:nvSpPr>
+        <p:spPr>
+          <a:xfrm>
+            <a:off x="548640" y="365760"/>
+            <a:ext cx="11091672" cy="731520"/>
+          </a:xfrm>
+          <a:prstGeom prst="rect">
+            <a:avLst/>
+          </a:prstGeom>
+          <a:noFill/>
+          <a:ln/>
+        </p:spPr>
+        <p:txBody>
+          <a:bodyPr wrap="square" lIns="0" tIns="0" rIns="0" bIns="0" rtlCol="0" anchor="ctr"/>
+          <a:lstStyle/>
+          <a:p>
+            <a:pPr marL="0" indent="0">
+              <a:buNone/>
+            </a:pPr>
+            <a:r>
+              <a:rPr lang="en-US" sz="3000" b="1" dirty="0">
+                <a:solidFill>
+                  <a:srgbClr val="0B2545"/>
+                </a:solidFill>
+                <a:latin typeface="Cambria" pitchFamily="34" charset="0"/>
+                <a:ea typeface="Cambria" pitchFamily="34" charset="-122"/>
+                <a:cs typeface="Cambria" pitchFamily="34" charset="-120"/>
+              </a:rPr>
+              <a:t>Implementation End-to-End (</a:t>
+            </a:r>
+            <a:r>
+              <a:rPr lang="en-US" sz="3000" b="1" dirty="0" err="1">
+                <a:solidFill>
+                  <a:srgbClr val="0B2545"/>
+                </a:solidFill>
+                <a:latin typeface="Cambria" pitchFamily="34" charset="0"/>
+                <a:ea typeface="Cambria" pitchFamily="34" charset="-122"/>
+                <a:cs typeface="Cambria" pitchFamily="34" charset="-120"/>
+              </a:rPr>
+              <a:t>UNet</a:t>
+            </a:r>
+            <a:r>
+              <a:rPr lang="en-US" sz="3000" b="1" dirty="0">
+                <a:solidFill>
+                  <a:srgbClr val="0B2545"/>
+                </a:solidFill>
+                <a:latin typeface="Cambria" pitchFamily="34" charset="0"/>
+                <a:ea typeface="Cambria" pitchFamily="34" charset="-122"/>
+                <a:cs typeface="Cambria" pitchFamily="34" charset="-120"/>
+              </a:rPr>
+              <a:t>)</a:t>
+            </a:r>
+            <a:endParaRPr lang="en-US" sz="3000" dirty="0"/>
+          </a:p>
+        </p:txBody>
+      </p:sp>
+      <p:sp>
+        <p:nvSpPr>
+          <p:cNvPr id="7" name="Shape 5">
+            <a:extLst>
+              <a:ext uri="{FF2B5EF4-FFF2-40B4-BE49-F238E27FC236}">
+                <a16:creationId xmlns:a16="http://schemas.microsoft.com/office/drawing/2014/main" id="{444CB0C0-9D53-682B-12F4-A147C4E071B2}"/>
+              </a:ext>
+            </a:extLst>
+          </p:cNvPr>
+          <p:cNvSpPr/>
+          <p:nvPr/>
+        </p:nvSpPr>
+        <p:spPr>
+          <a:xfrm>
+            <a:off x="7847044" y="2080727"/>
+            <a:ext cx="3765835" cy="2519266"/>
+          </a:xfrm>
+          <a:prstGeom prst="roundRect">
+            <a:avLst>
+              <a:gd name="adj" fmla="val 2449"/>
+            </a:avLst>
+          </a:prstGeom>
+          <a:solidFill>
+            <a:srgbClr val="E8F1F2"/>
+          </a:solidFill>
+          <a:ln/>
+          <a:effectLst>
+            <a:outerShdw blurRad="101600" dist="38100" dir="2700000" algn="bl" rotWithShape="0">
+              <a:srgbClr val="000000">
+                <a:alpha val="12000"/>
+              </a:srgbClr>
+            </a:outerShdw>
+          </a:effectLst>
+        </p:spPr>
+        <p:txBody>
+          <a:bodyPr/>
+          <a:lstStyle/>
+          <a:p>
+            <a:endParaRPr lang="it-IT" dirty="0"/>
+          </a:p>
+        </p:txBody>
+      </p:sp>
+      <p:sp>
+        <p:nvSpPr>
+          <p:cNvPr id="12" name="Text 10">
+            <a:extLst>
+              <a:ext uri="{FF2B5EF4-FFF2-40B4-BE49-F238E27FC236}">
+                <a16:creationId xmlns:a16="http://schemas.microsoft.com/office/drawing/2014/main" id="{979B2548-DAA5-B591-50C5-1B2477044CB1}"/>
+              </a:ext>
+            </a:extLst>
+          </p:cNvPr>
+          <p:cNvSpPr/>
+          <p:nvPr/>
+        </p:nvSpPr>
+        <p:spPr>
+          <a:xfrm>
+            <a:off x="457200" y="6446520"/>
+            <a:ext cx="7315200" cy="274320"/>
+          </a:xfrm>
+          <a:prstGeom prst="rect">
+            <a:avLst/>
+          </a:prstGeom>
+          <a:noFill/>
+          <a:ln/>
+        </p:spPr>
+        <p:txBody>
+          <a:bodyPr wrap="square" rtlCol="0" anchor="ctr"/>
+          <a:lstStyle/>
+          <a:p>
+            <a:pPr marL="0" indent="0">
+              <a:buNone/>
+            </a:pPr>
+            <a:r>
+              <a:rPr lang="en-US" sz="900" dirty="0">
+                <a:solidFill>
+                  <a:srgbClr val="5C7285"/>
+                </a:solidFill>
+                <a:latin typeface="Calibri" pitchFamily="34" charset="0"/>
+                <a:ea typeface="Calibri" pitchFamily="34" charset="-122"/>
+                <a:cs typeface="Calibri" pitchFamily="34" charset="-120"/>
+              </a:rPr>
+              <a:t>Group H  |  Computational Imaging 2025-26</a:t>
+            </a:r>
+            <a:endParaRPr lang="en-US" sz="900" dirty="0"/>
+          </a:p>
+        </p:txBody>
+      </p:sp>
+      <p:sp>
+        <p:nvSpPr>
+          <p:cNvPr id="13" name="Text 11">
+            <a:extLst>
+              <a:ext uri="{FF2B5EF4-FFF2-40B4-BE49-F238E27FC236}">
+                <a16:creationId xmlns:a16="http://schemas.microsoft.com/office/drawing/2014/main" id="{1CF8C4B5-C65A-96D3-C690-899559ADCDCE}"/>
+              </a:ext>
+            </a:extLst>
+          </p:cNvPr>
+          <p:cNvSpPr/>
+          <p:nvPr/>
+        </p:nvSpPr>
+        <p:spPr>
+          <a:xfrm>
+            <a:off x="11274552" y="6446520"/>
+            <a:ext cx="457200" cy="274320"/>
+          </a:xfrm>
+          <a:prstGeom prst="rect">
+            <a:avLst/>
+          </a:prstGeom>
+          <a:noFill/>
+          <a:ln/>
+        </p:spPr>
+        <p:txBody>
+          <a:bodyPr wrap="square" rtlCol="0" anchor="ctr"/>
+          <a:lstStyle/>
+          <a:p>
+            <a:pPr marL="0" indent="0" algn="r">
+              <a:buNone/>
+            </a:pPr>
+            <a:r>
+              <a:rPr lang="en-US" sz="900" dirty="0">
+                <a:solidFill>
+                  <a:srgbClr val="5C7285"/>
+                </a:solidFill>
+                <a:latin typeface="Calibri" pitchFamily="34" charset="0"/>
+                <a:ea typeface="Calibri" pitchFamily="34" charset="-122"/>
+                <a:cs typeface="Calibri" pitchFamily="34" charset="-120"/>
+              </a:rPr>
+              <a:t>4</a:t>
+            </a:r>
+            <a:endParaRPr lang="en-US" sz="900" dirty="0"/>
+          </a:p>
+        </p:txBody>
+      </p:sp>
+      <p:sp>
+        <p:nvSpPr>
+          <p:cNvPr id="15" name="object 9">
+            <a:extLst>
+              <a:ext uri="{FF2B5EF4-FFF2-40B4-BE49-F238E27FC236}">
+                <a16:creationId xmlns:a16="http://schemas.microsoft.com/office/drawing/2014/main" id="{B4945181-9977-C021-AAFF-457F43964A94}"/>
+              </a:ext>
+            </a:extLst>
+          </p:cNvPr>
+          <p:cNvSpPr/>
+          <p:nvPr/>
+        </p:nvSpPr>
+        <p:spPr>
+          <a:xfrm>
+            <a:off x="10790026" y="0"/>
+            <a:ext cx="1391920" cy="936104"/>
+          </a:xfrm>
+          <a:prstGeom prst="rect">
+            <a:avLst/>
+          </a:prstGeom>
+          <a:blipFill>
+            <a:blip r:embed="rId3" cstate="print"/>
+            <a:stretch>
+              <a:fillRect/>
+            </a:stretch>
+          </a:blipFill>
+        </p:spPr>
+        <p:txBody>
+          <a:bodyPr wrap="square" lIns="0" tIns="0" rIns="0" bIns="0" rtlCol="0">
+            <a:noAutofit/>
+          </a:bodyPr>
+          <a:lstStyle/>
+          <a:p>
+            <a:endParaRPr/>
+          </a:p>
+        </p:txBody>
+      </p:sp>
+      <p:pic>
+        <p:nvPicPr>
+          <p:cNvPr id="16" name="Immagine 15">
+            <a:extLst>
+              <a:ext uri="{FF2B5EF4-FFF2-40B4-BE49-F238E27FC236}">
+                <a16:creationId xmlns:a16="http://schemas.microsoft.com/office/drawing/2014/main" id="{F97051B9-9DC9-8CFB-21D6-BA6956095D97}"/>
+              </a:ext>
+            </a:extLst>
+          </p:cNvPr>
+          <p:cNvPicPr>
+            <a:picLocks noChangeAspect="1"/>
+          </p:cNvPicPr>
+          <p:nvPr/>
+        </p:nvPicPr>
+        <p:blipFill>
+          <a:blip r:embed="rId4"/>
+          <a:stretch>
+            <a:fillRect/>
+          </a:stretch>
+        </p:blipFill>
+        <p:spPr>
+          <a:xfrm>
+            <a:off x="548640" y="1573085"/>
+            <a:ext cx="6835081" cy="3711829"/>
+          </a:xfrm>
+          <a:prstGeom prst="rect">
+            <a:avLst/>
+          </a:prstGeom>
+        </p:spPr>
+      </p:pic>
+      <p:sp>
+        <p:nvSpPr>
+          <p:cNvPr id="18" name="Text 7">
+            <a:extLst>
+              <a:ext uri="{FF2B5EF4-FFF2-40B4-BE49-F238E27FC236}">
+                <a16:creationId xmlns:a16="http://schemas.microsoft.com/office/drawing/2014/main" id="{F25FE3E0-915E-0631-47AD-BE5A70B7F6FB}"/>
+              </a:ext>
+            </a:extLst>
+          </p:cNvPr>
+          <p:cNvSpPr/>
+          <p:nvPr/>
+        </p:nvSpPr>
+        <p:spPr>
+          <a:xfrm>
+            <a:off x="8144132" y="1874520"/>
+            <a:ext cx="3359020" cy="2948473"/>
+          </a:xfrm>
+          <a:prstGeom prst="rect">
+            <a:avLst/>
+          </a:prstGeom>
+          <a:noFill/>
+          <a:ln/>
+        </p:spPr>
+        <p:txBody>
+          <a:bodyPr wrap="square" rtlCol="0" anchor="ctr"/>
+          <a:lstStyle/>
+          <a:p>
+            <a:pPr>
+              <a:spcAft>
+                <a:spcPts val="400"/>
+              </a:spcAft>
+              <a:buSzPct val="100000"/>
+            </a:pPr>
+            <a:r>
+              <a:rPr lang="it-IT" sz="1400" b="1" dirty="0"/>
+              <a:t>U-Net </a:t>
+            </a:r>
+            <a:r>
+              <a:rPr lang="it-IT" sz="1400" b="1" dirty="0" err="1"/>
+              <a:t>architecture</a:t>
+            </a:r>
+            <a:r>
+              <a:rPr lang="it-IT" sz="1400" b="1" dirty="0"/>
+              <a:t> with </a:t>
+            </a:r>
+            <a:r>
+              <a:rPr lang="it-IT" sz="1400" b="1" dirty="0" err="1"/>
+              <a:t>Attention</a:t>
+            </a:r>
+            <a:r>
+              <a:rPr lang="it-IT" sz="1400" b="1" dirty="0"/>
+              <a:t> Gates </a:t>
+            </a:r>
+            <a:r>
+              <a:rPr lang="it-IT" sz="1400" dirty="0"/>
+              <a:t>for image </a:t>
+            </a:r>
+            <a:r>
+              <a:rPr lang="it-IT" sz="1400" dirty="0" err="1"/>
+              <a:t>reconstruction</a:t>
+            </a:r>
+            <a:r>
+              <a:rPr lang="it-IT" sz="1400" dirty="0"/>
+              <a:t>. The encoder </a:t>
+            </a:r>
+            <a:r>
+              <a:rPr lang="it-IT" sz="1400" dirty="0" err="1"/>
+              <a:t>extracts</a:t>
+            </a:r>
+            <a:r>
+              <a:rPr lang="it-IT" sz="1400" dirty="0"/>
+              <a:t> multi-scale features, </a:t>
+            </a:r>
+            <a:r>
+              <a:rPr lang="it-IT" sz="1400" dirty="0" err="1"/>
+              <a:t>while</a:t>
+            </a:r>
+            <a:r>
+              <a:rPr lang="it-IT" sz="1400" dirty="0"/>
+              <a:t> the decoder </a:t>
+            </a:r>
+            <a:r>
+              <a:rPr lang="it-IT" sz="1400" dirty="0" err="1"/>
+              <a:t>reconstructs</a:t>
+            </a:r>
+            <a:r>
+              <a:rPr lang="it-IT" sz="1400" dirty="0"/>
+              <a:t> the image </a:t>
+            </a:r>
+            <a:r>
+              <a:rPr lang="it-IT" sz="1400" dirty="0" err="1"/>
+              <a:t>using</a:t>
+            </a:r>
+            <a:r>
+              <a:rPr lang="it-IT" sz="1400" dirty="0"/>
+              <a:t> skip connections and </a:t>
+            </a:r>
+            <a:r>
+              <a:rPr lang="it-IT" sz="1400" dirty="0" err="1"/>
+              <a:t>attention</a:t>
+            </a:r>
+            <a:r>
+              <a:rPr lang="it-IT" sz="1400" dirty="0"/>
+              <a:t> </a:t>
+            </a:r>
+            <a:r>
+              <a:rPr lang="it-IT" sz="1400" dirty="0" err="1"/>
+              <a:t>mechanisms</a:t>
+            </a:r>
+            <a:r>
+              <a:rPr lang="it-IT" sz="1400" dirty="0"/>
+              <a:t> to </a:t>
+            </a:r>
+            <a:r>
+              <a:rPr lang="it-IT" sz="1400" dirty="0" err="1"/>
+              <a:t>preserve</a:t>
+            </a:r>
+            <a:r>
+              <a:rPr lang="it-IT" sz="1400" dirty="0"/>
+              <a:t> the </a:t>
+            </a:r>
+            <a:r>
+              <a:rPr lang="it-IT" sz="1400" dirty="0" err="1"/>
+              <a:t>most</a:t>
+            </a:r>
+            <a:r>
+              <a:rPr lang="it-IT" sz="1400" dirty="0"/>
+              <a:t> </a:t>
+            </a:r>
+            <a:r>
+              <a:rPr lang="it-IT" sz="1400" dirty="0" err="1"/>
+              <a:t>relevant</a:t>
+            </a:r>
+            <a:r>
+              <a:rPr lang="it-IT" sz="1400" dirty="0"/>
+              <a:t> </a:t>
+            </a:r>
+            <a:r>
+              <a:rPr lang="it-IT" sz="1400" dirty="0" err="1"/>
+              <a:t>details</a:t>
+            </a:r>
+            <a:r>
+              <a:rPr lang="it-IT" sz="1400" dirty="0"/>
+              <a:t>. The network </a:t>
+            </a:r>
+            <a:r>
+              <a:rPr lang="it-IT" sz="1400" dirty="0" err="1"/>
+              <a:t>estimates</a:t>
+            </a:r>
+            <a:r>
+              <a:rPr lang="it-IT" sz="1400" dirty="0"/>
+              <a:t> the </a:t>
+            </a:r>
+            <a:r>
+              <a:rPr lang="it-IT" sz="1400" dirty="0" err="1"/>
+              <a:t>noise</a:t>
+            </a:r>
+            <a:r>
+              <a:rPr lang="it-IT" sz="1400" dirty="0"/>
+              <a:t> </a:t>
+            </a:r>
+            <a:r>
+              <a:rPr lang="it-IT" sz="1400" dirty="0" err="1"/>
+              <a:t>present</a:t>
+            </a:r>
+            <a:r>
+              <a:rPr lang="it-IT" sz="1400" dirty="0"/>
+              <a:t> in the input image, </a:t>
+            </a:r>
+            <a:r>
+              <a:rPr lang="it-IT" sz="1400" dirty="0" err="1"/>
+              <a:t>which</a:t>
+            </a:r>
+            <a:r>
+              <a:rPr lang="it-IT" sz="1400" dirty="0"/>
+              <a:t> </a:t>
+            </a:r>
+            <a:r>
+              <a:rPr lang="it-IT" sz="1400" dirty="0" err="1"/>
+              <a:t>is</a:t>
+            </a:r>
+            <a:r>
+              <a:rPr lang="it-IT" sz="1400" dirty="0"/>
+              <a:t> </a:t>
+            </a:r>
+            <a:r>
+              <a:rPr lang="it-IT" sz="1400" dirty="0" err="1"/>
+              <a:t>then</a:t>
+            </a:r>
+            <a:r>
+              <a:rPr lang="it-IT" sz="1400" dirty="0"/>
+              <a:t> </a:t>
+            </a:r>
+            <a:r>
+              <a:rPr lang="it-IT" sz="1400" dirty="0" err="1"/>
+              <a:t>subtracted</a:t>
+            </a:r>
+            <a:r>
+              <a:rPr lang="it-IT" sz="1400" dirty="0"/>
+              <a:t> from the input </a:t>
+            </a:r>
+            <a:r>
+              <a:rPr lang="it-IT" sz="1400" dirty="0" err="1"/>
+              <a:t>using</a:t>
+            </a:r>
+            <a:r>
+              <a:rPr lang="it-IT" sz="1400" dirty="0"/>
+              <a:t> a </a:t>
+            </a:r>
+            <a:r>
+              <a:rPr lang="it-IT" sz="1400" b="1" dirty="0" err="1"/>
+              <a:t>residual</a:t>
+            </a:r>
+            <a:r>
+              <a:rPr lang="it-IT" sz="1400" b="1" dirty="0"/>
+              <a:t> learning</a:t>
+            </a:r>
+            <a:r>
+              <a:rPr lang="it-IT" sz="1400" dirty="0"/>
+              <a:t> </a:t>
+            </a:r>
+            <a:r>
+              <a:rPr lang="it-IT" sz="1400" dirty="0" err="1"/>
+              <a:t>approach</a:t>
+            </a:r>
+            <a:r>
+              <a:rPr lang="it-IT" sz="1400" dirty="0"/>
+              <a:t>.</a:t>
+            </a:r>
+            <a:endParaRPr lang="en-US" sz="1250" dirty="0"/>
+          </a:p>
+        </p:txBody>
+      </p:sp>
+    </p:spTree>
+    <p:extLst>
+      <p:ext uri="{BB962C8B-B14F-4D97-AF65-F5344CB8AC3E}">
+        <p14:creationId xmlns:p14="http://schemas.microsoft.com/office/powerpoint/2010/main" val="3414510366"/>
+      </p:ext>
+    </p:extLst>
+  </p:cSld>
+  <p:clrMapOvr>
+    <a:masterClrMapping/>
+  </p:clrMapOvr>
+</p:sld>
+</file>
+
+<file path=ppt/slides/slide7.xml><?xml version="1.0" encoding="utf-8"?>
 <p:sld xmlns:a="http://schemas.openxmlformats.org/drawingml/2006/main" xmlns:r="http://schemas.openxmlformats.org/officeDocument/2006/relationships" xmlns:p="http://schemas.openxmlformats.org/presentationml/2006/main">
   <p:cSld name="Slide 10">
     <p:bg>
@@ -24714,7 +23732,7 @@
 </p:sld>
 </file>
 
-<file path=ppt/slides/slide9.xml><?xml version="1.0" encoding="utf-8"?>
+<file path=ppt/slides/slide8.xml><?xml version="1.0" encoding="utf-8"?>
 <p:sld xmlns:a="http://schemas.openxmlformats.org/drawingml/2006/main" xmlns:r="http://schemas.openxmlformats.org/officeDocument/2006/relationships" xmlns:p="http://schemas.openxmlformats.org/presentationml/2006/main">
   <p:cSld name="Slide 11">
     <p:bg>
@@ -25347,6 +24365,678 @@
             <a:extLst>
               <a:ext uri="{FF2B5EF4-FFF2-40B4-BE49-F238E27FC236}">
                 <a16:creationId xmlns:a16="http://schemas.microsoft.com/office/drawing/2014/main" id="{52A16BE9-BBD3-25B1-8184-691542417FDE}"/>
+              </a:ext>
+            </a:extLst>
+          </p:cNvPr>
+          <p:cNvSpPr/>
+          <p:nvPr/>
+        </p:nvSpPr>
+        <p:spPr>
+          <a:xfrm>
+            <a:off x="10790026" y="0"/>
+            <a:ext cx="1391920" cy="936104"/>
+          </a:xfrm>
+          <a:prstGeom prst="rect">
+            <a:avLst/>
+          </a:prstGeom>
+          <a:blipFill>
+            <a:blip r:embed="rId6" cstate="print"/>
+            <a:stretch>
+              <a:fillRect/>
+            </a:stretch>
+          </a:blipFill>
+        </p:spPr>
+        <p:txBody>
+          <a:bodyPr wrap="square" lIns="0" tIns="0" rIns="0" bIns="0" rtlCol="0">
+            <a:noAutofit/>
+          </a:bodyPr>
+          <a:lstStyle/>
+          <a:p>
+            <a:endParaRPr/>
+          </a:p>
+        </p:txBody>
+      </p:sp>
+    </p:spTree>
+  </p:cSld>
+  <p:clrMapOvr>
+    <a:masterClrMapping/>
+  </p:clrMapOvr>
+</p:sld>
+</file>
+
+<file path=ppt/slides/slide9.xml><?xml version="1.0" encoding="utf-8"?>
+<p:sld xmlns:a="http://schemas.openxmlformats.org/drawingml/2006/main" xmlns:r="http://schemas.openxmlformats.org/officeDocument/2006/relationships" xmlns:p="http://schemas.openxmlformats.org/presentationml/2006/main">
+  <p:cSld name="Slide 12">
+    <p:bg>
+      <p:bgPr>
+        <a:solidFill>
+          <a:srgbClr val="FFFFFF"/>
+        </a:solidFill>
+        <a:effectLst/>
+      </p:bgPr>
+    </p:bg>
+    <p:spTree>
+      <p:nvGrpSpPr>
+        <p:cNvPr id="1" name=""/>
+        <p:cNvGrpSpPr/>
+        <p:nvPr/>
+      </p:nvGrpSpPr>
+      <p:grpSpPr>
+        <a:xfrm>
+          <a:off x="0" y="0"/>
+          <a:ext cx="0" cy="0"/>
+          <a:chOff x="0" y="0"/>
+          <a:chExt cx="0" cy="0"/>
+        </a:xfrm>
+      </p:grpSpPr>
+      <p:sp>
+        <p:nvSpPr>
+          <p:cNvPr id="2" name="Text 0"/>
+          <p:cNvSpPr/>
+          <p:nvPr/>
+        </p:nvSpPr>
+        <p:spPr>
+          <a:xfrm>
+            <a:off x="548640" y="365760"/>
+            <a:ext cx="11091672" cy="731520"/>
+          </a:xfrm>
+          <a:prstGeom prst="rect">
+            <a:avLst/>
+          </a:prstGeom>
+          <a:noFill/>
+          <a:ln/>
+        </p:spPr>
+        <p:txBody>
+          <a:bodyPr wrap="square" lIns="0" tIns="0" rIns="0" bIns="0" rtlCol="0" anchor="ctr"/>
+          <a:lstStyle/>
+          <a:p>
+            <a:pPr marL="0" indent="0">
+              <a:buNone/>
+            </a:pPr>
+            <a:r>
+              <a:rPr lang="en-US" sz="3000" b="1" dirty="0">
+                <a:solidFill>
+                  <a:srgbClr val="0B2545"/>
+                </a:solidFill>
+                <a:latin typeface="Cambria" pitchFamily="34" charset="0"/>
+                <a:ea typeface="Cambria" pitchFamily="34" charset="-122"/>
+                <a:cs typeface="Cambria" pitchFamily="34" charset="-120"/>
+              </a:rPr>
+              <a:t>U-Net — Visual Comparison (Scale ×4)</a:t>
+            </a:r>
+            <a:endParaRPr lang="en-US" sz="3000" dirty="0"/>
+          </a:p>
+        </p:txBody>
+      </p:sp>
+      <p:sp>
+        <p:nvSpPr>
+          <p:cNvPr id="3" name="Text 1"/>
+          <p:cNvSpPr/>
+          <p:nvPr/>
+        </p:nvSpPr>
+        <p:spPr>
+          <a:xfrm>
+            <a:off x="548640" y="1051560"/>
+            <a:ext cx="11064240" cy="320040"/>
+          </a:xfrm>
+          <a:prstGeom prst="rect">
+            <a:avLst/>
+          </a:prstGeom>
+          <a:noFill/>
+          <a:ln/>
+        </p:spPr>
+        <p:txBody>
+          <a:bodyPr wrap="square" rtlCol="0" anchor="ctr"/>
+          <a:lstStyle/>
+          <a:p>
+            <a:pPr marL="0" indent="0">
+              <a:buNone/>
+            </a:pPr>
+            <a:r>
+              <a:rPr lang="en-US" sz="1250" i="1" dirty="0">
+                <a:solidFill>
+                  <a:srgbClr val="5C7285"/>
+                </a:solidFill>
+                <a:latin typeface="Calibri" pitchFamily="34" charset="0"/>
+                <a:ea typeface="Calibri" pitchFamily="34" charset="-122"/>
+                <a:cs typeface="Calibri" pitchFamily="34" charset="-120"/>
+              </a:rPr>
+              <a:t>Single test image (0.png) — Ground truth vs. U-Net reconstruction</a:t>
+            </a:r>
+            <a:endParaRPr lang="en-US" sz="1250" dirty="0"/>
+          </a:p>
+        </p:txBody>
+      </p:sp>
+      <p:sp>
+        <p:nvSpPr>
+          <p:cNvPr id="4" name="Text 2"/>
+          <p:cNvSpPr/>
+          <p:nvPr/>
+        </p:nvSpPr>
+        <p:spPr>
+          <a:xfrm>
+            <a:off x="548640" y="1508760"/>
+            <a:ext cx="5486400" cy="274320"/>
+          </a:xfrm>
+          <a:prstGeom prst="rect">
+            <a:avLst/>
+          </a:prstGeom>
+          <a:noFill/>
+          <a:ln/>
+        </p:spPr>
+        <p:txBody>
+          <a:bodyPr wrap="square" rtlCol="0" anchor="ctr"/>
+          <a:lstStyle/>
+          <a:p>
+            <a:pPr marL="0" indent="0">
+              <a:buNone/>
+            </a:pPr>
+            <a:r>
+              <a:rPr lang="en-US" sz="1350" b="1" dirty="0">
+                <a:solidFill>
+                  <a:srgbClr val="0B2545"/>
+                </a:solidFill>
+                <a:latin typeface="Calibri" pitchFamily="34" charset="0"/>
+                <a:ea typeface="Calibri" pitchFamily="34" charset="-122"/>
+                <a:cs typeface="Calibri" pitchFamily="34" charset="-120"/>
+              </a:rPr>
+              <a:t>Noise level σ = 0.005</a:t>
+            </a:r>
+            <a:endParaRPr lang="en-US" sz="1350" dirty="0"/>
+          </a:p>
+        </p:txBody>
+      </p:sp>
+      <p:pic>
+        <p:nvPicPr>
+          <p:cNvPr id="5" name="Image 0" descr="/home/claude/work/img/0.png"/>
+          <p:cNvPicPr>
+            <a:picLocks noChangeAspect="1"/>
+          </p:cNvPicPr>
+          <p:nvPr/>
+        </p:nvPicPr>
+        <p:blipFill>
+          <a:blip r:embed="rId3"/>
+          <a:stretch>
+            <a:fillRect/>
+          </a:stretch>
+        </p:blipFill>
+        <p:spPr>
+          <a:xfrm>
+            <a:off x="3396996" y="1708034"/>
+            <a:ext cx="2286000" cy="2286000"/>
+          </a:xfrm>
+          <a:prstGeom prst="rect">
+            <a:avLst/>
+          </a:prstGeom>
+        </p:spPr>
+      </p:pic>
+      <p:sp>
+        <p:nvSpPr>
+          <p:cNvPr id="6" name="Shape 3"/>
+          <p:cNvSpPr/>
+          <p:nvPr/>
+        </p:nvSpPr>
+        <p:spPr>
+          <a:xfrm>
+            <a:off x="3396996" y="1708034"/>
+            <a:ext cx="2286000" cy="2286000"/>
+          </a:xfrm>
+          <a:prstGeom prst="rect">
+            <a:avLst/>
+          </a:prstGeom>
+          <a:ln w="9525">
+            <a:solidFill>
+              <a:srgbClr val="D8E2E5"/>
+            </a:solidFill>
+            <a:prstDash val="solid"/>
+          </a:ln>
+        </p:spPr>
+        <p:txBody>
+          <a:bodyPr/>
+          <a:lstStyle/>
+          <a:p>
+            <a:endParaRPr lang="it-IT"/>
+          </a:p>
+        </p:txBody>
+      </p:sp>
+      <p:sp>
+        <p:nvSpPr>
+          <p:cNvPr id="7" name="Text 4"/>
+          <p:cNvSpPr/>
+          <p:nvPr/>
+        </p:nvSpPr>
+        <p:spPr>
+          <a:xfrm>
+            <a:off x="2985516" y="4030610"/>
+            <a:ext cx="3108960" cy="274320"/>
+          </a:xfrm>
+          <a:prstGeom prst="rect">
+            <a:avLst/>
+          </a:prstGeom>
+          <a:noFill/>
+          <a:ln/>
+        </p:spPr>
+        <p:txBody>
+          <a:bodyPr wrap="square" rtlCol="0" anchor="ctr"/>
+          <a:lstStyle/>
+          <a:p>
+            <a:pPr marL="0" indent="0" algn="ctr">
+              <a:buNone/>
+            </a:pPr>
+            <a:r>
+              <a:rPr lang="en-US" sz="1050" dirty="0">
+                <a:solidFill>
+                  <a:srgbClr val="5C7285"/>
+                </a:solidFill>
+                <a:latin typeface="Calibri" pitchFamily="34" charset="0"/>
+                <a:ea typeface="Calibri" pitchFamily="34" charset="-122"/>
+                <a:cs typeface="Calibri" pitchFamily="34" charset="-120"/>
+              </a:rPr>
+              <a:t>512×512 reference</a:t>
+            </a:r>
+            <a:endParaRPr lang="en-US" sz="1050" dirty="0"/>
+          </a:p>
+        </p:txBody>
+      </p:sp>
+      <p:pic>
+        <p:nvPicPr>
+          <p:cNvPr id="8" name="Image 1" descr="/home/claude/work/img2/prediction_UNet_MSE_SSIM_FL_Residual_Attention_PixelShuffle_noise005_scale4.png"/>
+          <p:cNvPicPr>
+            <a:picLocks noChangeAspect="1"/>
+          </p:cNvPicPr>
+          <p:nvPr/>
+        </p:nvPicPr>
+        <p:blipFill>
+          <a:blip r:embed="rId4"/>
+          <a:stretch>
+            <a:fillRect/>
+          </a:stretch>
+        </p:blipFill>
+        <p:spPr>
+          <a:xfrm>
+            <a:off x="6505956" y="1708034"/>
+            <a:ext cx="2286000" cy="2286000"/>
+          </a:xfrm>
+          <a:prstGeom prst="rect">
+            <a:avLst/>
+          </a:prstGeom>
+        </p:spPr>
+      </p:pic>
+      <p:sp>
+        <p:nvSpPr>
+          <p:cNvPr id="9" name="Shape 5"/>
+          <p:cNvSpPr/>
+          <p:nvPr/>
+        </p:nvSpPr>
+        <p:spPr>
+          <a:xfrm>
+            <a:off x="6505956" y="1708034"/>
+            <a:ext cx="2286000" cy="2286000"/>
+          </a:xfrm>
+          <a:prstGeom prst="rect">
+            <a:avLst/>
+          </a:prstGeom>
+          <a:ln w="9525">
+            <a:solidFill>
+              <a:srgbClr val="D8E2E5"/>
+            </a:solidFill>
+            <a:prstDash val="solid"/>
+          </a:ln>
+        </p:spPr>
+        <p:txBody>
+          <a:bodyPr/>
+          <a:lstStyle/>
+          <a:p>
+            <a:endParaRPr lang="it-IT"/>
+          </a:p>
+        </p:txBody>
+      </p:sp>
+      <p:sp>
+        <p:nvSpPr>
+          <p:cNvPr id="10" name="Text 6"/>
+          <p:cNvSpPr/>
+          <p:nvPr/>
+        </p:nvSpPr>
+        <p:spPr>
+          <a:xfrm>
+            <a:off x="6094476" y="4030610"/>
+            <a:ext cx="3108960" cy="274320"/>
+          </a:xfrm>
+          <a:prstGeom prst="rect">
+            <a:avLst/>
+          </a:prstGeom>
+          <a:noFill/>
+          <a:ln/>
+        </p:spPr>
+        <p:txBody>
+          <a:bodyPr wrap="square" rtlCol="0" anchor="ctr"/>
+          <a:lstStyle/>
+          <a:p>
+            <a:pPr marL="0" indent="0" algn="ctr">
+              <a:buNone/>
+            </a:pPr>
+            <a:r>
+              <a:rPr lang="en-US" sz="1050" dirty="0">
+                <a:solidFill>
+                  <a:srgbClr val="5C7285"/>
+                </a:solidFill>
+                <a:latin typeface="Calibri" pitchFamily="34" charset="0"/>
+                <a:ea typeface="Calibri" pitchFamily="34" charset="-122"/>
+                <a:cs typeface="Calibri" pitchFamily="34" charset="-120"/>
+              </a:rPr>
+              <a:t>PSNR 34.25 dB | SSIM 0.9212</a:t>
+            </a:r>
+            <a:endParaRPr lang="en-US" sz="1050" dirty="0"/>
+          </a:p>
+        </p:txBody>
+      </p:sp>
+      <p:sp>
+        <p:nvSpPr>
+          <p:cNvPr id="11" name="Text 7"/>
+          <p:cNvSpPr/>
+          <p:nvPr/>
+        </p:nvSpPr>
+        <p:spPr>
+          <a:xfrm>
+            <a:off x="548640" y="3977640"/>
+            <a:ext cx="5486400" cy="274320"/>
+          </a:xfrm>
+          <a:prstGeom prst="rect">
+            <a:avLst/>
+          </a:prstGeom>
+          <a:noFill/>
+          <a:ln/>
+        </p:spPr>
+        <p:txBody>
+          <a:bodyPr wrap="square" rtlCol="0" anchor="ctr"/>
+          <a:lstStyle/>
+          <a:p>
+            <a:pPr marL="0" indent="0">
+              <a:buNone/>
+            </a:pPr>
+            <a:r>
+              <a:rPr lang="en-US" sz="1350" b="1" dirty="0">
+                <a:solidFill>
+                  <a:srgbClr val="0B2545"/>
+                </a:solidFill>
+                <a:latin typeface="Calibri" pitchFamily="34" charset="0"/>
+                <a:ea typeface="Calibri" pitchFamily="34" charset="-122"/>
+                <a:cs typeface="Calibri" pitchFamily="34" charset="-120"/>
+              </a:rPr>
+              <a:t>Noise level σ = 0.01</a:t>
+            </a:r>
+            <a:endParaRPr lang="en-US" sz="1350" dirty="0"/>
+          </a:p>
+        </p:txBody>
+      </p:sp>
+      <p:pic>
+        <p:nvPicPr>
+          <p:cNvPr id="12" name="Image 2" descr="/home/claude/work/img/0.png"/>
+          <p:cNvPicPr>
+            <a:picLocks noChangeAspect="1"/>
+          </p:cNvPicPr>
+          <p:nvPr/>
+        </p:nvPicPr>
+        <p:blipFill>
+          <a:blip r:embed="rId3"/>
+          <a:stretch>
+            <a:fillRect/>
+          </a:stretch>
+        </p:blipFill>
+        <p:spPr>
+          <a:xfrm>
+            <a:off x="3396996" y="4297680"/>
+            <a:ext cx="2286000" cy="2286000"/>
+          </a:xfrm>
+          <a:prstGeom prst="rect">
+            <a:avLst/>
+          </a:prstGeom>
+        </p:spPr>
+      </p:pic>
+      <p:sp>
+        <p:nvSpPr>
+          <p:cNvPr id="13" name="Shape 8"/>
+          <p:cNvSpPr/>
+          <p:nvPr/>
+        </p:nvSpPr>
+        <p:spPr>
+          <a:xfrm>
+            <a:off x="3396996" y="4297680"/>
+            <a:ext cx="2286000" cy="2286000"/>
+          </a:xfrm>
+          <a:prstGeom prst="rect">
+            <a:avLst/>
+          </a:prstGeom>
+          <a:ln w="9525">
+            <a:solidFill>
+              <a:srgbClr val="D8E2E5"/>
+            </a:solidFill>
+            <a:prstDash val="solid"/>
+          </a:ln>
+        </p:spPr>
+        <p:txBody>
+          <a:bodyPr/>
+          <a:lstStyle/>
+          <a:p>
+            <a:endParaRPr lang="it-IT"/>
+          </a:p>
+        </p:txBody>
+      </p:sp>
+      <p:sp>
+        <p:nvSpPr>
+          <p:cNvPr id="14" name="Text 9"/>
+          <p:cNvSpPr/>
+          <p:nvPr/>
+        </p:nvSpPr>
+        <p:spPr>
+          <a:xfrm>
+            <a:off x="2985516" y="6620256"/>
+            <a:ext cx="3108960" cy="274320"/>
+          </a:xfrm>
+          <a:prstGeom prst="rect">
+            <a:avLst/>
+          </a:prstGeom>
+          <a:noFill/>
+          <a:ln/>
+        </p:spPr>
+        <p:txBody>
+          <a:bodyPr wrap="square" rtlCol="0" anchor="ctr"/>
+          <a:lstStyle/>
+          <a:p>
+            <a:pPr marL="0" indent="0" algn="ctr">
+              <a:buNone/>
+            </a:pPr>
+            <a:r>
+              <a:rPr lang="en-US" sz="1050" dirty="0">
+                <a:solidFill>
+                  <a:srgbClr val="5C7285"/>
+                </a:solidFill>
+                <a:latin typeface="Calibri" pitchFamily="34" charset="0"/>
+                <a:ea typeface="Calibri" pitchFamily="34" charset="-122"/>
+                <a:cs typeface="Calibri" pitchFamily="34" charset="-120"/>
+              </a:rPr>
+              <a:t>512×512 reference</a:t>
+            </a:r>
+            <a:endParaRPr lang="en-US" sz="1050" dirty="0"/>
+          </a:p>
+        </p:txBody>
+      </p:sp>
+      <p:pic>
+        <p:nvPicPr>
+          <p:cNvPr id="15" name="Image 3" descr="/home/claude/work/img2/prediction_UNet_MSE_SSIM_FL_Residual_Attention_PixelShuffle_noise01_scale4.png"/>
+          <p:cNvPicPr>
+            <a:picLocks noChangeAspect="1"/>
+          </p:cNvPicPr>
+          <p:nvPr/>
+        </p:nvPicPr>
+        <p:blipFill>
+          <a:blip r:embed="rId5"/>
+          <a:stretch>
+            <a:fillRect/>
+          </a:stretch>
+        </p:blipFill>
+        <p:spPr>
+          <a:xfrm>
+            <a:off x="6505956" y="4297680"/>
+            <a:ext cx="2286000" cy="2286000"/>
+          </a:xfrm>
+          <a:prstGeom prst="rect">
+            <a:avLst/>
+          </a:prstGeom>
+        </p:spPr>
+      </p:pic>
+      <p:sp>
+        <p:nvSpPr>
+          <p:cNvPr id="16" name="Shape 10"/>
+          <p:cNvSpPr/>
+          <p:nvPr/>
+        </p:nvSpPr>
+        <p:spPr>
+          <a:xfrm>
+            <a:off x="6505956" y="4297680"/>
+            <a:ext cx="2286000" cy="2286000"/>
+          </a:xfrm>
+          <a:prstGeom prst="rect">
+            <a:avLst/>
+          </a:prstGeom>
+          <a:ln w="9525">
+            <a:solidFill>
+              <a:srgbClr val="D8E2E5"/>
+            </a:solidFill>
+            <a:prstDash val="solid"/>
+          </a:ln>
+        </p:spPr>
+        <p:txBody>
+          <a:bodyPr/>
+          <a:lstStyle/>
+          <a:p>
+            <a:endParaRPr lang="it-IT"/>
+          </a:p>
+        </p:txBody>
+      </p:sp>
+      <p:sp>
+        <p:nvSpPr>
+          <p:cNvPr id="17" name="Text 11"/>
+          <p:cNvSpPr/>
+          <p:nvPr/>
+        </p:nvSpPr>
+        <p:spPr>
+          <a:xfrm>
+            <a:off x="6094476" y="6620256"/>
+            <a:ext cx="3108960" cy="274320"/>
+          </a:xfrm>
+          <a:prstGeom prst="rect">
+            <a:avLst/>
+          </a:prstGeom>
+          <a:noFill/>
+          <a:ln/>
+        </p:spPr>
+        <p:txBody>
+          <a:bodyPr wrap="square" rtlCol="0" anchor="ctr"/>
+          <a:lstStyle/>
+          <a:p>
+            <a:pPr marL="0" indent="0" algn="ctr">
+              <a:buNone/>
+            </a:pPr>
+            <a:r>
+              <a:rPr lang="en-US" sz="1050" dirty="0">
+                <a:solidFill>
+                  <a:srgbClr val="5C7285"/>
+                </a:solidFill>
+                <a:latin typeface="Calibri" pitchFamily="34" charset="0"/>
+                <a:ea typeface="Calibri" pitchFamily="34" charset="-122"/>
+                <a:cs typeface="Calibri" pitchFamily="34" charset="-120"/>
+              </a:rPr>
+              <a:t>PSNR 34.00 dB | SSIM 0.9154</a:t>
+            </a:r>
+            <a:endParaRPr lang="en-US" sz="1050" dirty="0"/>
+          </a:p>
+        </p:txBody>
+      </p:sp>
+      <p:sp>
+        <p:nvSpPr>
+          <p:cNvPr id="18" name="Text 12"/>
+          <p:cNvSpPr/>
+          <p:nvPr/>
+        </p:nvSpPr>
+        <p:spPr>
+          <a:xfrm>
+            <a:off x="457200" y="6446520"/>
+            <a:ext cx="7315200" cy="274320"/>
+          </a:xfrm>
+          <a:prstGeom prst="rect">
+            <a:avLst/>
+          </a:prstGeom>
+          <a:noFill/>
+          <a:ln/>
+        </p:spPr>
+        <p:txBody>
+          <a:bodyPr wrap="square" rtlCol="0" anchor="ctr"/>
+          <a:lstStyle/>
+          <a:p>
+            <a:pPr marL="0" indent="0">
+              <a:buNone/>
+            </a:pPr>
+            <a:r>
+              <a:rPr lang="en-US" sz="900" dirty="0">
+                <a:solidFill>
+                  <a:srgbClr val="5C7285"/>
+                </a:solidFill>
+                <a:latin typeface="Calibri" pitchFamily="34" charset="0"/>
+                <a:ea typeface="Calibri" pitchFamily="34" charset="-122"/>
+                <a:cs typeface="Calibri" pitchFamily="34" charset="-120"/>
+              </a:rPr>
+              <a:t>Group H  |  Computational Imaging 2025-26</a:t>
+            </a:r>
+            <a:endParaRPr lang="en-US" sz="900" dirty="0"/>
+          </a:p>
+        </p:txBody>
+      </p:sp>
+      <p:sp>
+        <p:nvSpPr>
+          <p:cNvPr id="19" name="Text 13"/>
+          <p:cNvSpPr/>
+          <p:nvPr/>
+        </p:nvSpPr>
+        <p:spPr>
+          <a:xfrm>
+            <a:off x="11274552" y="6446520"/>
+            <a:ext cx="457200" cy="274320"/>
+          </a:xfrm>
+          <a:prstGeom prst="rect">
+            <a:avLst/>
+          </a:prstGeom>
+          <a:noFill/>
+          <a:ln/>
+        </p:spPr>
+        <p:txBody>
+          <a:bodyPr wrap="square" rtlCol="0" anchor="ctr"/>
+          <a:lstStyle/>
+          <a:p>
+            <a:pPr marL="0" indent="0" algn="r">
+              <a:buNone/>
+            </a:pPr>
+            <a:r>
+              <a:rPr lang="en-US" sz="900" dirty="0">
+                <a:solidFill>
+                  <a:srgbClr val="5C7285"/>
+                </a:solidFill>
+                <a:latin typeface="Calibri" pitchFamily="34" charset="0"/>
+                <a:ea typeface="Calibri" pitchFamily="34" charset="-122"/>
+                <a:cs typeface="Calibri" pitchFamily="34" charset="-120"/>
+              </a:rPr>
+              <a:t>12</a:t>
+            </a:r>
+            <a:endParaRPr lang="en-US" sz="900" dirty="0"/>
+          </a:p>
+        </p:txBody>
+      </p:sp>
+      <p:sp>
+        <p:nvSpPr>
+          <p:cNvPr id="21" name="object 9">
+            <a:extLst>
+              <a:ext uri="{FF2B5EF4-FFF2-40B4-BE49-F238E27FC236}">
+                <a16:creationId xmlns:a16="http://schemas.microsoft.com/office/drawing/2014/main" id="{964A8F11-0F4C-8ABC-FA4A-7D38A973C5C0}"/>
               </a:ext>
             </a:extLst>
           </p:cNvPr>

--- a/Presentazione.pptx
+++ b/Presentazione.pptx
@@ -21473,8 +21473,8 @@
         </p:nvSpPr>
         <p:spPr>
           <a:xfrm>
-            <a:off x="7847044" y="2080727"/>
-            <a:ext cx="3765835" cy="2519266"/>
+            <a:off x="7847044" y="1026368"/>
+            <a:ext cx="3765835" cy="4879910"/>
           </a:xfrm>
           <a:prstGeom prst="roundRect">
             <a:avLst>
@@ -21672,8 +21672,8 @@
         </p:nvSpPr>
         <p:spPr>
           <a:xfrm>
-            <a:off x="8144132" y="1874520"/>
-            <a:ext cx="3359020" cy="2948473"/>
+            <a:off x="8144132" y="1376732"/>
+            <a:ext cx="3359020" cy="4179181"/>
           </a:xfrm>
           <a:prstGeom prst="rect">
             <a:avLst/>
@@ -21709,71 +21709,289 @@
             </a:r>
             <a:r>
               <a:rPr lang="it-IT" sz="1400" b="1" dirty="0"/>
-              <a:t> Gates </a:t>
+              <a:t> Gates:</a:t>
+            </a:r>
+          </a:p>
+          <a:p>
+            <a:pPr marL="285750" indent="-285750">
+              <a:buFont typeface="Arial" panose="020B0604020202020204" pitchFamily="34" charset="0"/>
+              <a:buChar char="•"/>
+            </a:pPr>
+            <a:r>
+              <a:rPr lang="it-IT" sz="1400" b="1" dirty="0" err="1"/>
+              <a:t>Downsampling</a:t>
+            </a:r>
+            <a:r>
+              <a:rPr lang="it-IT" sz="1400" b="1" dirty="0"/>
+              <a:t>:</a:t>
             </a:r>
             <a:r>
               <a:rPr lang="it-IT" sz="1400" dirty="0"/>
-              <a:t>for image </a:t>
+              <a:t> The image </a:t>
             </a:r>
             <a:r>
               <a:rPr lang="it-IT" sz="1400" dirty="0" err="1"/>
-              <a:t>reconstruction</a:t>
-            </a:r>
-            <a:r>
-              <a:rPr lang="it-IT" sz="1400" dirty="0"/>
-              <a:t>. The encoder </a:t>
-            </a:r>
-            <a:r>
-              <a:rPr lang="it-IT" sz="1400" dirty="0" err="1"/>
-              <a:t>extracts</a:t>
-            </a:r>
-            <a:r>
-              <a:rPr lang="it-IT" sz="1400" dirty="0"/>
-              <a:t> multi-scale features, </a:t>
-            </a:r>
-            <a:r>
-              <a:rPr lang="it-IT" sz="1400" dirty="0" err="1"/>
-              <a:t>while</a:t>
-            </a:r>
-            <a:r>
-              <a:rPr lang="it-IT" sz="1400" dirty="0"/>
-              <a:t> the decoder </a:t>
-            </a:r>
-            <a:r>
-              <a:rPr lang="it-IT" sz="1400" dirty="0" err="1"/>
-              <a:t>reconstructs</a:t>
-            </a:r>
-            <a:r>
-              <a:rPr lang="it-IT" sz="1400" dirty="0"/>
-              <a:t> the image </a:t>
-            </a:r>
-            <a:r>
-              <a:rPr lang="it-IT" sz="1400" dirty="0" err="1"/>
-              <a:t>using</a:t>
-            </a:r>
-            <a:r>
-              <a:rPr lang="it-IT" sz="1400" dirty="0"/>
-              <a:t> skip connections and </a:t>
-            </a:r>
-            <a:r>
-              <a:rPr lang="it-IT" sz="1400" dirty="0" err="1"/>
-              <a:t>attention</a:t>
+              <a:t>gets</a:t>
             </a:r>
             <a:r>
               <a:rPr lang="it-IT" sz="1400" dirty="0"/>
               <a:t> </a:t>
             </a:r>
             <a:r>
+              <a:rPr lang="it-IT" sz="1400" b="1" dirty="0" err="1"/>
+              <a:t>smaller</a:t>
+            </a:r>
+            <a:r>
+              <a:rPr lang="it-IT" sz="1400" dirty="0"/>
+              <a:t>, </a:t>
+            </a:r>
+            <a:r>
               <a:rPr lang="it-IT" sz="1400" dirty="0" err="1"/>
-              <a:t>mechanisms</a:t>
+              <a:t>but</a:t>
             </a:r>
             <a:r>
               <a:rPr lang="it-IT" sz="1400" dirty="0"/>
-              <a:t> to </a:t>
+              <a:t> </a:t>
             </a:r>
             <a:r>
               <a:rPr lang="it-IT" sz="1400" dirty="0" err="1"/>
-              <a:t>preserve</a:t>
+              <a:t>it</a:t>
+            </a:r>
+            <a:r>
+              <a:rPr lang="it-IT" sz="1400" dirty="0"/>
+              <a:t> </a:t>
+            </a:r>
+            <a:r>
+              <a:rPr lang="it-IT" sz="1400" dirty="0" err="1"/>
+              <a:t>learns</a:t>
+            </a:r>
+            <a:r>
+              <a:rPr lang="it-IT" sz="1400" dirty="0"/>
+              <a:t> </a:t>
+            </a:r>
+            <a:r>
+              <a:rPr lang="it-IT" sz="1400" b="1" dirty="0"/>
+              <a:t>more features</a:t>
+            </a:r>
+            <a:r>
+              <a:rPr lang="it-IT" sz="1400" dirty="0"/>
+              <a:t> (</a:t>
+            </a:r>
+            <a:r>
+              <a:rPr lang="it-IT" sz="1400" dirty="0" err="1"/>
+              <a:t>channels</a:t>
+            </a:r>
+            <a:r>
+              <a:rPr lang="it-IT" sz="1400" dirty="0"/>
+              <a:t>). </a:t>
+            </a:r>
+          </a:p>
+          <a:p>
+            <a:pPr marL="285750" indent="-285750">
+              <a:buFont typeface="Arial" panose="020B0604020202020204" pitchFamily="34" charset="0"/>
+              <a:buChar char="•"/>
+            </a:pPr>
+            <a:r>
+              <a:rPr lang="it-IT" sz="1400" b="1" dirty="0" err="1"/>
+              <a:t>Bottleneck</a:t>
+            </a:r>
+            <a:r>
+              <a:rPr lang="it-IT" sz="1400" b="1" dirty="0"/>
+              <a:t>:</a:t>
+            </a:r>
+            <a:r>
+              <a:rPr lang="it-IT" sz="1400" dirty="0"/>
+              <a:t> The image </a:t>
+            </a:r>
+            <a:r>
+              <a:rPr lang="it-IT" sz="1400" dirty="0" err="1"/>
+              <a:t>is</a:t>
+            </a:r>
+            <a:r>
+              <a:rPr lang="it-IT" sz="1400" dirty="0"/>
+              <a:t> </a:t>
+            </a:r>
+            <a:r>
+              <a:rPr lang="it-IT" sz="1400" dirty="0" err="1"/>
+              <a:t>at</a:t>
+            </a:r>
+            <a:r>
+              <a:rPr lang="it-IT" sz="1400" dirty="0"/>
+              <a:t> </a:t>
+            </a:r>
+            <a:r>
+              <a:rPr lang="it-IT" sz="1400" dirty="0" err="1"/>
+              <a:t>its</a:t>
+            </a:r>
+            <a:r>
+              <a:rPr lang="it-IT" sz="1400" dirty="0"/>
+              <a:t> </a:t>
+            </a:r>
+            <a:r>
+              <a:rPr lang="it-IT" sz="1400" b="1" dirty="0" err="1"/>
+              <a:t>smallest</a:t>
+            </a:r>
+            <a:r>
+              <a:rPr lang="it-IT" sz="1400" dirty="0"/>
+              <a:t> size </a:t>
+            </a:r>
+            <a:r>
+              <a:rPr lang="it-IT" sz="1400" dirty="0" err="1"/>
+              <a:t>here</a:t>
+            </a:r>
+            <a:r>
+              <a:rPr lang="it-IT" sz="1400" dirty="0"/>
+              <a:t>.</a:t>
+            </a:r>
+          </a:p>
+          <a:p>
+            <a:pPr marL="285750" indent="-285750">
+              <a:buFont typeface="Arial" panose="020B0604020202020204" pitchFamily="34" charset="0"/>
+              <a:buChar char="•"/>
+            </a:pPr>
+            <a:r>
+              <a:rPr lang="it-IT" sz="1400" b="1" dirty="0" err="1"/>
+              <a:t>Upsampling</a:t>
+            </a:r>
+            <a:r>
+              <a:rPr lang="it-IT" sz="1400" b="1" dirty="0"/>
+              <a:t>:</a:t>
+            </a:r>
+            <a:r>
+              <a:rPr lang="it-IT" sz="1400" dirty="0"/>
+              <a:t> The opposite of </a:t>
+            </a:r>
+            <a:r>
+              <a:rPr lang="it-IT" sz="1400" dirty="0" err="1"/>
+              <a:t>downsampling</a:t>
+            </a:r>
+            <a:r>
+              <a:rPr lang="it-IT" sz="1400" dirty="0"/>
+              <a:t>. The image </a:t>
+            </a:r>
+            <a:r>
+              <a:rPr lang="it-IT" sz="1400" dirty="0" err="1"/>
+              <a:t>gets</a:t>
+            </a:r>
+            <a:r>
+              <a:rPr lang="it-IT" sz="1400" dirty="0"/>
+              <a:t> </a:t>
+            </a:r>
+            <a:r>
+              <a:rPr lang="it-IT" sz="1400" b="1" dirty="0" err="1"/>
+              <a:t>bigger</a:t>
+            </a:r>
+            <a:r>
+              <a:rPr lang="it-IT" sz="1400" dirty="0"/>
+              <a:t> </a:t>
+            </a:r>
+            <a:r>
+              <a:rPr lang="it-IT" sz="1400" dirty="0" err="1"/>
+              <a:t>again</a:t>
+            </a:r>
+            <a:r>
+              <a:rPr lang="it-IT" sz="1400" dirty="0"/>
+              <a:t> to build the </a:t>
+            </a:r>
+            <a:r>
+              <a:rPr lang="it-IT" sz="1400" dirty="0" err="1"/>
+              <a:t>final</a:t>
+            </a:r>
+            <a:r>
+              <a:rPr lang="it-IT" sz="1400" dirty="0"/>
+              <a:t> </a:t>
+            </a:r>
+            <a:r>
+              <a:rPr lang="it-IT" sz="1400" dirty="0" err="1"/>
+              <a:t>result</a:t>
+            </a:r>
+            <a:r>
+              <a:rPr lang="it-IT" sz="1400" dirty="0"/>
+              <a:t>.</a:t>
+            </a:r>
+          </a:p>
+          <a:p>
+            <a:pPr marL="285750" indent="-285750">
+              <a:buFont typeface="Arial" panose="020B0604020202020204" pitchFamily="34" charset="0"/>
+              <a:buChar char="•"/>
+            </a:pPr>
+            <a:r>
+              <a:rPr lang="it-IT" sz="1400" b="1" dirty="0"/>
+              <a:t>Skip Connections:</a:t>
+            </a:r>
+            <a:r>
+              <a:rPr lang="it-IT" sz="1400" dirty="0"/>
+              <a:t> </a:t>
+            </a:r>
+            <a:r>
+              <a:rPr lang="it-IT" sz="1400" dirty="0" err="1"/>
+              <a:t>These</a:t>
+            </a:r>
+            <a:r>
+              <a:rPr lang="it-IT" sz="1400" dirty="0"/>
+              <a:t> act like a </a:t>
+            </a:r>
+            <a:r>
+              <a:rPr lang="it-IT" sz="1400" b="1" dirty="0"/>
+              <a:t>bridge</a:t>
+            </a:r>
+            <a:r>
+              <a:rPr lang="it-IT" sz="1400" dirty="0"/>
+              <a:t>. </a:t>
+            </a:r>
+            <a:r>
+              <a:rPr lang="it-IT" sz="1400" dirty="0" err="1"/>
+              <a:t>They</a:t>
+            </a:r>
+            <a:r>
+              <a:rPr lang="it-IT" sz="1400" dirty="0"/>
+              <a:t> copy </a:t>
+            </a:r>
+            <a:r>
+              <a:rPr lang="it-IT" sz="1400" dirty="0" err="1"/>
+              <a:t>detailed</a:t>
+            </a:r>
+            <a:r>
+              <a:rPr lang="it-IT" sz="1400" dirty="0"/>
+              <a:t> information from the first part to the last part.</a:t>
+            </a:r>
+          </a:p>
+          <a:p>
+            <a:pPr marL="285750" indent="-285750">
+              <a:buFont typeface="Arial" panose="020B0604020202020204" pitchFamily="34" charset="0"/>
+              <a:buChar char="•"/>
+            </a:pPr>
+            <a:r>
+              <a:rPr lang="it-IT" sz="1400" b="1" dirty="0" err="1"/>
+              <a:t>Attention</a:t>
+            </a:r>
+            <a:r>
+              <a:rPr lang="it-IT" sz="1400" b="1" dirty="0"/>
+              <a:t> Gates:</a:t>
+            </a:r>
+            <a:r>
+              <a:rPr lang="it-IT" sz="1400" dirty="0"/>
+              <a:t> A </a:t>
+            </a:r>
+            <a:r>
+              <a:rPr lang="it-IT" sz="1400" b="1" dirty="0"/>
+              <a:t>smart filter</a:t>
+            </a:r>
+            <a:r>
+              <a:rPr lang="it-IT" sz="1400" dirty="0"/>
+              <a:t> for the bridge. </a:t>
+            </a:r>
+            <a:r>
+              <a:rPr lang="it-IT" sz="1400" dirty="0" err="1"/>
+              <a:t>It</a:t>
+            </a:r>
+            <a:r>
+              <a:rPr lang="it-IT" sz="1400" dirty="0"/>
+              <a:t> highlights the good information and </a:t>
+            </a:r>
+            <a:r>
+              <a:rPr lang="it-IT" sz="1400" dirty="0" err="1"/>
+              <a:t>ignores</a:t>
             </a:r>
             <a:r>
               <a:rPr lang="it-IT" sz="1400" dirty="0"/>
@@ -21781,27 +21999,27 @@
             </a:r>
             <a:r>
               <a:rPr lang="it-IT" sz="1400" dirty="0" err="1"/>
-              <a:t>most</a:t>
+              <a:t>useless</a:t>
             </a:r>
             <a:r>
               <a:rPr lang="it-IT" sz="1400" dirty="0"/>
-              <a:t> </a:t>
-            </a:r>
-            <a:r>
-              <a:rPr lang="it-IT" sz="1400" dirty="0" err="1"/>
-              <a:t>relevant</a:t>
-            </a:r>
-            <a:r>
+              <a:t> parts.</a:t>
+            </a:r>
+            <a:br>
               <a:rPr lang="it-IT" sz="1400" dirty="0"/>
-              <a:t> </a:t>
-            </a:r>
-            <a:r>
-              <a:rPr lang="it-IT" sz="1400" dirty="0" err="1"/>
-              <a:t>details</a:t>
-            </a:r>
+            </a:br>
+            <a:endParaRPr lang="it-IT" sz="1400" dirty="0"/>
+          </a:p>
+          <a:p>
+            <a:pPr>
+              <a:spcAft>
+                <a:spcPts val="400"/>
+              </a:spcAft>
+              <a:buSzPct val="100000"/>
+            </a:pPr>
             <a:r>
               <a:rPr lang="it-IT" sz="1400" dirty="0"/>
-              <a:t>. The network </a:t>
+              <a:t>The network </a:t>
             </a:r>
             <a:r>
               <a:rPr lang="it-IT" sz="1400" dirty="0" err="1"/>

--- a/Presentazione.pptx
+++ b/Presentazione.pptx
@@ -4807,7 +4807,29 @@
                 <a:ea typeface="Calibri" pitchFamily="34" charset="-122"/>
                 <a:cs typeface="Calibri" pitchFamily="34" charset="-120"/>
               </a:rPr>
-              <a:t>λ = 9×10⁻² is the best regularization weight across every scale/noise combination tested</a:t>
+              <a:t>λ </a:t>
+            </a:r>
+            <a:r>
+              <a:rPr lang="en-US" sz="1200">
+                <a:solidFill>
+                  <a:srgbClr val="1B2A3A"/>
+                </a:solidFill>
+                <a:latin typeface="Calibri" pitchFamily="34" charset="0"/>
+                <a:ea typeface="Calibri" pitchFamily="34" charset="-122"/>
+                <a:cs typeface="Calibri" pitchFamily="34" charset="-120"/>
+              </a:rPr>
+              <a:t>= 9e-2 </a:t>
+            </a:r>
+            <a:r>
+              <a:rPr lang="en-US" sz="1200" dirty="0">
+                <a:solidFill>
+                  <a:srgbClr val="1B2A3A"/>
+                </a:solidFill>
+                <a:latin typeface="Calibri" pitchFamily="34" charset="0"/>
+                <a:ea typeface="Calibri" pitchFamily="34" charset="-122"/>
+                <a:cs typeface="Calibri" pitchFamily="34" charset="-120"/>
+              </a:rPr>
+              <a:t>is the best regularization weight across every scale/noise combination tested</a:t>
             </a:r>
             <a:endParaRPr lang="en-US" sz="1200" dirty="0"/>
           </a:p>
